--- a/frontend/public/YoPharma_Clinical_Presentation.pptx
+++ b/frontend/public/YoPharma_Clinical_Presentation.pptx
@@ -1595,7 +1595,7 @@
         </p:nvSpPr>
         <p:spPr>
           <a:xfrm>
-            <a:off x="914400" y="1097280"/>
+            <a:off x="914400" y="914400"/>
             <a:ext cx="9144000" cy="365760"/>
           </a:xfrm>
           <a:prstGeom prst="rect">
@@ -1612,7 +1612,7 @@
               <a:buNone/>
             </a:pPr>
             <a:r>
-              <a:rPr lang="en-US" sz="1200" b="1" dirty="0">
+              <a:rPr lang="en-US" sz="1100" b="1" dirty="0">
                 <a:solidFill>
                   <a:srgbClr val="5EEAD4"/>
                 </a:solidFill>
@@ -1620,9 +1620,9 @@
                 <a:ea typeface="Arial" pitchFamily="34" charset="-122"/>
                 <a:cs typeface="Arial" pitchFamily="34" charset="-120"/>
               </a:rPr>
-              <a:t>ACADEMIC CLINICAL PHARMACY SUITE</a:t>
-            </a:r>
-            <a:endParaRPr lang="en-US" sz="1200" dirty="0"/>
+              <a:t>ACADEMIC CLINICAL PHARMACY PLATFORM</a:t>
+            </a:r>
+            <a:endParaRPr lang="en-US" sz="1100" dirty="0"/>
           </a:p>
         </p:txBody>
       </p:sp>
@@ -1634,24 +1634,24 @@
         </p:nvSpPr>
         <p:spPr>
           <a:xfrm>
-            <a:off x="914400" y="1554480"/>
-            <a:ext cx="10058400" cy="1005840"/>
-          </a:xfrm>
-          <a:prstGeom prst="rect">
-            <a:avLst/>
-          </a:prstGeom>
-          <a:noFill/>
-          <a:ln/>
-        </p:spPr>
-        <p:txBody>
-          <a:bodyPr wrap="square" rtlCol="0" anchor="ctr"/>
-          <a:lstStyle/>
-          <a:p>
-            <a:pPr indent="0" marL="0">
-              <a:buNone/>
-            </a:pPr>
-            <a:r>
-              <a:rPr lang="en-US" sz="4600" b="1" dirty="0">
+            <a:off x="914400" y="1371600"/>
+            <a:ext cx="10332720" cy="1005840"/>
+          </a:xfrm>
+          <a:prstGeom prst="rect">
+            <a:avLst/>
+          </a:prstGeom>
+          <a:noFill/>
+          <a:ln/>
+        </p:spPr>
+        <p:txBody>
+          <a:bodyPr wrap="square" rtlCol="0" anchor="ctr"/>
+          <a:lstStyle/>
+          <a:p>
+            <a:pPr indent="0" marL="0">
+              <a:buNone/>
+            </a:pPr>
+            <a:r>
+              <a:rPr lang="en-US" sz="3200" b="1" dirty="0">
                 <a:solidFill>
                   <a:srgbClr val="FFFFFF"/>
                 </a:solidFill>
@@ -1659,9 +1659,9 @@
                 <a:ea typeface="Arial" pitchFamily="34" charset="-122"/>
                 <a:cs typeface="Arial" pitchFamily="34" charset="-120"/>
               </a:rPr>
-              <a:t>YoPharma</a:t>
-            </a:r>
-            <a:endParaRPr lang="en-US" sz="4600" dirty="0"/>
+              <a:t>YoPharma — الشرح الشامل لواجهات ومميزات المنصة</a:t>
+            </a:r>
+            <a:endParaRPr lang="en-US" sz="3200" dirty="0"/>
           </a:p>
         </p:txBody>
       </p:sp>
@@ -1673,27 +1673,24 @@
         </p:nvSpPr>
         <p:spPr>
           <a:xfrm>
-            <a:off x="914400" y="2560320"/>
-            <a:ext cx="10058400" cy="1097280"/>
-          </a:xfrm>
-          <a:prstGeom prst="rect">
-            <a:avLst/>
-          </a:prstGeom>
-          <a:noFill/>
-          <a:ln/>
-        </p:spPr>
-        <p:txBody>
-          <a:bodyPr wrap="square" rtlCol="0" anchor="ctr"/>
-          <a:lstStyle/>
-          <a:p>
-            <a:pPr indent="0" marL="0">
-              <a:lnSpc>
-                <a:spcPts val="2400"/>
-              </a:lnSpc>
-              <a:buNone/>
-            </a:pPr>
-            <a:r>
-              <a:rPr lang="en-US" sz="1800" dirty="0">
+            <a:off x="914400" y="2377440"/>
+            <a:ext cx="10332720" cy="731520"/>
+          </a:xfrm>
+          <a:prstGeom prst="rect">
+            <a:avLst/>
+          </a:prstGeom>
+          <a:noFill/>
+          <a:ln/>
+        </p:spPr>
+        <p:txBody>
+          <a:bodyPr wrap="square" rtlCol="0" anchor="ctr"/>
+          <a:lstStyle/>
+          <a:p>
+            <a:pPr indent="0" marL="0">
+              <a:buNone/>
+            </a:pPr>
+            <a:r>
+              <a:rPr lang="en-US" sz="1500" dirty="0">
                 <a:solidFill>
                   <a:srgbClr val="94A3B8"/>
                 </a:solidFill>
@@ -1701,29 +1698,9 @@
                 <a:ea typeface="Arial" pitchFamily="34" charset="-122"/>
                 <a:cs typeface="Arial" pitchFamily="34" charset="-120"/>
               </a:rPr>
-              <a:t>Evidence-Based Decision Support &amp; Medication Safety Platform</a:t>
-            </a:r>
-            <a:endParaRPr lang="en-US" sz="1800" dirty="0"/>
-          </a:p>
-          <a:p>
-            <a:pPr indent="0" marL="0">
-              <a:lnSpc>
-                <a:spcPts val="2400"/>
-              </a:lnSpc>
-              <a:buNone/>
-            </a:pPr>
-            <a:r>
-              <a:rPr lang="en-US" sz="1800" dirty="0">
-                <a:solidFill>
-                  <a:srgbClr val="94A3B8"/>
-                </a:solidFill>
-                <a:latin typeface="Arial" pitchFamily="34" charset="0"/>
-                <a:ea typeface="Arial" pitchFamily="34" charset="-122"/>
-                <a:cs typeface="Arial" pitchFamily="34" charset="-120"/>
-              </a:rPr>
-              <a:t>المرجع الصيدلاني السريري الذكي لفحص التداخلات وبدائل الأدوية في مصر</a:t>
-            </a:r>
-            <a:endParaRPr lang="en-US" sz="1800" dirty="0"/>
+              <a:t>دليل تشريحي لكل خانة وواجهة في الموقع: المشكلة السريرية، طريقة الحل، وعناصر التحكم والأسهم</a:t>
+            </a:r>
+            <a:endParaRPr lang="en-US" sz="1500" dirty="0"/>
           </a:p>
         </p:txBody>
       </p:sp>
@@ -1735,12 +1712,12 @@
         </p:nvSpPr>
         <p:spPr>
           <a:xfrm>
-            <a:off x="914400" y="4023360"/>
-            <a:ext cx="10332720" cy="1737360"/>
+            <a:off x="914400" y="3474720"/>
+            <a:ext cx="10332720" cy="2468880"/>
           </a:xfrm>
           <a:prstGeom prst="roundRect">
             <a:avLst>
-              <a:gd name="adj" fmla="val 7895"/>
+              <a:gd name="adj" fmla="val 4444"/>
             </a:avLst>
           </a:prstGeom>
           <a:solidFill>
@@ -1762,8 +1739,8 @@
         </p:nvSpPr>
         <p:spPr>
           <a:xfrm>
-            <a:off x="1188720" y="4206240"/>
-            <a:ext cx="9784080" cy="1371600"/>
+            <a:off x="1188720" y="3657600"/>
+            <a:ext cx="9784080" cy="2103120"/>
           </a:xfrm>
           <a:prstGeom prst="rect">
             <a:avLst/>
@@ -1777,7 +1754,7 @@
           <a:p>
             <a:pPr indent="0" marL="0">
               <a:lnSpc>
-                <a:spcPts val="2200"/>
+                <a:spcPts val="1700"/>
               </a:lnSpc>
               <a:buNone/>
             </a:pPr>
@@ -1790,16 +1767,17 @@
                 <a:ea typeface="Arial" pitchFamily="34" charset="-122"/>
                 <a:cs typeface="Arial" pitchFamily="34" charset="-120"/>
               </a:rPr>
-              <a:t>Academic Affiliation: </a:t>
+              <a:t>🏥 الوحدات والواجهات المغطاة في هذا العرض:
+</a:t>
             </a:r>
             <a:pPr indent="0" marL="0">
               <a:lnSpc>
-                <a:spcPts val="2200"/>
+                <a:spcPts val="1700"/>
               </a:lnSpc>
               <a:buNone/>
             </a:pPr>
             <a:r>
-              <a:rPr lang="en-US" sz="1300" dirty="0">
+              <a:rPr lang="en-US" sz="1100" dirty="0">
                 <a:solidFill>
                   <a:srgbClr val="FFFFFF"/>
                 </a:solidFill>
@@ -1807,34 +1785,35 @@
                 <a:ea typeface="Arial" pitchFamily="34" charset="-122"/>
                 <a:cs typeface="Arial" pitchFamily="34" charset="-120"/>
               </a:rPr>
-              <a:t>Egyptian Chinese University (ECU) — Faculty of Pharmacy
+              <a:t>1. الصفحة الرئيسية وشريط الأوامر السريع (Quick Clinical Command Bar)
 </a:t>
             </a:r>
             <a:pPr indent="0" marL="0">
               <a:lnSpc>
-                <a:spcPts val="2200"/>
+                <a:spcPts val="1700"/>
               </a:lnSpc>
               <a:buNone/>
             </a:pPr>
             <a:r>
-              <a:rPr lang="en-US" sz="1300" b="1" dirty="0">
-                <a:solidFill>
-                  <a:srgbClr val="5EEAD4"/>
-                </a:solidFill>
-                <a:latin typeface="Arial" pitchFamily="34" charset="0"/>
-                <a:ea typeface="Arial" pitchFamily="34" charset="-122"/>
-                <a:cs typeface="Arial" pitchFamily="34" charset="-120"/>
-              </a:rPr>
-              <a:t>Developed by: </a:t>
+              <a:rPr lang="en-US" sz="1100" dirty="0">
+                <a:solidFill>
+                  <a:srgbClr val="FFFFFF"/>
+                </a:solidFill>
+                <a:latin typeface="Arial" pitchFamily="34" charset="0"/>
+                <a:ea typeface="Arial" pitchFamily="34" charset="-122"/>
+                <a:cs typeface="Arial" pitchFamily="34" charset="-120"/>
+              </a:rPr>
+              <a:t>2. سلة الروشتة التفاعلية وفحص التداخلات الدوائية (Drug-Drug Matrix &amp; Triage)
+</a:t>
             </a:r>
             <a:pPr indent="0" marL="0">
               <a:lnSpc>
-                <a:spcPts val="2200"/>
+                <a:spcPts val="1700"/>
               </a:lnSpc>
               <a:buNone/>
             </a:pPr>
             <a:r>
-              <a:rPr lang="en-US" sz="1300" dirty="0">
+              <a:rPr lang="en-US" sz="1100" dirty="0">
                 <a:solidFill>
                   <a:srgbClr val="FFFFFF"/>
                 </a:solidFill>
@@ -1842,34 +1821,35 @@
                 <a:ea typeface="Arial" pitchFamily="34" charset="-122"/>
                 <a:cs typeface="Arial" pitchFamily="34" charset="-120"/>
               </a:rPr>
-              <a:t>Youssef Mohamed (Clinical Pharmacy Research Initiative)
+              <a:t>3. تفاعلات الأغذية وتوقيت الجرعات والمشروبات الممنوعة (Food Timing &amp; Dietary Precautions)
 </a:t>
             </a:r>
             <a:pPr indent="0" marL="0">
               <a:lnSpc>
-                <a:spcPts val="2200"/>
+                <a:spcPts val="1700"/>
               </a:lnSpc>
               <a:buNone/>
             </a:pPr>
             <a:r>
-              <a:rPr lang="en-US" sz="1300" b="1" dirty="0">
-                <a:solidFill>
-                  <a:srgbClr val="5EEAD4"/>
-                </a:solidFill>
-                <a:latin typeface="Arial" pitchFamily="34" charset="0"/>
-                <a:ea typeface="Arial" pitchFamily="34" charset="-122"/>
-                <a:cs typeface="Arial" pitchFamily="34" charset="-120"/>
-              </a:rPr>
-              <a:t>Core Architecture: </a:t>
+              <a:rPr lang="en-US" sz="1100" dirty="0">
+                <a:solidFill>
+                  <a:srgbClr val="FFFFFF"/>
+                </a:solidFill>
+                <a:latin typeface="Arial" pitchFamily="34" charset="0"/>
+                <a:ea typeface="Arial" pitchFamily="34" charset="-122"/>
+                <a:cs typeface="Arial" pitchFamily="34" charset="-120"/>
+              </a:rPr>
+              <a:t>4. دليل ومقيّم المقاييس الحيوية والتحاليل المخبرية (22 Clinical Biomarkers Evaluator)
+</a:t>
             </a:r>
             <a:pPr indent="0" marL="0">
               <a:lnSpc>
-                <a:spcPts val="2200"/>
+                <a:spcPts val="1700"/>
               </a:lnSpc>
               <a:buNone/>
             </a:pPr>
             <a:r>
-              <a:rPr lang="en-US" sz="1300" dirty="0">
+              <a:rPr lang="en-US" sz="1100" dirty="0">
                 <a:solidFill>
                   <a:srgbClr val="FFFFFF"/>
                 </a:solidFill>
@@ -1877,9 +1857,45 @@
                 <a:ea typeface="Arial" pitchFamily="34" charset="-122"/>
                 <a:cs typeface="Arial" pitchFamily="34" charset="-120"/>
               </a:rPr>
-              <a:t>Sub-millisecond Multi-Tier Cache + Dual AR/EN Realtime Engine</a:t>
-            </a:r>
-            <a:endParaRPr lang="en-US" sz="1300" dirty="0"/>
+              <a:t>5. دليل البدائل والمثائل والأسعار في السوق المصري (Egyptian Drug Alternatives &amp; Pricing)
+</a:t>
+            </a:r>
+            <a:pPr indent="0" marL="0">
+              <a:lnSpc>
+                <a:spcPts val="1700"/>
+              </a:lnSpc>
+              <a:buNone/>
+            </a:pPr>
+            <a:r>
+              <a:rPr lang="en-US" sz="1100" dirty="0">
+                <a:solidFill>
+                  <a:srgbClr val="FFFFFF"/>
+                </a:solidFill>
+                <a:latin typeface="Arial" pitchFamily="34" charset="0"/>
+                <a:ea typeface="Arial" pitchFamily="34" charset="-122"/>
+                <a:cs typeface="Arial" pitchFamily="34" charset="-120"/>
+              </a:rPr>
+              <a:t>6. أمان الأمراض المزمنة وموانع الاستعمال (Chronic Disease Contraindications)
+</a:t>
+            </a:r>
+            <a:pPr indent="0" marL="0">
+              <a:lnSpc>
+                <a:spcPts val="1700"/>
+              </a:lnSpc>
+              <a:buNone/>
+            </a:pPr>
+            <a:r>
+              <a:rPr lang="en-US" sz="1100" dirty="0">
+                <a:solidFill>
+                  <a:srgbClr val="FFFFFF"/>
+                </a:solidFill>
+                <a:latin typeface="Arial" pitchFamily="34" charset="0"/>
+                <a:ea typeface="Arial" pitchFamily="34" charset="-122"/>
+                <a:cs typeface="Arial" pitchFamily="34" charset="-120"/>
+              </a:rPr>
+              <a:t>7. مصفوفة المقارنة الدوائية المباشرة وجهاً لوجه (Side-by-Side Drug Comparison)</a:t>
+            </a:r>
+            <a:endParaRPr lang="en-US" sz="1100" dirty="0"/>
           </a:p>
         </p:txBody>
       </p:sp>
@@ -1923,24 +1939,24 @@
         </p:nvSpPr>
         <p:spPr>
           <a:xfrm>
-            <a:off x="731520" y="365760"/>
-            <a:ext cx="9144000" cy="274320"/>
-          </a:xfrm>
-          <a:prstGeom prst="rect">
-            <a:avLst/>
-          </a:prstGeom>
-          <a:noFill/>
-          <a:ln/>
-        </p:spPr>
-        <p:txBody>
-          <a:bodyPr wrap="square" rtlCol="0" anchor="ctr"/>
-          <a:lstStyle/>
-          <a:p>
-            <a:pPr indent="0" marL="0">
-              <a:buNone/>
-            </a:pPr>
-            <a:r>
-              <a:rPr lang="en-US" sz="1000" b="1" dirty="0">
+            <a:off x="548640" y="320040"/>
+            <a:ext cx="9144000" cy="228600"/>
+          </a:xfrm>
+          <a:prstGeom prst="rect">
+            <a:avLst/>
+          </a:prstGeom>
+          <a:noFill/>
+          <a:ln/>
+        </p:spPr>
+        <p:txBody>
+          <a:bodyPr wrap="square" rtlCol="0" anchor="ctr"/>
+          <a:lstStyle/>
+          <a:p>
+            <a:pPr indent="0" marL="0">
+              <a:buNone/>
+            </a:pPr>
+            <a:r>
+              <a:rPr lang="en-US" sz="900" b="1" dirty="0">
                 <a:solidFill>
                   <a:srgbClr val="0D9488"/>
                 </a:solidFill>
@@ -1948,9 +1964,9 @@
                 <a:ea typeface="Arial" pitchFamily="34" charset="-122"/>
                 <a:cs typeface="Arial" pitchFamily="34" charset="-120"/>
               </a:rPr>
-              <a:t>YOPHARMA | CLINICAL PHARMACY SUITE</a:t>
-            </a:r>
-            <a:endParaRPr lang="en-US" sz="1000" dirty="0"/>
+              <a:t>YOPHARMA | دليل واجهات ومميزات المنصة</a:t>
+            </a:r>
+            <a:endParaRPr lang="en-US" sz="900" dirty="0"/>
           </a:p>
         </p:txBody>
       </p:sp>
@@ -1962,24 +1978,24 @@
         </p:nvSpPr>
         <p:spPr>
           <a:xfrm>
-            <a:off x="731520" y="640080"/>
-            <a:ext cx="10058400" cy="548640"/>
-          </a:xfrm>
-          <a:prstGeom prst="rect">
-            <a:avLst/>
-          </a:prstGeom>
-          <a:noFill/>
-          <a:ln/>
-        </p:spPr>
-        <p:txBody>
-          <a:bodyPr wrap="square" rtlCol="0" anchor="ctr"/>
-          <a:lstStyle/>
-          <a:p>
-            <a:pPr indent="0" marL="0">
-              <a:buNone/>
-            </a:pPr>
-            <a:r>
-              <a:rPr lang="en-US" sz="2200" b="1" dirty="0">
+            <a:off x="548640" y="548640"/>
+            <a:ext cx="10972800" cy="502920"/>
+          </a:xfrm>
+          <a:prstGeom prst="rect">
+            <a:avLst/>
+          </a:prstGeom>
+          <a:noFill/>
+          <a:ln/>
+        </p:spPr>
+        <p:txBody>
+          <a:bodyPr wrap="square" rtlCol="0" anchor="ctr"/>
+          <a:lstStyle/>
+          <a:p>
+            <a:pPr indent="0" marL="0">
+              <a:buNone/>
+            </a:pPr>
+            <a:r>
+              <a:rPr lang="en-US" sz="1800" b="1" dirty="0">
                 <a:solidFill>
                   <a:srgbClr val="0F172A"/>
                 </a:solidFill>
@@ -1987,9 +2003,9 @@
                 <a:ea typeface="Arial" pitchFamily="34" charset="-122"/>
                 <a:cs typeface="Arial" pitchFamily="34" charset="-120"/>
               </a:rPr>
-              <a:t>1. Executive Summary &amp; Clinical Need</a:t>
-            </a:r>
-            <a:endParaRPr lang="en-US" sz="2200" dirty="0"/>
+              <a:t>1. الواجهة الرئيسية وشريط البحث السريري السريع</a:t>
+            </a:r>
+            <a:endParaRPr lang="en-US" sz="1800" dirty="0"/>
           </a:p>
         </p:txBody>
       </p:sp>
@@ -2001,16 +2017,16 @@
         </p:nvSpPr>
         <p:spPr>
           <a:xfrm>
-            <a:off x="731520" y="1234440"/>
-            <a:ext cx="10698480" cy="0"/>
+            <a:off x="548640" y="1097280"/>
+            <a:ext cx="11064240" cy="0"/>
           </a:xfrm>
           <a:prstGeom prst="line">
             <a:avLst/>
           </a:prstGeom>
           <a:noFill/>
-          <a:ln w="19050">
+          <a:ln w="15240">
             <a:solidFill>
-              <a:srgbClr val="E2E8F0"/>
+              <a:srgbClr val="CBD5E1"/>
             </a:solidFill>
             <a:prstDash val="solid"/>
           </a:ln>
@@ -2024,12 +2040,12 @@
         </p:nvSpPr>
         <p:spPr>
           <a:xfrm>
-            <a:off x="731520" y="1463040"/>
-            <a:ext cx="5120640" cy="4663440"/>
+            <a:off x="548640" y="1234440"/>
+            <a:ext cx="4389120" cy="5029200"/>
           </a:xfrm>
           <a:prstGeom prst="roundRect">
             <a:avLst>
-              <a:gd name="adj" fmla="val 2353"/>
+              <a:gd name="adj" fmla="val 2083"/>
             </a:avLst>
           </a:prstGeom>
           <a:solidFill>
@@ -2037,7 +2053,7 @@
           </a:solidFill>
           <a:ln w="12700">
             <a:solidFill>
-              <a:srgbClr val="E2E8F0"/>
+              <a:srgbClr val="CBD5E1"/>
             </a:solidFill>
             <a:prstDash val="solid"/>
           </a:ln>
@@ -2051,24 +2067,24 @@
         </p:nvSpPr>
         <p:spPr>
           <a:xfrm>
-            <a:off x="1005840" y="1645920"/>
-            <a:ext cx="4572000" cy="365760"/>
-          </a:xfrm>
-          <a:prstGeom prst="rect">
-            <a:avLst/>
-          </a:prstGeom>
-          <a:noFill/>
-          <a:ln/>
-        </p:spPr>
-        <p:txBody>
-          <a:bodyPr wrap="square" rtlCol="0" anchor="ctr"/>
-          <a:lstStyle/>
-          <a:p>
-            <a:pPr indent="0" marL="0">
-              <a:buNone/>
-            </a:pPr>
-            <a:r>
-              <a:rPr lang="en-US" sz="1600" b="1" dirty="0">
+            <a:off x="731520" y="1371600"/>
+            <a:ext cx="4023360" cy="320040"/>
+          </a:xfrm>
+          <a:prstGeom prst="rect">
+            <a:avLst/>
+          </a:prstGeom>
+          <a:noFill/>
+          <a:ln/>
+        </p:spPr>
+        <p:txBody>
+          <a:bodyPr wrap="square" rtlCol="0" anchor="ctr"/>
+          <a:lstStyle/>
+          <a:p>
+            <a:pPr indent="0" marL="0">
+              <a:buNone/>
+            </a:pPr>
+            <a:r>
+              <a:rPr lang="en-US" sz="1300" b="1" dirty="0">
                 <a:solidFill>
                   <a:srgbClr val="DC2626"/>
                 </a:solidFill>
@@ -2076,9 +2092,9 @@
                 <a:ea typeface="Arial" pitchFamily="34" charset="-122"/>
                 <a:cs typeface="Arial" pitchFamily="34" charset="-120"/>
               </a:rPr>
-              <a:t>⚠️  The Clinical Challenge</a:t>
-            </a:r>
-            <a:endParaRPr lang="en-US" sz="1600" dirty="0"/>
+              <a:t>⚠️ المشكلة الواقعية:</a:t>
+            </a:r>
+            <a:endParaRPr lang="en-US" sz="1300" dirty="0"/>
           </a:p>
         </p:txBody>
       </p:sp>
@@ -2090,24 +2106,27 @@
         </p:nvSpPr>
         <p:spPr>
           <a:xfrm>
-            <a:off x="1005840" y="2103120"/>
-            <a:ext cx="4572000" cy="3840480"/>
-          </a:xfrm>
-          <a:prstGeom prst="rect">
-            <a:avLst/>
-          </a:prstGeom>
-          <a:noFill/>
-          <a:ln/>
-        </p:spPr>
-        <p:txBody>
-          <a:bodyPr wrap="square" rtlCol="0" anchor="ctr"/>
-          <a:lstStyle/>
-          <a:p>
-            <a:pPr indent="0" marL="0">
-              <a:buNone/>
-            </a:pPr>
-            <a:r>
-              <a:rPr lang="en-US" sz="1100" b="1" dirty="0">
+            <a:off x="731520" y="1691640"/>
+            <a:ext cx="4023360" cy="1097280"/>
+          </a:xfrm>
+          <a:prstGeom prst="rect">
+            <a:avLst/>
+          </a:prstGeom>
+          <a:noFill/>
+          <a:ln/>
+        </p:spPr>
+        <p:txBody>
+          <a:bodyPr wrap="square" rtlCol="0" anchor="ctr"/>
+          <a:lstStyle/>
+          <a:p>
+            <a:pPr indent="0" marL="0">
+              <a:lnSpc>
+                <a:spcPts val="1500"/>
+              </a:lnSpc>
+              <a:buNone/>
+            </a:pPr>
+            <a:r>
+              <a:rPr lang="en-US" sz="1050" dirty="0">
                 <a:solidFill>
                   <a:srgbClr val="0F172A"/>
                 </a:solidFill>
@@ -2115,14 +2134,80 @@
                 <a:ea typeface="Arial" pitchFamily="34" charset="-122"/>
                 <a:cs typeface="Arial" pitchFamily="34" charset="-120"/>
               </a:rPr>
-              <a:t>• Polypharmacy &amp; Drug Interactions:
-</a:t>
-            </a:r>
-            <a:pPr indent="0" marL="0">
-              <a:buNone/>
-            </a:pPr>
-            <a:r>
-              <a:rPr lang="en-US" sz="1100" dirty="0">
+              <a:t>يستغرق الصيدلي وقتاً طويلاً في البحث بين مراجع ورقية أو مواقع مشتتة للوصول إلى دواء معين أثناء وجود المريض أمامه في الصيدلية أو العيادة.</a:t>
+            </a:r>
+            <a:endParaRPr lang="en-US" sz="1050" dirty="0"/>
+          </a:p>
+        </p:txBody>
+      </p:sp>
+      <p:sp>
+        <p:nvSpPr>
+          <p:cNvPr id="8" name="Text 6"/>
+          <p:cNvSpPr/>
+          <p:nvPr/>
+        </p:nvSpPr>
+        <p:spPr>
+          <a:xfrm>
+            <a:off x="731520" y="2880360"/>
+            <a:ext cx="4023360" cy="320040"/>
+          </a:xfrm>
+          <a:prstGeom prst="rect">
+            <a:avLst/>
+          </a:prstGeom>
+          <a:noFill/>
+          <a:ln/>
+        </p:spPr>
+        <p:txBody>
+          <a:bodyPr wrap="square" rtlCol="0" anchor="ctr"/>
+          <a:lstStyle/>
+          <a:p>
+            <a:pPr indent="0" marL="0">
+              <a:buNone/>
+            </a:pPr>
+            <a:r>
+              <a:rPr lang="en-US" sz="1300" b="1" dirty="0">
+                <a:solidFill>
+                  <a:srgbClr val="0F766E"/>
+                </a:solidFill>
+                <a:latin typeface="Arial" pitchFamily="34" charset="0"/>
+                <a:ea typeface="Arial" pitchFamily="34" charset="-122"/>
+                <a:cs typeface="Arial" pitchFamily="34" charset="-120"/>
+              </a:rPr>
+              <a:t>✨ كيف تحل هذه الواجهة المشكلة؟</a:t>
+            </a:r>
+            <a:endParaRPr lang="en-US" sz="1300" dirty="0"/>
+          </a:p>
+        </p:txBody>
+      </p:sp>
+      <p:sp>
+        <p:nvSpPr>
+          <p:cNvPr id="9" name="Text 7"/>
+          <p:cNvSpPr/>
+          <p:nvPr/>
+        </p:nvSpPr>
+        <p:spPr>
+          <a:xfrm>
+            <a:off x="731520" y="3200400"/>
+            <a:ext cx="4023360" cy="1371600"/>
+          </a:xfrm>
+          <a:prstGeom prst="rect">
+            <a:avLst/>
+          </a:prstGeom>
+          <a:noFill/>
+          <a:ln/>
+        </p:spPr>
+        <p:txBody>
+          <a:bodyPr wrap="square" rtlCol="0" anchor="ctr"/>
+          <a:lstStyle/>
+          <a:p>
+            <a:pPr indent="0" marL="0">
+              <a:lnSpc>
+                <a:spcPts val="1500"/>
+              </a:lnSpc>
+              <a:buNone/>
+            </a:pPr>
+            <a:r>
+              <a:rPr lang="en-US" sz="1050" dirty="0">
                 <a:solidFill>
                   <a:srgbClr val="0F172A"/>
                 </a:solidFill>
@@ -2130,124 +2215,100 @@
                 <a:ea typeface="Arial" pitchFamily="34" charset="-122"/>
                 <a:cs typeface="Arial" pitchFamily="34" charset="-120"/>
               </a:rPr>
-              <a:t>  Patients taking 3+ drugs face high risk of adverse cross-reactions and toxicity.
-</a:t>
-            </a:r>
-            <a:pPr indent="0" marL="0">
-              <a:buNone/>
-            </a:pPr>
-            <a:r>
-              <a:rPr lang="en-US" sz="1100" b="1" dirty="0">
-                <a:solidFill>
-                  <a:srgbClr val="0F172A"/>
-                </a:solidFill>
-                <a:latin typeface="Arial" pitchFamily="34" charset="0"/>
-                <a:ea typeface="Arial" pitchFamily="34" charset="-122"/>
-                <a:cs typeface="Arial" pitchFamily="34" charset="-120"/>
-              </a:rPr>
-              <a:t>• Food &amp; Meal Timing Errors:
-</a:t>
-            </a:r>
-            <a:pPr indent="0" marL="0">
-              <a:buNone/>
-            </a:pPr>
-            <a:r>
-              <a:rPr lang="en-US" sz="1100" dirty="0">
-                <a:solidFill>
-                  <a:srgbClr val="0F172A"/>
-                </a:solidFill>
-                <a:latin typeface="Arial" pitchFamily="34" charset="0"/>
-                <a:ea typeface="Arial" pitchFamily="34" charset="-122"/>
-                <a:cs typeface="Arial" pitchFamily="34" charset="-120"/>
-              </a:rPr>
-              <a:t>  Critical antibiotics &amp; cardiac drugs lose up to 70% absorption if taken with improper meals or dairy.
-</a:t>
-            </a:r>
-            <a:pPr indent="0" marL="0">
-              <a:buNone/>
-            </a:pPr>
-            <a:r>
-              <a:rPr lang="en-US" sz="1100" b="1" dirty="0">
-                <a:solidFill>
-                  <a:srgbClr val="0F172A"/>
-                </a:solidFill>
-                <a:latin typeface="Arial" pitchFamily="34" charset="0"/>
-                <a:ea typeface="Arial" pitchFamily="34" charset="-122"/>
-                <a:cs typeface="Arial" pitchFamily="34" charset="-120"/>
-              </a:rPr>
-              <a:t>• Egyptian Generic Brand Confusion:
-</a:t>
-            </a:r>
-            <a:pPr indent="0" marL="0">
-              <a:buNone/>
-            </a:pPr>
-            <a:r>
-              <a:rPr lang="en-US" sz="1100" dirty="0">
-                <a:solidFill>
-                  <a:srgbClr val="0F172A"/>
-                </a:solidFill>
-                <a:latin typeface="Arial" pitchFamily="34" charset="0"/>
-                <a:ea typeface="Arial" pitchFamily="34" charset="-122"/>
-                <a:cs typeface="Arial" pitchFamily="34" charset="-120"/>
-              </a:rPr>
-              <a:t>  Over 15,000 trade names in Egypt; finding identical chemical equivalents with price tiers is difficult.
-</a:t>
-            </a:r>
-            <a:pPr indent="0" marL="0">
-              <a:buNone/>
-            </a:pPr>
-            <a:r>
-              <a:rPr lang="en-US" sz="1100" b="1" dirty="0">
-                <a:solidFill>
-                  <a:srgbClr val="0F172A"/>
-                </a:solidFill>
-                <a:latin typeface="Arial" pitchFamily="34" charset="0"/>
-                <a:ea typeface="Arial" pitchFamily="34" charset="-122"/>
-                <a:cs typeface="Arial" pitchFamily="34" charset="-120"/>
-              </a:rPr>
-              <a:t>• Comorbidity Risks:
-</a:t>
-            </a:r>
-            <a:pPr indent="0" marL="0">
-              <a:buNone/>
-            </a:pPr>
-            <a:r>
-              <a:rPr lang="en-US" sz="1100" dirty="0">
-                <a:solidFill>
-                  <a:srgbClr val="0F172A"/>
-                </a:solidFill>
-                <a:latin typeface="Arial" pitchFamily="34" charset="0"/>
-                <a:ea typeface="Arial" pitchFamily="34" charset="-122"/>
-                <a:cs typeface="Arial" pitchFamily="34" charset="-120"/>
-              </a:rPr>
-              <a:t>  Adjusting doses for renal (CKD), hepatic, and hypertensive patients requires fast reference.</a:t>
-            </a:r>
-            <a:endParaRPr lang="en-US" sz="1100" dirty="0"/>
-          </a:p>
-        </p:txBody>
-      </p:sp>
-      <p:sp>
-        <p:nvSpPr>
-          <p:cNvPr id="8" name="Shape 6"/>
-          <p:cNvSpPr/>
-          <p:nvPr/>
-        </p:nvSpPr>
-        <p:spPr>
-          <a:xfrm>
-            <a:off x="6217920" y="1463040"/>
-            <a:ext cx="5212080" cy="4663440"/>
+              <a:t>شريط بحث فوري متصل بكاش الذاكرة (&lt; 1ms) مع اختصار لوحة المفاتيح (زر "/") وقائمة إكمال تلقائي فورية تشمل آلاف الأدوية بالاسم التجاري والمادة الفعالة مع بطاقات سريعة لأشهر أدوية السوق المصري.</a:t>
+            </a:r>
+            <a:endParaRPr lang="en-US" sz="1050" dirty="0"/>
+          </a:p>
+        </p:txBody>
+      </p:sp>
+      <p:sp>
+        <p:nvSpPr>
+          <p:cNvPr id="10" name="Shape 8"/>
+          <p:cNvSpPr/>
+          <p:nvPr/>
+        </p:nvSpPr>
+        <p:spPr>
+          <a:xfrm>
+            <a:off x="5120640" y="1234440"/>
+            <a:ext cx="6492240" cy="5029200"/>
           </a:xfrm>
           <a:prstGeom prst="roundRect">
             <a:avLst>
-              <a:gd name="adj" fmla="val 2353"/>
+              <a:gd name="adj" fmla="val 1818"/>
             </a:avLst>
           </a:prstGeom>
           <a:solidFill>
-            <a:srgbClr val="FFFFFF"/>
+            <a:srgbClr val="0F172A"/>
+          </a:solidFill>
+          <a:ln w="12700">
+            <a:solidFill>
+              <a:srgbClr val="334155"/>
+            </a:solidFill>
+            <a:prstDash val="solid"/>
+          </a:ln>
+        </p:spPr>
+      </p:sp>
+      <p:sp>
+        <p:nvSpPr>
+          <p:cNvPr id="11" name="Text 9"/>
+          <p:cNvSpPr/>
+          <p:nvPr/>
+        </p:nvSpPr>
+        <p:spPr>
+          <a:xfrm>
+            <a:off x="5303520" y="1371600"/>
+            <a:ext cx="6126480" cy="320040"/>
+          </a:xfrm>
+          <a:prstGeom prst="rect">
+            <a:avLst/>
+          </a:prstGeom>
+          <a:noFill/>
+          <a:ln/>
+        </p:spPr>
+        <p:txBody>
+          <a:bodyPr wrap="square" rtlCol="0" anchor="ctr"/>
+          <a:lstStyle/>
+          <a:p>
+            <a:pPr indent="0" marL="0">
+              <a:buNone/>
+            </a:pPr>
+            <a:r>
+              <a:rPr lang="en-US" sz="1200" b="1" dirty="0">
+                <a:solidFill>
+                  <a:srgbClr val="5EEAD4"/>
+                </a:solidFill>
+                <a:latin typeface="Arial" pitchFamily="34" charset="0"/>
+                <a:ea typeface="Arial" pitchFamily="34" charset="-122"/>
+                <a:cs typeface="Arial" pitchFamily="34" charset="-120"/>
+              </a:rPr>
+              <a:t>🖥️ تشريح عناصر واجهة البحث الرئيسية (UI Breakdown):</a:t>
+            </a:r>
+            <a:endParaRPr lang="en-US" sz="1200" dirty="0"/>
+          </a:p>
+        </p:txBody>
+      </p:sp>
+      <p:sp>
+        <p:nvSpPr>
+          <p:cNvPr id="12" name="Shape 10"/>
+          <p:cNvSpPr/>
+          <p:nvPr/>
+        </p:nvSpPr>
+        <p:spPr>
+          <a:xfrm>
+            <a:off x="5303520" y="1783080"/>
+            <a:ext cx="6126480" cy="914400"/>
+          </a:xfrm>
+          <a:prstGeom prst="roundRect">
+            <a:avLst>
+              <a:gd name="adj" fmla="val 8000"/>
+            </a:avLst>
+          </a:prstGeom>
+          <a:solidFill>
+            <a:srgbClr val="1E293B"/>
           </a:solidFill>
           <a:ln w="19050">
             <a:solidFill>
-              <a:srgbClr val="CCFBF1"/>
+              <a:srgbClr val="0D9488"/>
             </a:solidFill>
             <a:prstDash val="solid"/>
           </a:ln>
@@ -2255,197 +2316,245 @@
       </p:sp>
       <p:sp>
         <p:nvSpPr>
-          <p:cNvPr id="9" name="Text 7"/>
-          <p:cNvSpPr/>
-          <p:nvPr/>
-        </p:nvSpPr>
-        <p:spPr>
-          <a:xfrm>
-            <a:off x="6492240" y="1645920"/>
-            <a:ext cx="4663440" cy="365760"/>
-          </a:xfrm>
-          <a:prstGeom prst="rect">
-            <a:avLst/>
-          </a:prstGeom>
-          <a:noFill/>
-          <a:ln/>
-        </p:spPr>
-        <p:txBody>
-          <a:bodyPr wrap="square" rtlCol="0" anchor="ctr"/>
-          <a:lstStyle/>
-          <a:p>
-            <a:pPr indent="0" marL="0">
-              <a:buNone/>
-            </a:pPr>
-            <a:r>
-              <a:rPr lang="en-US" sz="1600" b="1" dirty="0">
-                <a:solidFill>
-                  <a:srgbClr val="0F766E"/>
-                </a:solidFill>
-                <a:latin typeface="Arial" pitchFamily="34" charset="0"/>
-                <a:ea typeface="Arial" pitchFamily="34" charset="-122"/>
-                <a:cs typeface="Arial" pitchFamily="34" charset="-120"/>
-              </a:rPr>
-              <a:t>✨  The YoPharma Solution</a:t>
-            </a:r>
-            <a:endParaRPr lang="en-US" sz="1600" dirty="0"/>
-          </a:p>
-        </p:txBody>
-      </p:sp>
-      <p:sp>
-        <p:nvSpPr>
-          <p:cNvPr id="10" name="Text 8"/>
-          <p:cNvSpPr/>
-          <p:nvPr/>
-        </p:nvSpPr>
-        <p:spPr>
-          <a:xfrm>
-            <a:off x="6492240" y="2103120"/>
-            <a:ext cx="4663440" cy="3840480"/>
-          </a:xfrm>
-          <a:prstGeom prst="rect">
-            <a:avLst/>
-          </a:prstGeom>
-          <a:noFill/>
-          <a:ln/>
-        </p:spPr>
-        <p:txBody>
-          <a:bodyPr wrap="square" rtlCol="0" anchor="ctr"/>
-          <a:lstStyle/>
-          <a:p>
-            <a:pPr indent="0" marL="0">
-              <a:buNone/>
-            </a:pPr>
-            <a:r>
-              <a:rPr lang="en-US" sz="1100" b="1" dirty="0">
-                <a:solidFill>
-                  <a:srgbClr val="0F172A"/>
-                </a:solidFill>
-                <a:latin typeface="Arial" pitchFamily="34" charset="0"/>
-                <a:ea typeface="Arial" pitchFamily="34" charset="-122"/>
-                <a:cs typeface="Arial" pitchFamily="34" charset="-120"/>
-              </a:rPr>
-              <a:t>• Unified Multi-Drug Triage:
-</a:t>
-            </a:r>
-            <a:pPr indent="0" marL="0">
-              <a:buNone/>
-            </a:pPr>
-            <a:r>
-              <a:rPr lang="en-US" sz="1100" dirty="0">
-                <a:solidFill>
-                  <a:srgbClr val="0F172A"/>
-                </a:solidFill>
-                <a:latin typeface="Arial" pitchFamily="34" charset="0"/>
-                <a:ea typeface="Arial" pitchFamily="34" charset="-122"/>
-                <a:cs typeface="Arial" pitchFamily="34" charset="-120"/>
-              </a:rPr>
-              <a:t>  Analyze entire prescriptions in &lt;2 seconds with solid high/moderate/minor risk stratification.
-</a:t>
-            </a:r>
-            <a:pPr indent="0" marL="0">
-              <a:buNone/>
-            </a:pPr>
-            <a:r>
-              <a:rPr lang="en-US" sz="1100" b="1" dirty="0">
-                <a:solidFill>
-                  <a:srgbClr val="0F172A"/>
-                </a:solidFill>
-                <a:latin typeface="Arial" pitchFamily="34" charset="0"/>
-                <a:ea typeface="Arial" pitchFamily="34" charset="-122"/>
-                <a:cs typeface="Arial" pitchFamily="34" charset="-120"/>
-              </a:rPr>
-              <a:t>• Food Schedule &amp; Restrictions:
-</a:t>
-            </a:r>
-            <a:pPr indent="0" marL="0">
-              <a:buNone/>
-            </a:pPr>
-            <a:r>
-              <a:rPr lang="en-US" sz="1100" dirty="0">
-                <a:solidFill>
-                  <a:srgbClr val="0F172A"/>
-                </a:solidFill>
-                <a:latin typeface="Arial" pitchFamily="34" charset="0"/>
-                <a:ea typeface="Arial" pitchFamily="34" charset="-122"/>
-                <a:cs typeface="Arial" pitchFamily="34" charset="-120"/>
-              </a:rPr>
-              <a:t>  Automatic meal timing and prohibited beverage alerts per medication.
-</a:t>
-            </a:r>
-            <a:pPr indent="0" marL="0">
-              <a:buNone/>
-            </a:pPr>
-            <a:r>
-              <a:rPr lang="en-US" sz="1100" b="1" dirty="0">
-                <a:solidFill>
-                  <a:srgbClr val="0F172A"/>
-                </a:solidFill>
-                <a:latin typeface="Arial" pitchFamily="34" charset="0"/>
-                <a:ea typeface="Arial" pitchFamily="34" charset="-122"/>
-                <a:cs typeface="Arial" pitchFamily="34" charset="-120"/>
-              </a:rPr>
-              <a:t>• Comprehensive Egyptian Database:
-</a:t>
-            </a:r>
-            <a:pPr indent="0" marL="0">
-              <a:buNone/>
-            </a:pPr>
-            <a:r>
-              <a:rPr lang="en-US" sz="1100" dirty="0">
-                <a:solidFill>
-                  <a:srgbClr val="0F172A"/>
-                </a:solidFill>
-                <a:latin typeface="Arial" pitchFamily="34" charset="0"/>
-                <a:ea typeface="Arial" pitchFamily="34" charset="-122"/>
-                <a:cs typeface="Arial" pitchFamily="34" charset="-120"/>
-              </a:rPr>
-              <a:t>  Exact active ingredient matching across local brands with manufacturer &amp; price tier.
-</a:t>
-            </a:r>
-            <a:pPr indent="0" marL="0">
-              <a:buNone/>
-            </a:pPr>
-            <a:r>
-              <a:rPr lang="en-US" sz="1100" b="1" dirty="0">
-                <a:solidFill>
-                  <a:srgbClr val="0F172A"/>
-                </a:solidFill>
-                <a:latin typeface="Arial" pitchFamily="34" charset="0"/>
-                <a:ea typeface="Arial" pitchFamily="34" charset="-122"/>
-                <a:cs typeface="Arial" pitchFamily="34" charset="-120"/>
-              </a:rPr>
-              <a:t>• 22 Biomarkers &amp; Vitals Guide:
-</a:t>
-            </a:r>
-            <a:pPr indent="0" marL="0">
-              <a:buNone/>
-            </a:pPr>
-            <a:r>
-              <a:rPr lang="en-US" sz="1100" dirty="0">
-                <a:solidFill>
-                  <a:srgbClr val="0F172A"/>
-                </a:solidFill>
-                <a:latin typeface="Arial" pitchFamily="34" charset="0"/>
-                <a:ea typeface="Arial" pitchFamily="34" charset="-122"/>
-                <a:cs typeface="Arial" pitchFamily="34" charset="-120"/>
-              </a:rPr>
-              <a:t>  Interactive clinical calculator for lab tests (eGFR, INR, HbA1c, CrCl).</a:t>
-            </a:r>
-            <a:endParaRPr lang="en-US" sz="1100" dirty="0"/>
-          </a:p>
-        </p:txBody>
-      </p:sp>
-      <p:sp>
-        <p:nvSpPr>
-          <p:cNvPr id="11" name="Text 9"/>
-          <p:cNvSpPr/>
-          <p:nvPr/>
-        </p:nvSpPr>
-        <p:spPr>
-          <a:xfrm>
-            <a:off x="731520" y="6400800"/>
-            <a:ext cx="10698480" cy="274320"/>
+          <p:cNvPr id="13" name="Text 11"/>
+          <p:cNvSpPr/>
+          <p:nvPr/>
+        </p:nvSpPr>
+        <p:spPr>
+          <a:xfrm>
+            <a:off x="5440680" y="1874520"/>
+            <a:ext cx="5852160" cy="731520"/>
+          </a:xfrm>
+          <a:prstGeom prst="rect">
+            <a:avLst/>
+          </a:prstGeom>
+          <a:noFill/>
+          <a:ln/>
+        </p:spPr>
+        <p:txBody>
+          <a:bodyPr wrap="square" rtlCol="0" anchor="ctr"/>
+          <a:lstStyle/>
+          <a:p>
+            <a:pPr indent="0" marL="0">
+              <a:lnSpc>
+                <a:spcPts val="1400"/>
+              </a:lnSpc>
+              <a:buNone/>
+            </a:pPr>
+            <a:r>
+              <a:rPr lang="en-US" sz="1000" b="1" dirty="0">
+                <a:solidFill>
+                  <a:srgbClr val="5EEAD4"/>
+                </a:solidFill>
+                <a:latin typeface="Arial" pitchFamily="34" charset="0"/>
+                <a:ea typeface="Arial" pitchFamily="34" charset="-122"/>
+                <a:cs typeface="Arial" pitchFamily="34" charset="-120"/>
+              </a:rPr>
+              <a:t>[1] شريط الإدخال الذكي ➔ </a:t>
+            </a:r>
+            <a:pPr indent="0" marL="0">
+              <a:lnSpc>
+                <a:spcPts val="1400"/>
+              </a:lnSpc>
+              <a:buNone/>
+            </a:pPr>
+            <a:r>
+              <a:rPr lang="en-US" sz="950" dirty="0">
+                <a:solidFill>
+                  <a:srgbClr val="FFFFFF"/>
+                </a:solidFill>
+                <a:latin typeface="Arial" pitchFamily="34" charset="0"/>
+                <a:ea typeface="Arial" pitchFamily="34" charset="-122"/>
+                <a:cs typeface="Arial" pitchFamily="34" charset="-120"/>
+              </a:rPr>
+              <a:t>يدعم البحث بالاسم التجاري (مثل Augmentin) أو العلمي (Amoxicillin) مع التركيز التلقائي بزر [/].</a:t>
+            </a:r>
+            <a:endParaRPr lang="en-US" sz="1000" dirty="0"/>
+          </a:p>
+        </p:txBody>
+      </p:sp>
+      <p:sp>
+        <p:nvSpPr>
+          <p:cNvPr id="14" name="Shape 12"/>
+          <p:cNvSpPr/>
+          <p:nvPr/>
+        </p:nvSpPr>
+        <p:spPr>
+          <a:xfrm>
+            <a:off x="5303520" y="2834640"/>
+            <a:ext cx="6126480" cy="914400"/>
+          </a:xfrm>
+          <a:prstGeom prst="roundRect">
+            <a:avLst>
+              <a:gd name="adj" fmla="val 8000"/>
+            </a:avLst>
+          </a:prstGeom>
+          <a:solidFill>
+            <a:srgbClr val="1E293B"/>
+          </a:solidFill>
+          <a:ln w="19050">
+            <a:solidFill>
+              <a:srgbClr val="38BDF8"/>
+            </a:solidFill>
+            <a:prstDash val="solid"/>
+          </a:ln>
+        </p:spPr>
+      </p:sp>
+      <p:sp>
+        <p:nvSpPr>
+          <p:cNvPr id="15" name="Text 13"/>
+          <p:cNvSpPr/>
+          <p:nvPr/>
+        </p:nvSpPr>
+        <p:spPr>
+          <a:xfrm>
+            <a:off x="5440680" y="2926080"/>
+            <a:ext cx="5852160" cy="731520"/>
+          </a:xfrm>
+          <a:prstGeom prst="rect">
+            <a:avLst/>
+          </a:prstGeom>
+          <a:noFill/>
+          <a:ln/>
+        </p:spPr>
+        <p:txBody>
+          <a:bodyPr wrap="square" rtlCol="0" anchor="ctr"/>
+          <a:lstStyle/>
+          <a:p>
+            <a:pPr indent="0" marL="0">
+              <a:lnSpc>
+                <a:spcPts val="1400"/>
+              </a:lnSpc>
+              <a:buNone/>
+            </a:pPr>
+            <a:r>
+              <a:rPr lang="en-US" sz="1000" b="1" dirty="0">
+                <a:solidFill>
+                  <a:srgbClr val="5EEAD4"/>
+                </a:solidFill>
+                <a:latin typeface="Arial" pitchFamily="34" charset="0"/>
+                <a:ea typeface="Arial" pitchFamily="34" charset="-122"/>
+                <a:cs typeface="Arial" pitchFamily="34" charset="-120"/>
+              </a:rPr>
+              <a:t>[2] قائمة الإكمال التلقائي ➔ </a:t>
+            </a:r>
+            <a:pPr indent="0" marL="0">
+              <a:lnSpc>
+                <a:spcPts val="1400"/>
+              </a:lnSpc>
+              <a:buNone/>
+            </a:pPr>
+            <a:r>
+              <a:rPr lang="en-US" sz="950" dirty="0">
+                <a:solidFill>
+                  <a:srgbClr val="FFFFFF"/>
+                </a:solidFill>
+                <a:latin typeface="Arial" pitchFamily="34" charset="0"/>
+                <a:ea typeface="Arial" pitchFamily="34" charset="-122"/>
+                <a:cs typeface="Arial" pitchFamily="34" charset="-120"/>
+              </a:rPr>
+              <a:t>تظهر أثناء الكتابة بعد حرفين فقط وتتيح التنقل بأسهم الكيبورد واختيار الدواء فوراً.</a:t>
+            </a:r>
+            <a:endParaRPr lang="en-US" sz="1000" dirty="0"/>
+          </a:p>
+        </p:txBody>
+      </p:sp>
+      <p:sp>
+        <p:nvSpPr>
+          <p:cNvPr id="16" name="Shape 14"/>
+          <p:cNvSpPr/>
+          <p:nvPr/>
+        </p:nvSpPr>
+        <p:spPr>
+          <a:xfrm>
+            <a:off x="5303520" y="3886200"/>
+            <a:ext cx="6126480" cy="914400"/>
+          </a:xfrm>
+          <a:prstGeom prst="roundRect">
+            <a:avLst>
+              <a:gd name="adj" fmla="val 8000"/>
+            </a:avLst>
+          </a:prstGeom>
+          <a:solidFill>
+            <a:srgbClr val="1E293B"/>
+          </a:solidFill>
+          <a:ln w="19050">
+            <a:solidFill>
+              <a:srgbClr val="F59E0B"/>
+            </a:solidFill>
+            <a:prstDash val="solid"/>
+          </a:ln>
+        </p:spPr>
+      </p:sp>
+      <p:sp>
+        <p:nvSpPr>
+          <p:cNvPr id="17" name="Text 15"/>
+          <p:cNvSpPr/>
+          <p:nvPr/>
+        </p:nvSpPr>
+        <p:spPr>
+          <a:xfrm>
+            <a:off x="5440680" y="3977640"/>
+            <a:ext cx="5852160" cy="731520"/>
+          </a:xfrm>
+          <a:prstGeom prst="rect">
+            <a:avLst/>
+          </a:prstGeom>
+          <a:noFill/>
+          <a:ln/>
+        </p:spPr>
+        <p:txBody>
+          <a:bodyPr wrap="square" rtlCol="0" anchor="ctr"/>
+          <a:lstStyle/>
+          <a:p>
+            <a:pPr indent="0" marL="0">
+              <a:lnSpc>
+                <a:spcPts val="1400"/>
+              </a:lnSpc>
+              <a:buNone/>
+            </a:pPr>
+            <a:r>
+              <a:rPr lang="en-US" sz="1000" b="1" dirty="0">
+                <a:solidFill>
+                  <a:srgbClr val="5EEAD4"/>
+                </a:solidFill>
+                <a:latin typeface="Arial" pitchFamily="34" charset="0"/>
+                <a:ea typeface="Arial" pitchFamily="34" charset="-122"/>
+                <a:cs typeface="Arial" pitchFamily="34" charset="-120"/>
+              </a:rPr>
+              <a:t>[3] بطاقات الأدوية الشائعة ➔ </a:t>
+            </a:r>
+            <a:pPr indent="0" marL="0">
+              <a:lnSpc>
+                <a:spcPts val="1400"/>
+              </a:lnSpc>
+              <a:buNone/>
+            </a:pPr>
+            <a:r>
+              <a:rPr lang="en-US" sz="950" dirty="0">
+                <a:solidFill>
+                  <a:srgbClr val="FFFFFF"/>
+                </a:solidFill>
+                <a:latin typeface="Arial" pitchFamily="34" charset="0"/>
+                <a:ea typeface="Arial" pitchFamily="34" charset="-122"/>
+                <a:cs typeface="Arial" pitchFamily="34" charset="-120"/>
+              </a:rPr>
+              <a:t>أزرار وصول مباشر لأشهر 6 أدوية متداولة في مصر (Augmentin, Concor, Cataflam, Glucophage, Panadol, Cipro).</a:t>
+            </a:r>
+            <a:endParaRPr lang="en-US" sz="1000" dirty="0"/>
+          </a:p>
+        </p:txBody>
+      </p:sp>
+      <p:sp>
+        <p:nvSpPr>
+          <p:cNvPr id="18" name="Text 16"/>
+          <p:cNvSpPr/>
+          <p:nvPr/>
+        </p:nvSpPr>
+        <p:spPr>
+          <a:xfrm>
+            <a:off x="548640" y="6446520"/>
+            <a:ext cx="11064240" cy="228600"/>
           </a:xfrm>
           <a:prstGeom prst="rect">
             <a:avLst/>
@@ -2461,7 +2570,7 @@
               <a:buNone/>
             </a:pPr>
             <a:r>
-              <a:rPr lang="en-US" sz="900" dirty="0">
+              <a:rPr lang="en-US" sz="850" dirty="0">
                 <a:solidFill>
                   <a:srgbClr val="64748B"/>
                 </a:solidFill>
@@ -2469,9 +2578,9 @@
                 <a:ea typeface="Arial" pitchFamily="34" charset="-122"/>
                 <a:cs typeface="Arial" pitchFamily="34" charset="-120"/>
               </a:rPr>
-              <a:t>Egyptian Chinese University (ECU) • Faculty of Pharmacy | Developed by Youssef Mohamed</a:t>
-            </a:r>
-            <a:endParaRPr lang="en-US" sz="900" dirty="0"/>
+              <a:t>كلية الصيدلة • الجامعة المصرية الصينية (ECU) | تطوير: يوسف محمد | YoPharma Clinical Suite</a:t>
+            </a:r>
+            <a:endParaRPr lang="en-US" sz="850" dirty="0"/>
           </a:p>
         </p:txBody>
       </p:sp>
@@ -2515,24 +2624,24 @@
         </p:nvSpPr>
         <p:spPr>
           <a:xfrm>
-            <a:off x="731520" y="365760"/>
-            <a:ext cx="9144000" cy="274320"/>
-          </a:xfrm>
-          <a:prstGeom prst="rect">
-            <a:avLst/>
-          </a:prstGeom>
-          <a:noFill/>
-          <a:ln/>
-        </p:spPr>
-        <p:txBody>
-          <a:bodyPr wrap="square" rtlCol="0" anchor="ctr"/>
-          <a:lstStyle/>
-          <a:p>
-            <a:pPr indent="0" marL="0">
-              <a:buNone/>
-            </a:pPr>
-            <a:r>
-              <a:rPr lang="en-US" sz="1000" b="1" dirty="0">
+            <a:off x="548640" y="320040"/>
+            <a:ext cx="9144000" cy="228600"/>
+          </a:xfrm>
+          <a:prstGeom prst="rect">
+            <a:avLst/>
+          </a:prstGeom>
+          <a:noFill/>
+          <a:ln/>
+        </p:spPr>
+        <p:txBody>
+          <a:bodyPr wrap="square" rtlCol="0" anchor="ctr"/>
+          <a:lstStyle/>
+          <a:p>
+            <a:pPr indent="0" marL="0">
+              <a:buNone/>
+            </a:pPr>
+            <a:r>
+              <a:rPr lang="en-US" sz="900" b="1" dirty="0">
                 <a:solidFill>
                   <a:srgbClr val="0D9488"/>
                 </a:solidFill>
@@ -2540,9 +2649,9 @@
                 <a:ea typeface="Arial" pitchFamily="34" charset="-122"/>
                 <a:cs typeface="Arial" pitchFamily="34" charset="-120"/>
               </a:rPr>
-              <a:t>YOPHARMA | CLINICAL PHARMACY SUITE</a:t>
-            </a:r>
-            <a:endParaRPr lang="en-US" sz="1000" dirty="0"/>
+              <a:t>YOPHARMA | دليل واجهات ومميزات المنصة</a:t>
+            </a:r>
+            <a:endParaRPr lang="en-US" sz="900" dirty="0"/>
           </a:p>
         </p:txBody>
       </p:sp>
@@ -2554,24 +2663,24 @@
         </p:nvSpPr>
         <p:spPr>
           <a:xfrm>
-            <a:off x="731520" y="640080"/>
-            <a:ext cx="10058400" cy="548640"/>
-          </a:xfrm>
-          <a:prstGeom prst="rect">
-            <a:avLst/>
-          </a:prstGeom>
-          <a:noFill/>
-          <a:ln/>
-        </p:spPr>
-        <p:txBody>
-          <a:bodyPr wrap="square" rtlCol="0" anchor="ctr"/>
-          <a:lstStyle/>
-          <a:p>
-            <a:pPr indent="0" marL="0">
-              <a:buNone/>
-            </a:pPr>
-            <a:r>
-              <a:rPr lang="en-US" sz="2200" b="1" dirty="0">
+            <a:off x="548640" y="548640"/>
+            <a:ext cx="10972800" cy="502920"/>
+          </a:xfrm>
+          <a:prstGeom prst="rect">
+            <a:avLst/>
+          </a:prstGeom>
+          <a:noFill/>
+          <a:ln/>
+        </p:spPr>
+        <p:txBody>
+          <a:bodyPr wrap="square" rtlCol="0" anchor="ctr"/>
+          <a:lstStyle/>
+          <a:p>
+            <a:pPr indent="0" marL="0">
+              <a:buNone/>
+            </a:pPr>
+            <a:r>
+              <a:rPr lang="en-US" sz="1800" b="1" dirty="0">
                 <a:solidFill>
                   <a:srgbClr val="0F172A"/>
                 </a:solidFill>
@@ -2579,9 +2688,9 @@
                 <a:ea typeface="Arial" pitchFamily="34" charset="-122"/>
                 <a:cs typeface="Arial" pitchFamily="34" charset="-120"/>
               </a:rPr>
-              <a:t>2. Technical Architecture &amp; Performance</a:t>
-            </a:r>
-            <a:endParaRPr lang="en-US" sz="2200" dirty="0"/>
+              <a:t>2. فاحص التفاعلات الدوائية المتبادلة (Drug-Drug Interactions)</a:t>
+            </a:r>
+            <a:endParaRPr lang="en-US" sz="1800" dirty="0"/>
           </a:p>
         </p:txBody>
       </p:sp>
@@ -2593,16 +2702,16 @@
         </p:nvSpPr>
         <p:spPr>
           <a:xfrm>
-            <a:off x="731520" y="1234440"/>
-            <a:ext cx="10698480" cy="0"/>
+            <a:off x="548640" y="1097280"/>
+            <a:ext cx="11064240" cy="0"/>
           </a:xfrm>
           <a:prstGeom prst="line">
             <a:avLst/>
           </a:prstGeom>
           <a:noFill/>
-          <a:ln w="19050">
+          <a:ln w="15240">
             <a:solidFill>
-              <a:srgbClr val="E2E8F0"/>
+              <a:srgbClr val="CBD5E1"/>
             </a:solidFill>
             <a:prstDash val="solid"/>
           </a:ln>
@@ -2616,16 +2725,16 @@
         </p:nvSpPr>
         <p:spPr>
           <a:xfrm>
-            <a:off x="731520" y="1463040"/>
-            <a:ext cx="5212080" cy="2194560"/>
+            <a:off x="548640" y="1234440"/>
+            <a:ext cx="4389120" cy="5029200"/>
           </a:xfrm>
           <a:prstGeom prst="roundRect">
             <a:avLst>
-              <a:gd name="adj" fmla="val 5000"/>
+              <a:gd name="adj" fmla="val 2083"/>
             </a:avLst>
           </a:prstGeom>
           <a:solidFill>
-            <a:srgbClr val="F0FDFA"/>
+            <a:srgbClr val="FFFFFF"/>
           </a:solidFill>
           <a:ln w="12700">
             <a:solidFill>
@@ -2643,24 +2752,105 @@
         </p:nvSpPr>
         <p:spPr>
           <a:xfrm>
-            <a:off x="1005840" y="1691640"/>
-            <a:ext cx="4663440" cy="320040"/>
-          </a:xfrm>
-          <a:prstGeom prst="rect">
-            <a:avLst/>
-          </a:prstGeom>
-          <a:noFill/>
-          <a:ln/>
-        </p:spPr>
-        <p:txBody>
-          <a:bodyPr wrap="square" rtlCol="0" anchor="ctr"/>
-          <a:lstStyle/>
-          <a:p>
-            <a:pPr indent="0" marL="0">
-              <a:buNone/>
-            </a:pPr>
-            <a:r>
-              <a:rPr lang="en-US" sz="1400" b="1" dirty="0">
+            <a:off x="731520" y="1371600"/>
+            <a:ext cx="4023360" cy="320040"/>
+          </a:xfrm>
+          <a:prstGeom prst="rect">
+            <a:avLst/>
+          </a:prstGeom>
+          <a:noFill/>
+          <a:ln/>
+        </p:spPr>
+        <p:txBody>
+          <a:bodyPr wrap="square" rtlCol="0" anchor="ctr"/>
+          <a:lstStyle/>
+          <a:p>
+            <a:pPr indent="0" marL="0">
+              <a:buNone/>
+            </a:pPr>
+            <a:r>
+              <a:rPr lang="en-US" sz="1300" b="1" dirty="0">
+                <a:solidFill>
+                  <a:srgbClr val="DC2626"/>
+                </a:solidFill>
+                <a:latin typeface="Arial" pitchFamily="34" charset="0"/>
+                <a:ea typeface="Arial" pitchFamily="34" charset="-122"/>
+                <a:cs typeface="Arial" pitchFamily="34" charset="-120"/>
+              </a:rPr>
+              <a:t>⚠️ المشكلة الواقعية:</a:t>
+            </a:r>
+            <a:endParaRPr lang="en-US" sz="1300" dirty="0"/>
+          </a:p>
+        </p:txBody>
+      </p:sp>
+      <p:sp>
+        <p:nvSpPr>
+          <p:cNvPr id="7" name="Text 5"/>
+          <p:cNvSpPr/>
+          <p:nvPr/>
+        </p:nvSpPr>
+        <p:spPr>
+          <a:xfrm>
+            <a:off x="731520" y="1691640"/>
+            <a:ext cx="4023360" cy="1097280"/>
+          </a:xfrm>
+          <a:prstGeom prst="rect">
+            <a:avLst/>
+          </a:prstGeom>
+          <a:noFill/>
+          <a:ln/>
+        </p:spPr>
+        <p:txBody>
+          <a:bodyPr wrap="square" rtlCol="0" anchor="ctr"/>
+          <a:lstStyle/>
+          <a:p>
+            <a:pPr indent="0" marL="0">
+              <a:lnSpc>
+                <a:spcPts val="1500"/>
+              </a:lnSpc>
+              <a:buNone/>
+            </a:pPr>
+            <a:r>
+              <a:rPr lang="en-US" sz="1050" dirty="0">
+                <a:solidFill>
+                  <a:srgbClr val="0F172A"/>
+                </a:solidFill>
+                <a:latin typeface="Arial" pitchFamily="34" charset="0"/>
+                <a:ea typeface="Arial" pitchFamily="34" charset="-122"/>
+                <a:cs typeface="Arial" pitchFamily="34" charset="-120"/>
+              </a:rPr>
+              <a:t>عندما يتناول المريض أكثر من دواء في نفس الوقت، قد يحدث تفاعل دوائي خطير يؤدي إلى فشل العلاج أو حدوث نزيف أو توقف للقلب دون أن يدرك المريض أو مقدم الرعاية.</a:t>
+            </a:r>
+            <a:endParaRPr lang="en-US" sz="1050" dirty="0"/>
+          </a:p>
+        </p:txBody>
+      </p:sp>
+      <p:sp>
+        <p:nvSpPr>
+          <p:cNvPr id="8" name="Text 6"/>
+          <p:cNvSpPr/>
+          <p:nvPr/>
+        </p:nvSpPr>
+        <p:spPr>
+          <a:xfrm>
+            <a:off x="731520" y="2880360"/>
+            <a:ext cx="4023360" cy="320040"/>
+          </a:xfrm>
+          <a:prstGeom prst="rect">
+            <a:avLst/>
+          </a:prstGeom>
+          <a:noFill/>
+          <a:ln/>
+        </p:spPr>
+        <p:txBody>
+          <a:bodyPr wrap="square" rtlCol="0" anchor="ctr"/>
+          <a:lstStyle/>
+          <a:p>
+            <a:pPr indent="0" marL="0">
+              <a:buNone/>
+            </a:pPr>
+            <a:r>
+              <a:rPr lang="en-US" sz="1300" b="1" dirty="0">
                 <a:solidFill>
                   <a:srgbClr val="0F766E"/>
                 </a:solidFill>
@@ -2668,22 +2858,22 @@
                 <a:ea typeface="Arial" pitchFamily="34" charset="-122"/>
                 <a:cs typeface="Arial" pitchFamily="34" charset="-120"/>
               </a:rPr>
-              <a:t>⚡ Multi-Tier RAM Cache</a:t>
-            </a:r>
-            <a:endParaRPr lang="en-US" sz="1400" dirty="0"/>
-          </a:p>
-        </p:txBody>
-      </p:sp>
-      <p:sp>
-        <p:nvSpPr>
-          <p:cNvPr id="7" name="Text 5"/>
-          <p:cNvSpPr/>
-          <p:nvPr/>
-        </p:nvSpPr>
-        <p:spPr>
-          <a:xfrm>
-            <a:off x="1005840" y="2103120"/>
-            <a:ext cx="4663440" cy="1371600"/>
+              <a:t>✨ كيف تحل هذه الواجهة المشكلة؟</a:t>
+            </a:r>
+            <a:endParaRPr lang="en-US" sz="1300" dirty="0"/>
+          </a:p>
+        </p:txBody>
+      </p:sp>
+      <p:sp>
+        <p:nvSpPr>
+          <p:cNvPr id="9" name="Text 7"/>
+          <p:cNvSpPr/>
+          <p:nvPr/>
+        </p:nvSpPr>
+        <p:spPr>
+          <a:xfrm>
+            <a:off x="731520" y="3200400"/>
+            <a:ext cx="4023360" cy="1371600"/>
           </a:xfrm>
           <a:prstGeom prst="rect">
             <a:avLst/>
@@ -2697,12 +2887,12 @@
           <a:p>
             <a:pPr indent="0" marL="0">
               <a:lnSpc>
-                <a:spcPts val="1800"/>
+                <a:spcPts val="1500"/>
               </a:lnSpc>
               <a:buNone/>
             </a:pPr>
             <a:r>
-              <a:rPr lang="en-US" sz="1100" dirty="0">
+              <a:rPr lang="en-US" sz="1050" dirty="0">
                 <a:solidFill>
                   <a:srgbClr val="0F172A"/>
                 </a:solidFill>
@@ -2710,94 +2900,34 @@
                 <a:ea typeface="Arial" pitchFamily="34" charset="-122"/>
                 <a:cs typeface="Arial" pitchFamily="34" charset="-120"/>
               </a:rPr>
-              <a:t>Tier 1: Browser In-Memory (0ms)</a:t>
-            </a:r>
-            <a:endParaRPr lang="en-US" sz="1100" dirty="0"/>
-          </a:p>
-          <a:p>
-            <a:pPr indent="0" marL="0">
-              <a:lnSpc>
-                <a:spcPts val="1800"/>
-              </a:lnSpc>
-              <a:buNone/>
-            </a:pPr>
-            <a:r>
-              <a:rPr lang="en-US" sz="1100" dirty="0">
-                <a:solidFill>
-                  <a:srgbClr val="0F172A"/>
-                </a:solidFill>
-                <a:latin typeface="Arial" pitchFamily="34" charset="0"/>
-                <a:ea typeface="Arial" pitchFamily="34" charset="-122"/>
-                <a:cs typeface="Arial" pitchFamily="34" charset="-120"/>
-              </a:rPr>
-              <a:t>Tier 2: Node.js Server RAM (&lt;1ms)</a:t>
-            </a:r>
-            <a:endParaRPr lang="en-US" sz="1100" dirty="0"/>
-          </a:p>
-          <a:p>
-            <a:pPr indent="0" marL="0">
-              <a:lnSpc>
-                <a:spcPts val="1800"/>
-              </a:lnSpc>
-              <a:buNone/>
-            </a:pPr>
-            <a:r>
-              <a:rPr lang="en-US" sz="1100" dirty="0">
-                <a:solidFill>
-                  <a:srgbClr val="0F172A"/>
-                </a:solidFill>
-                <a:latin typeface="Arial" pitchFamily="34" charset="0"/>
-                <a:ea typeface="Arial" pitchFamily="34" charset="-122"/>
-                <a:cs typeface="Arial" pitchFamily="34" charset="-120"/>
-              </a:rPr>
-              <a:t>Tier 3: PostgreSQL Supabase Cache</a:t>
-            </a:r>
-            <a:endParaRPr lang="en-US" sz="1100" dirty="0"/>
-          </a:p>
-          <a:p>
-            <a:pPr indent="0" marL="0">
-              <a:lnSpc>
-                <a:spcPts val="1800"/>
-              </a:lnSpc>
-              <a:buNone/>
-            </a:pPr>
-            <a:r>
-              <a:rPr lang="en-US" sz="1100" dirty="0">
-                <a:solidFill>
-                  <a:srgbClr val="0F172A"/>
-                </a:solidFill>
-                <a:latin typeface="Arial" pitchFamily="34" charset="0"/>
-                <a:ea typeface="Arial" pitchFamily="34" charset="-122"/>
-                <a:cs typeface="Arial" pitchFamily="34" charset="-120"/>
-              </a:rPr>
-              <a:t>Delivers instant repeated queries.</a:t>
-            </a:r>
-            <a:endParaRPr lang="en-US" sz="1100" dirty="0"/>
-          </a:p>
-        </p:txBody>
-      </p:sp>
-      <p:sp>
-        <p:nvSpPr>
-          <p:cNvPr id="8" name="Shape 6"/>
-          <p:cNvSpPr/>
-          <p:nvPr/>
-        </p:nvSpPr>
-        <p:spPr>
-          <a:xfrm>
-            <a:off x="6217920" y="1463040"/>
-            <a:ext cx="5212080" cy="2194560"/>
+              <a:t>تقوم الواجهة بفحص كافة الأزواج المتقاطعة بين الأدوية، وتصنيف الخطورة بألوان صلبة (أحمر، برتقالي، أزرق)، مع كتابة آلية التفاعل الفارماكولوجية والتوصية السريرية العملية للصيدلي.</a:t>
+            </a:r>
+            <a:endParaRPr lang="en-US" sz="1050" dirty="0"/>
+          </a:p>
+        </p:txBody>
+      </p:sp>
+      <p:sp>
+        <p:nvSpPr>
+          <p:cNvPr id="10" name="Shape 8"/>
+          <p:cNvSpPr/>
+          <p:nvPr/>
+        </p:nvSpPr>
+        <p:spPr>
+          <a:xfrm>
+            <a:off x="5120640" y="1234440"/>
+            <a:ext cx="6492240" cy="5029200"/>
           </a:xfrm>
           <a:prstGeom prst="roundRect">
             <a:avLst>
-              <a:gd name="adj" fmla="val 5000"/>
+              <a:gd name="adj" fmla="val 1818"/>
             </a:avLst>
           </a:prstGeom>
           <a:solidFill>
-            <a:srgbClr val="EFF6FF"/>
+            <a:srgbClr val="0F172A"/>
           </a:solidFill>
           <a:ln w="12700">
             <a:solidFill>
-              <a:srgbClr val="CBD5E1"/>
+              <a:srgbClr val="334155"/>
             </a:solidFill>
             <a:prstDash val="solid"/>
           </a:ln>
@@ -2805,187 +2935,65 @@
       </p:sp>
       <p:sp>
         <p:nvSpPr>
-          <p:cNvPr id="9" name="Text 7"/>
-          <p:cNvSpPr/>
-          <p:nvPr/>
-        </p:nvSpPr>
-        <p:spPr>
-          <a:xfrm>
-            <a:off x="6492240" y="1691640"/>
-            <a:ext cx="4663440" cy="320040"/>
-          </a:xfrm>
-          <a:prstGeom prst="rect">
-            <a:avLst/>
-          </a:prstGeom>
-          <a:noFill/>
-          <a:ln/>
-        </p:spPr>
-        <p:txBody>
-          <a:bodyPr wrap="square" rtlCol="0" anchor="ctr"/>
-          <a:lstStyle/>
-          <a:p>
-            <a:pPr indent="0" marL="0">
-              <a:buNone/>
-            </a:pPr>
-            <a:r>
-              <a:rPr lang="en-US" sz="1400" b="1" dirty="0">
-                <a:solidFill>
-                  <a:srgbClr val="2563EB"/>
-                </a:solidFill>
-                <a:latin typeface="Arial" pitchFamily="34" charset="0"/>
-                <a:ea typeface="Arial" pitchFamily="34" charset="-122"/>
-                <a:cs typeface="Arial" pitchFamily="34" charset="-120"/>
-              </a:rPr>
-              <a:t>🤖 Multi-Model AI Failover</a:t>
-            </a:r>
-            <a:endParaRPr lang="en-US" sz="1400" dirty="0"/>
-          </a:p>
-        </p:txBody>
-      </p:sp>
-      <p:sp>
-        <p:nvSpPr>
-          <p:cNvPr id="10" name="Text 8"/>
-          <p:cNvSpPr/>
-          <p:nvPr/>
-        </p:nvSpPr>
-        <p:spPr>
-          <a:xfrm>
-            <a:off x="6492240" y="2103120"/>
-            <a:ext cx="4663440" cy="1371600"/>
-          </a:xfrm>
-          <a:prstGeom prst="rect">
-            <a:avLst/>
-          </a:prstGeom>
-          <a:noFill/>
-          <a:ln/>
-        </p:spPr>
-        <p:txBody>
-          <a:bodyPr wrap="square" rtlCol="0" anchor="ctr"/>
-          <a:lstStyle/>
-          <a:p>
-            <a:pPr indent="0" marL="0">
-              <a:lnSpc>
-                <a:spcPts val="1800"/>
-              </a:lnSpc>
-              <a:buNone/>
-            </a:pPr>
-            <a:r>
-              <a:rPr lang="en-US" sz="1100" dirty="0">
-                <a:solidFill>
-                  <a:srgbClr val="0F172A"/>
-                </a:solidFill>
-                <a:latin typeface="Arial" pitchFamily="34" charset="0"/>
-                <a:ea typeface="Arial" pitchFamily="34" charset="-122"/>
-                <a:cs typeface="Arial" pitchFamily="34" charset="-120"/>
-              </a:rPr>
-              <a:t>Automatic rotation engine:</a:t>
-            </a:r>
-            <a:endParaRPr lang="en-US" sz="1100" dirty="0"/>
-          </a:p>
-          <a:p>
-            <a:pPr indent="0" marL="0">
-              <a:lnSpc>
-                <a:spcPts val="1800"/>
-              </a:lnSpc>
-              <a:buNone/>
-            </a:pPr>
-            <a:r>
-              <a:rPr lang="en-US" sz="1100" dirty="0">
-                <a:solidFill>
-                  <a:srgbClr val="0F172A"/>
-                </a:solidFill>
-                <a:latin typeface="Arial" pitchFamily="34" charset="0"/>
-                <a:ea typeface="Arial" pitchFamily="34" charset="-122"/>
-                <a:cs typeface="Arial" pitchFamily="34" charset="-120"/>
-              </a:rPr>
-              <a:t>• Primary: Gemini 3.5 Flash</a:t>
-            </a:r>
-            <a:endParaRPr lang="en-US" sz="1100" dirty="0"/>
-          </a:p>
-          <a:p>
-            <a:pPr indent="0" marL="0">
-              <a:lnSpc>
-                <a:spcPts val="1800"/>
-              </a:lnSpc>
-              <a:buNone/>
-            </a:pPr>
-            <a:r>
-              <a:rPr lang="en-US" sz="1100" dirty="0">
-                <a:solidFill>
-                  <a:srgbClr val="0F172A"/>
-                </a:solidFill>
-                <a:latin typeface="Arial" pitchFamily="34" charset="0"/>
-                <a:ea typeface="Arial" pitchFamily="34" charset="-122"/>
-                <a:cs typeface="Arial" pitchFamily="34" charset="-120"/>
-              </a:rPr>
-              <a:t>• Secondary: Gemini 3.5 Flash-Lite</a:t>
-            </a:r>
-            <a:endParaRPr lang="en-US" sz="1100" dirty="0"/>
-          </a:p>
-          <a:p>
-            <a:pPr indent="0" marL="0">
-              <a:lnSpc>
-                <a:spcPts val="1800"/>
-              </a:lnSpc>
-              <a:buNone/>
-            </a:pPr>
-            <a:r>
-              <a:rPr lang="en-US" sz="1100" dirty="0">
-                <a:solidFill>
-                  <a:srgbClr val="0F172A"/>
-                </a:solidFill>
-                <a:latin typeface="Arial" pitchFamily="34" charset="0"/>
-                <a:ea typeface="Arial" pitchFamily="34" charset="-122"/>
-                <a:cs typeface="Arial" pitchFamily="34" charset="-120"/>
-              </a:rPr>
-              <a:t>• Fallback: Gemini 3.6 Flash</a:t>
-            </a:r>
-            <a:endParaRPr lang="en-US" sz="1100" dirty="0"/>
-          </a:p>
-          <a:p>
-            <a:pPr indent="0" marL="0">
-              <a:lnSpc>
-                <a:spcPts val="1800"/>
-              </a:lnSpc>
-              <a:buNone/>
-            </a:pPr>
-            <a:r>
-              <a:rPr lang="en-US" sz="1100" dirty="0">
-                <a:solidFill>
-                  <a:srgbClr val="0F172A"/>
-                </a:solidFill>
-                <a:latin typeface="Arial" pitchFamily="34" charset="0"/>
-                <a:ea typeface="Arial" pitchFamily="34" charset="-122"/>
-                <a:cs typeface="Arial" pitchFamily="34" charset="-120"/>
-              </a:rPr>
-              <a:t>Zero API downtime guarantee.</a:t>
-            </a:r>
-            <a:endParaRPr lang="en-US" sz="1100" dirty="0"/>
-          </a:p>
-        </p:txBody>
-      </p:sp>
-      <p:sp>
-        <p:nvSpPr>
-          <p:cNvPr id="11" name="Shape 9"/>
-          <p:cNvSpPr/>
-          <p:nvPr/>
-        </p:nvSpPr>
-        <p:spPr>
-          <a:xfrm>
-            <a:off x="731520" y="3840480"/>
-            <a:ext cx="5212080" cy="2194560"/>
+          <p:cNvPr id="11" name="Text 9"/>
+          <p:cNvSpPr/>
+          <p:nvPr/>
+        </p:nvSpPr>
+        <p:spPr>
+          <a:xfrm>
+            <a:off x="5303520" y="1371600"/>
+            <a:ext cx="6126480" cy="320040"/>
+          </a:xfrm>
+          <a:prstGeom prst="rect">
+            <a:avLst/>
+          </a:prstGeom>
+          <a:noFill/>
+          <a:ln/>
+        </p:spPr>
+        <p:txBody>
+          <a:bodyPr wrap="square" rtlCol="0" anchor="ctr"/>
+          <a:lstStyle/>
+          <a:p>
+            <a:pPr indent="0" marL="0">
+              <a:buNone/>
+            </a:pPr>
+            <a:r>
+              <a:rPr lang="en-US" sz="1200" b="1" dirty="0">
+                <a:solidFill>
+                  <a:srgbClr val="5EEAD4"/>
+                </a:solidFill>
+                <a:latin typeface="Arial" pitchFamily="34" charset="0"/>
+                <a:ea typeface="Arial" pitchFamily="34" charset="-122"/>
+                <a:cs typeface="Arial" pitchFamily="34" charset="-120"/>
+              </a:rPr>
+              <a:t>🖥️ تشريح عناصر واجهة فاحص التفاعلات (UI Breakdown):</a:t>
+            </a:r>
+            <a:endParaRPr lang="en-US" sz="1200" dirty="0"/>
+          </a:p>
+        </p:txBody>
+      </p:sp>
+      <p:sp>
+        <p:nvSpPr>
+          <p:cNvPr id="12" name="Shape 10"/>
+          <p:cNvSpPr/>
+          <p:nvPr/>
+        </p:nvSpPr>
+        <p:spPr>
+          <a:xfrm>
+            <a:off x="5303520" y="1783080"/>
+            <a:ext cx="6126480" cy="914400"/>
           </a:xfrm>
           <a:prstGeom prst="roundRect">
             <a:avLst>
-              <a:gd name="adj" fmla="val 5000"/>
+              <a:gd name="adj" fmla="val 8000"/>
             </a:avLst>
           </a:prstGeom>
           <a:solidFill>
-            <a:srgbClr val="FFFBEB"/>
+            <a:srgbClr val="1E293B"/>
           </a:solidFill>
-          <a:ln w="12700">
+          <a:ln w="19050">
             <a:solidFill>
-              <a:srgbClr val="CBD5E1"/>
+              <a:srgbClr val="DC2626"/>
             </a:solidFill>
             <a:prstDash val="solid"/>
           </a:ln>
@@ -2993,53 +3001,14 @@
       </p:sp>
       <p:sp>
         <p:nvSpPr>
-          <p:cNvPr id="12" name="Text 10"/>
-          <p:cNvSpPr/>
-          <p:nvPr/>
-        </p:nvSpPr>
-        <p:spPr>
-          <a:xfrm>
-            <a:off x="1005840" y="4069080"/>
-            <a:ext cx="4663440" cy="320040"/>
-          </a:xfrm>
-          <a:prstGeom prst="rect">
-            <a:avLst/>
-          </a:prstGeom>
-          <a:noFill/>
-          <a:ln/>
-        </p:spPr>
-        <p:txBody>
-          <a:bodyPr wrap="square" rtlCol="0" anchor="ctr"/>
-          <a:lstStyle/>
-          <a:p>
-            <a:pPr indent="0" marL="0">
-              <a:buNone/>
-            </a:pPr>
-            <a:r>
-              <a:rPr lang="en-US" sz="1400" b="1" dirty="0">
-                <a:solidFill>
-                  <a:srgbClr val="D97706"/>
-                </a:solidFill>
-                <a:latin typeface="Arial" pitchFamily="34" charset="0"/>
-                <a:ea typeface="Arial" pitchFamily="34" charset="-122"/>
-                <a:cs typeface="Arial" pitchFamily="34" charset="-120"/>
-              </a:rPr>
-              <a:t>🌐 Dual-Language Engine</a:t>
-            </a:r>
-            <a:endParaRPr lang="en-US" sz="1400" dirty="0"/>
-          </a:p>
-        </p:txBody>
-      </p:sp>
-      <p:sp>
-        <p:nvSpPr>
           <p:cNvPr id="13" name="Text 11"/>
           <p:cNvSpPr/>
           <p:nvPr/>
         </p:nvSpPr>
         <p:spPr>
           <a:xfrm>
-            <a:off x="1005840" y="4480560"/>
-            <a:ext cx="4663440" cy="1371600"/>
+            <a:off x="5440680" y="1874520"/>
+            <a:ext cx="5852160" cy="731520"/>
           </a:xfrm>
           <a:prstGeom prst="rect">
             <a:avLst/>
@@ -3053,42 +3022,39 @@
           <a:p>
             <a:pPr indent="0" marL="0">
               <a:lnSpc>
-                <a:spcPts val="1800"/>
+                <a:spcPts val="1400"/>
               </a:lnSpc>
               <a:buNone/>
             </a:pPr>
             <a:r>
-              <a:rPr lang="en-US" sz="1100" dirty="0">
-                <a:solidFill>
-                  <a:srgbClr val="0F172A"/>
-                </a:solidFill>
-                <a:latin typeface="Arial" pitchFamily="34" charset="0"/>
-                <a:ea typeface="Arial" pitchFamily="34" charset="-122"/>
-                <a:cs typeface="Arial" pitchFamily="34" charset="-120"/>
-              </a:rPr>
-              <a:t>Simultaneous bilingual storage:</a:t>
-            </a:r>
-            <a:endParaRPr lang="en-US" sz="1100" dirty="0"/>
-          </a:p>
-          <a:p>
+              <a:rPr lang="en-US" sz="1000" b="1" dirty="0">
+                <a:solidFill>
+                  <a:srgbClr val="5EEAD4"/>
+                </a:solidFill>
+                <a:latin typeface="Arial" pitchFamily="34" charset="0"/>
+                <a:ea typeface="Arial" pitchFamily="34" charset="-122"/>
+                <a:cs typeface="Arial" pitchFamily="34" charset="-120"/>
+              </a:rPr>
+              <a:t>[1] شارات تصنيف الخطورة ➔ </a:t>
+            </a:r>
             <a:pPr indent="0" marL="0">
               <a:lnSpc>
-                <a:spcPts val="1800"/>
+                <a:spcPts val="1400"/>
               </a:lnSpc>
               <a:buNone/>
             </a:pPr>
             <a:r>
-              <a:rPr lang="en-US" sz="1100" dirty="0">
-                <a:solidFill>
-                  <a:srgbClr val="0F172A"/>
-                </a:solidFill>
-                <a:latin typeface="Arial" pitchFamily="34" charset="0"/>
-                <a:ea typeface="Arial" pitchFamily="34" charset="-122"/>
-                <a:cs typeface="Arial" pitchFamily="34" charset="-120"/>
-              </a:rPr>
-              <a:t>All drug monographs, interactions, meal guides, and explanations stored in both Arabic &amp; English without re-translation.</a:t>
-            </a:r>
-            <a:endParaRPr lang="en-US" sz="1100" dirty="0"/>
+              <a:rPr lang="en-US" sz="950" dirty="0">
+                <a:solidFill>
+                  <a:srgbClr val="FFFFFF"/>
+                </a:solidFill>
+                <a:latin typeface="Arial" pitchFamily="34" charset="0"/>
+                <a:ea typeface="Arial" pitchFamily="34" charset="-122"/>
+                <a:cs typeface="Arial" pitchFamily="34" charset="-120"/>
+              </a:rPr>
+              <a:t>شارات ملونة (🔴 عالي الخطورة / 🟠 متوسط / 🔵 بسيط) لمعرفة مستوى الخطورة في ثانية واحدة.</a:t>
+            </a:r>
+            <a:endParaRPr lang="en-US" sz="1000" dirty="0"/>
           </a:p>
         </p:txBody>
       </p:sp>
@@ -3100,20 +3066,20 @@
         </p:nvSpPr>
         <p:spPr>
           <a:xfrm>
-            <a:off x="6217920" y="3840480"/>
-            <a:ext cx="5212080" cy="2194560"/>
+            <a:off x="5303520" y="2834640"/>
+            <a:ext cx="6126480" cy="914400"/>
           </a:xfrm>
           <a:prstGeom prst="roundRect">
             <a:avLst>
-              <a:gd name="adj" fmla="val 5000"/>
+              <a:gd name="adj" fmla="val 8000"/>
             </a:avLst>
           </a:prstGeom>
           <a:solidFill>
-            <a:srgbClr val="ECFDF5"/>
+            <a:srgbClr val="1E293B"/>
           </a:solidFill>
-          <a:ln w="12700">
+          <a:ln w="19050">
             <a:solidFill>
-              <a:srgbClr val="CBD5E1"/>
+              <a:srgbClr val="38BDF8"/>
             </a:solidFill>
             <a:prstDash val="solid"/>
           </a:ln>
@@ -3127,47 +3093,8 @@
         </p:nvSpPr>
         <p:spPr>
           <a:xfrm>
-            <a:off x="6492240" y="4069080"/>
-            <a:ext cx="4663440" cy="320040"/>
-          </a:xfrm>
-          <a:prstGeom prst="rect">
-            <a:avLst/>
-          </a:prstGeom>
-          <a:noFill/>
-          <a:ln/>
-        </p:spPr>
-        <p:txBody>
-          <a:bodyPr wrap="square" rtlCol="0" anchor="ctr"/>
-          <a:lstStyle/>
-          <a:p>
-            <a:pPr indent="0" marL="0">
-              <a:buNone/>
-            </a:pPr>
-            <a:r>
-              <a:rPr lang="en-US" sz="1400" b="1" dirty="0">
-                <a:solidFill>
-                  <a:srgbClr val="059669"/>
-                </a:solidFill>
-                <a:latin typeface="Arial" pitchFamily="34" charset="0"/>
-                <a:ea typeface="Arial" pitchFamily="34" charset="-122"/>
-                <a:cs typeface="Arial" pitchFamily="34" charset="-120"/>
-              </a:rPr>
-              <a:t>📱 Modern Frontend Stack</a:t>
-            </a:r>
-            <a:endParaRPr lang="en-US" sz="1400" dirty="0"/>
-          </a:p>
-        </p:txBody>
-      </p:sp>
-      <p:sp>
-        <p:nvSpPr>
-          <p:cNvPr id="16" name="Text 14"/>
-          <p:cNvSpPr/>
-          <p:nvPr/>
-        </p:nvSpPr>
-        <p:spPr>
-          <a:xfrm>
-            <a:off x="6492240" y="4480560"/>
-            <a:ext cx="4663440" cy="1371600"/>
+            <a:off x="5440680" y="2926080"/>
+            <a:ext cx="5852160" cy="731520"/>
           </a:xfrm>
           <a:prstGeom prst="rect">
             <a:avLst/>
@@ -3181,24 +3108,68 @@
           <a:p>
             <a:pPr indent="0" marL="0">
               <a:lnSpc>
-                <a:spcPts val="1800"/>
+                <a:spcPts val="1400"/>
               </a:lnSpc>
               <a:buNone/>
             </a:pPr>
             <a:r>
-              <a:rPr lang="en-US" sz="1100" dirty="0">
-                <a:solidFill>
-                  <a:srgbClr val="0F172A"/>
-                </a:solidFill>
-                <a:latin typeface="Arial" pitchFamily="34" charset="0"/>
-                <a:ea typeface="Arial" pitchFamily="34" charset="-122"/>
-                <a:cs typeface="Arial" pitchFamily="34" charset="-120"/>
-              </a:rPr>
-              <a:t>Built on React 18, TypeScript, Vite, Tailwind CSS, Lucide Icons, and Framer Motion. 100% responsive for hospital desktop &amp; mobile.</a:t>
-            </a:r>
-            <a:endParaRPr lang="en-US" sz="1100" dirty="0"/>
-          </a:p>
-        </p:txBody>
+              <a:rPr lang="en-US" sz="1000" b="1" dirty="0">
+                <a:solidFill>
+                  <a:srgbClr val="5EEAD4"/>
+                </a:solidFill>
+                <a:latin typeface="Arial" pitchFamily="34" charset="0"/>
+                <a:ea typeface="Arial" pitchFamily="34" charset="-122"/>
+                <a:cs typeface="Arial" pitchFamily="34" charset="-120"/>
+              </a:rPr>
+              <a:t>[2] صندوق آلية التفاعل ➔ </a:t>
+            </a:r>
+            <a:pPr indent="0" marL="0">
+              <a:lnSpc>
+                <a:spcPts val="1400"/>
+              </a:lnSpc>
+              <a:buNone/>
+            </a:pPr>
+            <a:r>
+              <a:rPr lang="en-US" sz="950" dirty="0">
+                <a:solidFill>
+                  <a:srgbClr val="FFFFFF"/>
+                </a:solidFill>
+                <a:latin typeface="Arial" pitchFamily="34" charset="0"/>
+                <a:ea typeface="Arial" pitchFamily="34" charset="-122"/>
+                <a:cs typeface="Arial" pitchFamily="34" charset="-120"/>
+              </a:rPr>
+              <a:t>يوضح المسار الحيوي (مثل تثبيط إنزيمات الكبد CYP450 أو التنافس على بروتينات البلازما).</a:t>
+            </a:r>
+            <a:endParaRPr lang="en-US" sz="1000" dirty="0"/>
+          </a:p>
+        </p:txBody>
+      </p:sp>
+      <p:sp>
+        <p:nvSpPr>
+          <p:cNvPr id="16" name="Shape 14"/>
+          <p:cNvSpPr/>
+          <p:nvPr/>
+        </p:nvSpPr>
+        <p:spPr>
+          <a:xfrm>
+            <a:off x="5303520" y="3886200"/>
+            <a:ext cx="6126480" cy="914400"/>
+          </a:xfrm>
+          <a:prstGeom prst="roundRect">
+            <a:avLst>
+              <a:gd name="adj" fmla="val 8000"/>
+            </a:avLst>
+          </a:prstGeom>
+          <a:solidFill>
+            <a:srgbClr val="1E293B"/>
+          </a:solidFill>
+          <a:ln w="19050">
+            <a:solidFill>
+              <a:srgbClr val="10B981"/>
+            </a:solidFill>
+            <a:prstDash val="solid"/>
+          </a:ln>
+        </p:spPr>
       </p:sp>
       <p:sp>
         <p:nvSpPr>
@@ -3208,8 +3179,67 @@
         </p:nvSpPr>
         <p:spPr>
           <a:xfrm>
-            <a:off x="731520" y="6400800"/>
-            <a:ext cx="10698480" cy="274320"/>
+            <a:off x="5440680" y="3977640"/>
+            <a:ext cx="5852160" cy="731520"/>
+          </a:xfrm>
+          <a:prstGeom prst="rect">
+            <a:avLst/>
+          </a:prstGeom>
+          <a:noFill/>
+          <a:ln/>
+        </p:spPr>
+        <p:txBody>
+          <a:bodyPr wrap="square" rtlCol="0" anchor="ctr"/>
+          <a:lstStyle/>
+          <a:p>
+            <a:pPr indent="0" marL="0">
+              <a:lnSpc>
+                <a:spcPts val="1400"/>
+              </a:lnSpc>
+              <a:buNone/>
+            </a:pPr>
+            <a:r>
+              <a:rPr lang="en-US" sz="1000" b="1" dirty="0">
+                <a:solidFill>
+                  <a:srgbClr val="5EEAD4"/>
+                </a:solidFill>
+                <a:latin typeface="Arial" pitchFamily="34" charset="0"/>
+                <a:ea typeface="Arial" pitchFamily="34" charset="-122"/>
+                <a:cs typeface="Arial" pitchFamily="34" charset="-120"/>
+              </a:rPr>
+              <a:t>[3] التوصية السريرية العملية ➔ </a:t>
+            </a:r>
+            <a:pPr indent="0" marL="0">
+              <a:lnSpc>
+                <a:spcPts val="1400"/>
+              </a:lnSpc>
+              <a:buNone/>
+            </a:pPr>
+            <a:r>
+              <a:rPr lang="en-US" sz="950" dirty="0">
+                <a:solidFill>
+                  <a:srgbClr val="FFFFFF"/>
+                </a:solidFill>
+                <a:latin typeface="Arial" pitchFamily="34" charset="0"/>
+                <a:ea typeface="Arial" pitchFamily="34" charset="-122"/>
+                <a:cs typeface="Arial" pitchFamily="34" charset="-120"/>
+              </a:rPr>
+              <a:t>خطة التدخل: فصل الجرعات بساعتين، تعديل الجرعة للنصف، أو استبدال الدواء ببديل آمن.</a:t>
+            </a:r>
+            <a:endParaRPr lang="en-US" sz="1000" dirty="0"/>
+          </a:p>
+        </p:txBody>
+      </p:sp>
+      <p:sp>
+        <p:nvSpPr>
+          <p:cNvPr id="18" name="Text 16"/>
+          <p:cNvSpPr/>
+          <p:nvPr/>
+        </p:nvSpPr>
+        <p:spPr>
+          <a:xfrm>
+            <a:off x="548640" y="6446520"/>
+            <a:ext cx="11064240" cy="228600"/>
           </a:xfrm>
           <a:prstGeom prst="rect">
             <a:avLst/>
@@ -3225,7 +3255,7 @@
               <a:buNone/>
             </a:pPr>
             <a:r>
-              <a:rPr lang="en-US" sz="900" dirty="0">
+              <a:rPr lang="en-US" sz="850" dirty="0">
                 <a:solidFill>
                   <a:srgbClr val="64748B"/>
                 </a:solidFill>
@@ -3233,9 +3263,9 @@
                 <a:ea typeface="Arial" pitchFamily="34" charset="-122"/>
                 <a:cs typeface="Arial" pitchFamily="34" charset="-120"/>
               </a:rPr>
-              <a:t>Egyptian Chinese University (ECU) • Faculty of Pharmacy | Developed by Youssef Mohamed</a:t>
-            </a:r>
-            <a:endParaRPr lang="en-US" sz="900" dirty="0"/>
+              <a:t>كلية الصيدلة • الجامعة المصرية الصينية (ECU) | تطوير: يوسف محمد | YoPharma Clinical Suite</a:t>
+            </a:r>
+            <a:endParaRPr lang="en-US" sz="850" dirty="0"/>
           </a:p>
         </p:txBody>
       </p:sp>
@@ -3279,24 +3309,24 @@
         </p:nvSpPr>
         <p:spPr>
           <a:xfrm>
-            <a:off x="731520" y="365760"/>
-            <a:ext cx="9144000" cy="274320"/>
-          </a:xfrm>
-          <a:prstGeom prst="rect">
-            <a:avLst/>
-          </a:prstGeom>
-          <a:noFill/>
-          <a:ln/>
-        </p:spPr>
-        <p:txBody>
-          <a:bodyPr wrap="square" rtlCol="0" anchor="ctr"/>
-          <a:lstStyle/>
-          <a:p>
-            <a:pPr indent="0" marL="0">
-              <a:buNone/>
-            </a:pPr>
-            <a:r>
-              <a:rPr lang="en-US" sz="1000" b="1" dirty="0">
+            <a:off x="548640" y="320040"/>
+            <a:ext cx="9144000" cy="228600"/>
+          </a:xfrm>
+          <a:prstGeom prst="rect">
+            <a:avLst/>
+          </a:prstGeom>
+          <a:noFill/>
+          <a:ln/>
+        </p:spPr>
+        <p:txBody>
+          <a:bodyPr wrap="square" rtlCol="0" anchor="ctr"/>
+          <a:lstStyle/>
+          <a:p>
+            <a:pPr indent="0" marL="0">
+              <a:buNone/>
+            </a:pPr>
+            <a:r>
+              <a:rPr lang="en-US" sz="900" b="1" dirty="0">
                 <a:solidFill>
                   <a:srgbClr val="0D9488"/>
                 </a:solidFill>
@@ -3304,9 +3334,9 @@
                 <a:ea typeface="Arial" pitchFamily="34" charset="-122"/>
                 <a:cs typeface="Arial" pitchFamily="34" charset="-120"/>
               </a:rPr>
-              <a:t>YOPHARMA | CLINICAL PHARMACY SUITE</a:t>
-            </a:r>
-            <a:endParaRPr lang="en-US" sz="1000" dirty="0"/>
+              <a:t>YOPHARMA | دليل واجهات ومميزات المنصة</a:t>
+            </a:r>
+            <a:endParaRPr lang="en-US" sz="900" dirty="0"/>
           </a:p>
         </p:txBody>
       </p:sp>
@@ -3318,24 +3348,24 @@
         </p:nvSpPr>
         <p:spPr>
           <a:xfrm>
-            <a:off x="731520" y="640080"/>
-            <a:ext cx="10058400" cy="548640"/>
-          </a:xfrm>
-          <a:prstGeom prst="rect">
-            <a:avLst/>
-          </a:prstGeom>
-          <a:noFill/>
-          <a:ln/>
-        </p:spPr>
-        <p:txBody>
-          <a:bodyPr wrap="square" rtlCol="0" anchor="ctr"/>
-          <a:lstStyle/>
-          <a:p>
-            <a:pPr indent="0" marL="0">
-              <a:buNone/>
-            </a:pPr>
-            <a:r>
-              <a:rPr lang="en-US" sz="2200" b="1" dirty="0">
+            <a:off x="548640" y="548640"/>
+            <a:ext cx="10972800" cy="502920"/>
+          </a:xfrm>
+          <a:prstGeom prst="rect">
+            <a:avLst/>
+          </a:prstGeom>
+          <a:noFill/>
+          <a:ln/>
+        </p:spPr>
+        <p:txBody>
+          <a:bodyPr wrap="square" rtlCol="0" anchor="ctr"/>
+          <a:lstStyle/>
+          <a:p>
+            <a:pPr indent="0" marL="0">
+              <a:buNone/>
+            </a:pPr>
+            <a:r>
+              <a:rPr lang="en-US" sz="1800" b="1" dirty="0">
                 <a:solidFill>
                   <a:srgbClr val="0F172A"/>
                 </a:solidFill>
@@ -3343,9 +3373,9 @@
                 <a:ea typeface="Arial" pitchFamily="34" charset="-122"/>
                 <a:cs typeface="Arial" pitchFamily="34" charset="-120"/>
               </a:rPr>
-              <a:t>3. Module 1 — Drug-Drug Interaction Checker</a:t>
-            </a:r>
-            <a:endParaRPr lang="en-US" sz="2200" dirty="0"/>
+              <a:t>3. تفاعلات الأدوية مع الطعام وتوقيت الجرعات (Food Interactions)</a:t>
+            </a:r>
+            <a:endParaRPr lang="en-US" sz="1800" dirty="0"/>
           </a:p>
         </p:txBody>
       </p:sp>
@@ -3357,16 +3387,16 @@
         </p:nvSpPr>
         <p:spPr>
           <a:xfrm>
-            <a:off x="731520" y="1234440"/>
-            <a:ext cx="10698480" cy="0"/>
+            <a:off x="548640" y="1097280"/>
+            <a:ext cx="11064240" cy="0"/>
           </a:xfrm>
           <a:prstGeom prst="line">
             <a:avLst/>
           </a:prstGeom>
           <a:noFill/>
-          <a:ln w="19050">
+          <a:ln w="15240">
             <a:solidFill>
-              <a:srgbClr val="E2E8F0"/>
+              <a:srgbClr val="CBD5E1"/>
             </a:solidFill>
             <a:prstDash val="solid"/>
           </a:ln>
@@ -3380,82 +3410,16 @@
         </p:nvSpPr>
         <p:spPr>
           <a:xfrm>
-            <a:off x="731520" y="1463040"/>
-            <a:ext cx="10698480" cy="4663440"/>
+            <a:off x="548640" y="1234440"/>
+            <a:ext cx="4389120" cy="5029200"/>
           </a:xfrm>
           <a:prstGeom prst="roundRect">
             <a:avLst>
-              <a:gd name="adj" fmla="val 2353"/>
+              <a:gd name="adj" fmla="val 2083"/>
             </a:avLst>
           </a:prstGeom>
           <a:solidFill>
             <a:srgbClr val="FFFFFF"/>
-          </a:solidFill>
-          <a:ln w="12700">
-            <a:solidFill>
-              <a:srgbClr val="E2E8F0"/>
-            </a:solidFill>
-            <a:prstDash val="solid"/>
-          </a:ln>
-        </p:spPr>
-      </p:sp>
-      <p:sp>
-        <p:nvSpPr>
-          <p:cNvPr id="6" name="Text 4"/>
-          <p:cNvSpPr/>
-          <p:nvPr/>
-        </p:nvSpPr>
-        <p:spPr>
-          <a:xfrm>
-            <a:off x="1005840" y="1645920"/>
-            <a:ext cx="10058400" cy="320040"/>
-          </a:xfrm>
-          <a:prstGeom prst="rect">
-            <a:avLst/>
-          </a:prstGeom>
-          <a:noFill/>
-          <a:ln/>
-        </p:spPr>
-        <p:txBody>
-          <a:bodyPr wrap="square" rtlCol="0" anchor="ctr"/>
-          <a:lstStyle/>
-          <a:p>
-            <a:pPr indent="0" marL="0">
-              <a:buNone/>
-            </a:pPr>
-            <a:r>
-              <a:rPr lang="en-US" sz="1500" b="1" dirty="0">
-                <a:solidFill>
-                  <a:srgbClr val="0F766E"/>
-                </a:solidFill>
-                <a:latin typeface="Arial" pitchFamily="34" charset="0"/>
-                <a:ea typeface="Arial" pitchFamily="34" charset="-122"/>
-                <a:cs typeface="Arial" pitchFamily="34" charset="-120"/>
-              </a:rPr>
-              <a:t>Core Capabilities &amp; Clinical Flow:</a:t>
-            </a:r>
-            <a:endParaRPr lang="en-US" sz="1500" dirty="0"/>
-          </a:p>
-        </p:txBody>
-      </p:sp>
-      <p:sp>
-        <p:nvSpPr>
-          <p:cNvPr id="7" name="Shape 5"/>
-          <p:cNvSpPr/>
-          <p:nvPr/>
-        </p:nvSpPr>
-        <p:spPr>
-          <a:xfrm>
-            <a:off x="1005840" y="2194560"/>
-            <a:ext cx="2377440" cy="3657600"/>
-          </a:xfrm>
-          <a:prstGeom prst="roundRect">
-            <a:avLst>
-              <a:gd name="adj" fmla="val 3846"/>
-            </a:avLst>
-          </a:prstGeom>
-          <a:solidFill>
-            <a:srgbClr val="F8FAFC"/>
           </a:solidFill>
           <a:ln w="12700">
             <a:solidFill>
@@ -3467,40 +3431,121 @@
       </p:sp>
       <p:sp>
         <p:nvSpPr>
+          <p:cNvPr id="6" name="Text 4"/>
+          <p:cNvSpPr/>
+          <p:nvPr/>
+        </p:nvSpPr>
+        <p:spPr>
+          <a:xfrm>
+            <a:off x="731520" y="1371600"/>
+            <a:ext cx="4023360" cy="320040"/>
+          </a:xfrm>
+          <a:prstGeom prst="rect">
+            <a:avLst/>
+          </a:prstGeom>
+          <a:noFill/>
+          <a:ln/>
+        </p:spPr>
+        <p:txBody>
+          <a:bodyPr wrap="square" rtlCol="0" anchor="ctr"/>
+          <a:lstStyle/>
+          <a:p>
+            <a:pPr indent="0" marL="0">
+              <a:buNone/>
+            </a:pPr>
+            <a:r>
+              <a:rPr lang="en-US" sz="1300" b="1" dirty="0">
+                <a:solidFill>
+                  <a:srgbClr val="DC2626"/>
+                </a:solidFill>
+                <a:latin typeface="Arial" pitchFamily="34" charset="0"/>
+                <a:ea typeface="Arial" pitchFamily="34" charset="-122"/>
+                <a:cs typeface="Arial" pitchFamily="34" charset="-120"/>
+              </a:rPr>
+              <a:t>⚠️ المشكلة الواقعية:</a:t>
+            </a:r>
+            <a:endParaRPr lang="en-US" sz="1300" dirty="0"/>
+          </a:p>
+        </p:txBody>
+      </p:sp>
+      <p:sp>
+        <p:nvSpPr>
+          <p:cNvPr id="7" name="Text 5"/>
+          <p:cNvSpPr/>
+          <p:nvPr/>
+        </p:nvSpPr>
+        <p:spPr>
+          <a:xfrm>
+            <a:off x="731520" y="1691640"/>
+            <a:ext cx="4023360" cy="1097280"/>
+          </a:xfrm>
+          <a:prstGeom prst="rect">
+            <a:avLst/>
+          </a:prstGeom>
+          <a:noFill/>
+          <a:ln/>
+        </p:spPr>
+        <p:txBody>
+          <a:bodyPr wrap="square" rtlCol="0" anchor="ctr"/>
+          <a:lstStyle/>
+          <a:p>
+            <a:pPr indent="0" marL="0">
+              <a:lnSpc>
+                <a:spcPts val="1500"/>
+              </a:lnSpc>
+              <a:buNone/>
+            </a:pPr>
+            <a:r>
+              <a:rPr lang="en-US" sz="1050" dirty="0">
+                <a:solidFill>
+                  <a:srgbClr val="0F172A"/>
+                </a:solidFill>
+                <a:latin typeface="Arial" pitchFamily="34" charset="0"/>
+                <a:ea typeface="Arial" pitchFamily="34" charset="-122"/>
+                <a:cs typeface="Arial" pitchFamily="34" charset="-120"/>
+              </a:rPr>
+              <a:t>جهل المريض بمواعيد الدواء مع الأكل، أو تناوله مع أطعمة محظورة (كاللبن، الجريب فروت، الأطعمة الغنية بالبوتاسيوم)، مما يقلل فاعلية العلاج بنسبة تصل إلى 80% أو يسبب سمية مفاجئة.</a:t>
+            </a:r>
+            <a:endParaRPr lang="en-US" sz="1050" dirty="0"/>
+          </a:p>
+        </p:txBody>
+      </p:sp>
+      <p:sp>
+        <p:nvSpPr>
           <p:cNvPr id="8" name="Text 6"/>
           <p:cNvSpPr/>
           <p:nvPr/>
         </p:nvSpPr>
         <p:spPr>
           <a:xfrm>
-            <a:off x="1188720" y="2377440"/>
-            <a:ext cx="2011680" cy="274320"/>
-          </a:xfrm>
-          <a:prstGeom prst="rect">
-            <a:avLst/>
-          </a:prstGeom>
-          <a:noFill/>
-          <a:ln/>
-        </p:spPr>
-        <p:txBody>
-          <a:bodyPr wrap="square" rtlCol="0" anchor="ctr"/>
-          <a:lstStyle/>
-          <a:p>
-            <a:pPr indent="0" marL="0">
-              <a:buNone/>
-            </a:pPr>
-            <a:r>
-              <a:rPr lang="en-US" sz="1800" b="1" dirty="0">
-                <a:solidFill>
-                  <a:srgbClr val="0D9488"/>
-                </a:solidFill>
-                <a:latin typeface="Arial" pitchFamily="34" charset="0"/>
-                <a:ea typeface="Arial" pitchFamily="34" charset="-122"/>
-                <a:cs typeface="Arial" pitchFamily="34" charset="-120"/>
-              </a:rPr>
-              <a:t>01</a:t>
-            </a:r>
-            <a:endParaRPr lang="en-US" sz="1800" dirty="0"/>
+            <a:off x="731520" y="2880360"/>
+            <a:ext cx="4023360" cy="320040"/>
+          </a:xfrm>
+          <a:prstGeom prst="rect">
+            <a:avLst/>
+          </a:prstGeom>
+          <a:noFill/>
+          <a:ln/>
+        </p:spPr>
+        <p:txBody>
+          <a:bodyPr wrap="square" rtlCol="0" anchor="ctr"/>
+          <a:lstStyle/>
+          <a:p>
+            <a:pPr indent="0" marL="0">
+              <a:buNone/>
+            </a:pPr>
+            <a:r>
+              <a:rPr lang="en-US" sz="1300" b="1" dirty="0">
+                <a:solidFill>
+                  <a:srgbClr val="0F766E"/>
+                </a:solidFill>
+                <a:latin typeface="Arial" pitchFamily="34" charset="0"/>
+                <a:ea typeface="Arial" pitchFamily="34" charset="-122"/>
+                <a:cs typeface="Arial" pitchFamily="34" charset="-120"/>
+              </a:rPr>
+              <a:t>✨ كيف تحل هذه الواجهة المشكلة؟</a:t>
+            </a:r>
+            <a:endParaRPr lang="en-US" sz="1300" dirty="0"/>
           </a:p>
         </p:txBody>
       </p:sp>
@@ -3512,24 +3557,27 @@
         </p:nvSpPr>
         <p:spPr>
           <a:xfrm>
-            <a:off x="1188720" y="2743200"/>
-            <a:ext cx="2011680" cy="457200"/>
-          </a:xfrm>
-          <a:prstGeom prst="rect">
-            <a:avLst/>
-          </a:prstGeom>
-          <a:noFill/>
-          <a:ln/>
-        </p:spPr>
-        <p:txBody>
-          <a:bodyPr wrap="square" rtlCol="0" anchor="ctr"/>
-          <a:lstStyle/>
-          <a:p>
-            <a:pPr indent="0" marL="0">
-              <a:buNone/>
-            </a:pPr>
-            <a:r>
-              <a:rPr lang="en-US" sz="1200" b="1" dirty="0">
+            <a:off x="731520" y="3200400"/>
+            <a:ext cx="4023360" cy="1371600"/>
+          </a:xfrm>
+          <a:prstGeom prst="rect">
+            <a:avLst/>
+          </a:prstGeom>
+          <a:noFill/>
+          <a:ln/>
+        </p:spPr>
+        <p:txBody>
+          <a:bodyPr wrap="square" rtlCol="0" anchor="ctr"/>
+          <a:lstStyle/>
+          <a:p>
+            <a:pPr indent="0" marL="0">
+              <a:lnSpc>
+                <a:spcPts val="1500"/>
+              </a:lnSpc>
+              <a:buNone/>
+            </a:pPr>
+            <a:r>
+              <a:rPr lang="en-US" sz="1050" dirty="0">
                 <a:solidFill>
                   <a:srgbClr val="0F172A"/>
                 </a:solidFill>
@@ -3537,76 +3585,34 @@
                 <a:ea typeface="Arial" pitchFamily="34" charset="-122"/>
                 <a:cs typeface="Arial" pitchFamily="34" charset="-120"/>
               </a:rPr>
-              <a:t>Multi-Medication Input</a:t>
-            </a:r>
-            <a:endParaRPr lang="en-US" sz="1200" dirty="0"/>
-          </a:p>
-        </p:txBody>
-      </p:sp>
-      <p:sp>
-        <p:nvSpPr>
-          <p:cNvPr id="10" name="Text 8"/>
-          <p:cNvSpPr/>
-          <p:nvPr/>
-        </p:nvSpPr>
-        <p:spPr>
-          <a:xfrm>
-            <a:off x="1188720" y="3291840"/>
-            <a:ext cx="2011680" cy="2377440"/>
-          </a:xfrm>
-          <a:prstGeom prst="rect">
-            <a:avLst/>
-          </a:prstGeom>
-          <a:noFill/>
-          <a:ln/>
-        </p:spPr>
-        <p:txBody>
-          <a:bodyPr wrap="square" rtlCol="0" anchor="ctr"/>
-          <a:lstStyle/>
-          <a:p>
-            <a:pPr indent="0" marL="0">
-              <a:lnSpc>
-                <a:spcPts val="1600"/>
-              </a:lnSpc>
-              <a:buNone/>
-            </a:pPr>
-            <a:r>
-              <a:rPr lang="en-US" sz="1000" dirty="0">
-                <a:solidFill>
-                  <a:srgbClr val="64748B"/>
-                </a:solidFill>
-                <a:latin typeface="Arial" pitchFamily="34" charset="0"/>
-                <a:ea typeface="Arial" pitchFamily="34" charset="-122"/>
-                <a:cs typeface="Arial" pitchFamily="34" charset="-120"/>
-              </a:rPr>
-              <a:t>Add 2 to 10+ medications into an active prescription tray using rapid keyboard navigation and autocomplete.</a:t>
-            </a:r>
-            <a:endParaRPr lang="en-US" sz="1000" dirty="0"/>
-          </a:p>
-        </p:txBody>
-      </p:sp>
-      <p:sp>
-        <p:nvSpPr>
-          <p:cNvPr id="11" name="Shape 9"/>
-          <p:cNvSpPr/>
-          <p:nvPr/>
-        </p:nvSpPr>
-        <p:spPr>
-          <a:xfrm>
-            <a:off x="3566160" y="2194560"/>
-            <a:ext cx="2377440" cy="3657600"/>
+              <a:t>تقدم جدولاً زمنياً مرتباً لكل دواء (قبل الأكل، مع الأكل، بعد الأكل)، مع قائمة تفصيلية بالأطعمة والمشروبات المحظورة وشرح تأثيرها المباشر على الامتصاص.</a:t>
+            </a:r>
+            <a:endParaRPr lang="en-US" sz="1050" dirty="0"/>
+          </a:p>
+        </p:txBody>
+      </p:sp>
+      <p:sp>
+        <p:nvSpPr>
+          <p:cNvPr id="10" name="Shape 8"/>
+          <p:cNvSpPr/>
+          <p:nvPr/>
+        </p:nvSpPr>
+        <p:spPr>
+          <a:xfrm>
+            <a:off x="5120640" y="1234440"/>
+            <a:ext cx="6492240" cy="5029200"/>
           </a:xfrm>
           <a:prstGeom prst="roundRect">
             <a:avLst>
-              <a:gd name="adj" fmla="val 3846"/>
+              <a:gd name="adj" fmla="val 1818"/>
             </a:avLst>
           </a:prstGeom>
           <a:solidFill>
-            <a:srgbClr val="F8FAFC"/>
+            <a:srgbClr val="0F172A"/>
           </a:solidFill>
           <a:ln w="12700">
             <a:solidFill>
-              <a:srgbClr val="CBD5E1"/>
+              <a:srgbClr val="334155"/>
             </a:solidFill>
             <a:prstDash val="solid"/>
           </a:ln>
@@ -3614,53 +3620,14 @@
       </p:sp>
       <p:sp>
         <p:nvSpPr>
-          <p:cNvPr id="12" name="Text 10"/>
-          <p:cNvSpPr/>
-          <p:nvPr/>
-        </p:nvSpPr>
-        <p:spPr>
-          <a:xfrm>
-            <a:off x="3749040" y="2377440"/>
-            <a:ext cx="2011680" cy="274320"/>
-          </a:xfrm>
-          <a:prstGeom prst="rect">
-            <a:avLst/>
-          </a:prstGeom>
-          <a:noFill/>
-          <a:ln/>
-        </p:spPr>
-        <p:txBody>
-          <a:bodyPr wrap="square" rtlCol="0" anchor="ctr"/>
-          <a:lstStyle/>
-          <a:p>
-            <a:pPr indent="0" marL="0">
-              <a:buNone/>
-            </a:pPr>
-            <a:r>
-              <a:rPr lang="en-US" sz="1800" b="1" dirty="0">
-                <a:solidFill>
-                  <a:srgbClr val="0D9488"/>
-                </a:solidFill>
-                <a:latin typeface="Arial" pitchFamily="34" charset="0"/>
-                <a:ea typeface="Arial" pitchFamily="34" charset="-122"/>
-                <a:cs typeface="Arial" pitchFamily="34" charset="-120"/>
-              </a:rPr>
-              <a:t>02</a:t>
-            </a:r>
-            <a:endParaRPr lang="en-US" sz="1800" dirty="0"/>
-          </a:p>
-        </p:txBody>
-      </p:sp>
-      <p:sp>
-        <p:nvSpPr>
-          <p:cNvPr id="13" name="Text 11"/>
-          <p:cNvSpPr/>
-          <p:nvPr/>
-        </p:nvSpPr>
-        <p:spPr>
-          <a:xfrm>
-            <a:off x="3749040" y="2743200"/>
-            <a:ext cx="2011680" cy="457200"/>
+          <p:cNvPr id="11" name="Text 9"/>
+          <p:cNvSpPr/>
+          <p:nvPr/>
+        </p:nvSpPr>
+        <p:spPr>
+          <a:xfrm>
+            <a:off x="5303520" y="1371600"/>
+            <a:ext cx="6126480" cy="320040"/>
           </a:xfrm>
           <a:prstGeom prst="rect">
             <a:avLst/>
@@ -3678,13 +3645,13 @@
             <a:r>
               <a:rPr lang="en-US" sz="1200" b="1" dirty="0">
                 <a:solidFill>
-                  <a:srgbClr val="0F172A"/>
-                </a:solidFill>
-                <a:latin typeface="Arial" pitchFamily="34" charset="0"/>
-                <a:ea typeface="Arial" pitchFamily="34" charset="-122"/>
-                <a:cs typeface="Arial" pitchFamily="34" charset="-120"/>
-              </a:rPr>
-              <a:t>Severity Stratification</a:t>
+                  <a:srgbClr val="5EEAD4"/>
+                </a:solidFill>
+                <a:latin typeface="Arial" pitchFamily="34" charset="0"/>
+                <a:ea typeface="Arial" pitchFamily="34" charset="-122"/>
+                <a:cs typeface="Arial" pitchFamily="34" charset="-120"/>
+              </a:rPr>
+              <a:t>🖥️ تشريح واجهة تفاعلات الطعام ومواعيد الوجبات (UI Breakdown):</a:t>
             </a:r>
             <a:endParaRPr lang="en-US" sz="1200" dirty="0"/>
           </a:p>
@@ -3692,128 +3659,26 @@
       </p:sp>
       <p:sp>
         <p:nvSpPr>
-          <p:cNvPr id="14" name="Text 12"/>
-          <p:cNvSpPr/>
-          <p:nvPr/>
-        </p:nvSpPr>
-        <p:spPr>
-          <a:xfrm>
-            <a:off x="3749040" y="3291840"/>
-            <a:ext cx="2011680" cy="2377440"/>
-          </a:xfrm>
-          <a:prstGeom prst="rect">
-            <a:avLst/>
-          </a:prstGeom>
-          <a:noFill/>
-          <a:ln/>
-        </p:spPr>
-        <p:txBody>
-          <a:bodyPr wrap="square" rtlCol="0" anchor="ctr"/>
-          <a:lstStyle/>
-          <a:p>
-            <a:pPr indent="0" marL="0">
-              <a:lnSpc>
-                <a:spcPts val="1600"/>
-              </a:lnSpc>
-              <a:buNone/>
-            </a:pPr>
-            <a:r>
-              <a:rPr lang="en-US" sz="1000" dirty="0">
-                <a:solidFill>
-                  <a:srgbClr val="64748B"/>
-                </a:solidFill>
-                <a:latin typeface="Arial" pitchFamily="34" charset="0"/>
-                <a:ea typeface="Arial" pitchFamily="34" charset="-122"/>
-                <a:cs typeface="Arial" pitchFamily="34" charset="-120"/>
-              </a:rPr>
-              <a:t>Color-coded triage:</a:t>
-            </a:r>
-            <a:endParaRPr lang="en-US" sz="1000" dirty="0"/>
-          </a:p>
-          <a:p>
-            <a:pPr indent="0" marL="0">
-              <a:lnSpc>
-                <a:spcPts val="1600"/>
-              </a:lnSpc>
-              <a:buNone/>
-            </a:pPr>
-            <a:r>
-              <a:rPr lang="en-US" sz="1000" dirty="0">
-                <a:solidFill>
-                  <a:srgbClr val="64748B"/>
-                </a:solidFill>
-                <a:latin typeface="Arial" pitchFamily="34" charset="0"/>
-                <a:ea typeface="Arial" pitchFamily="34" charset="-122"/>
-                <a:cs typeface="Arial" pitchFamily="34" charset="-120"/>
-              </a:rPr>
-              <a:t>🔴 High / Contraindicated (Avoid)</a:t>
-            </a:r>
-            <a:endParaRPr lang="en-US" sz="1000" dirty="0"/>
-          </a:p>
-          <a:p>
-            <a:pPr indent="0" marL="0">
-              <a:lnSpc>
-                <a:spcPts val="1600"/>
-              </a:lnSpc>
-              <a:buNone/>
-            </a:pPr>
-            <a:r>
-              <a:rPr lang="en-US" sz="1000" dirty="0">
-                <a:solidFill>
-                  <a:srgbClr val="64748B"/>
-                </a:solidFill>
-                <a:latin typeface="Arial" pitchFamily="34" charset="0"/>
-                <a:ea typeface="Arial" pitchFamily="34" charset="-122"/>
-                <a:cs typeface="Arial" pitchFamily="34" charset="-120"/>
-              </a:rPr>
-              <a:t>🟠 Moderate (Dose Adjust / Caution)</a:t>
-            </a:r>
-            <a:endParaRPr lang="en-US" sz="1000" dirty="0"/>
-          </a:p>
-          <a:p>
-            <a:pPr indent="0" marL="0">
-              <a:lnSpc>
-                <a:spcPts val="1600"/>
-              </a:lnSpc>
-              <a:buNone/>
-            </a:pPr>
-            <a:r>
-              <a:rPr lang="en-US" sz="1000" dirty="0">
-                <a:solidFill>
-                  <a:srgbClr val="64748B"/>
-                </a:solidFill>
-                <a:latin typeface="Arial" pitchFamily="34" charset="0"/>
-                <a:ea typeface="Arial" pitchFamily="34" charset="-122"/>
-                <a:cs typeface="Arial" pitchFamily="34" charset="-120"/>
-              </a:rPr>
-              <a:t>🔵 Minor (Monitor Parameters)</a:t>
-            </a:r>
-            <a:endParaRPr lang="en-US" sz="1000" dirty="0"/>
-          </a:p>
-        </p:txBody>
-      </p:sp>
-      <p:sp>
-        <p:nvSpPr>
-          <p:cNvPr id="15" name="Shape 13"/>
-          <p:cNvSpPr/>
-          <p:nvPr/>
-        </p:nvSpPr>
-        <p:spPr>
-          <a:xfrm>
-            <a:off x="6126480" y="2194560"/>
-            <a:ext cx="2377440" cy="3657600"/>
+          <p:cNvPr id="12" name="Shape 10"/>
+          <p:cNvSpPr/>
+          <p:nvPr/>
+        </p:nvSpPr>
+        <p:spPr>
+          <a:xfrm>
+            <a:off x="5303520" y="1783080"/>
+            <a:ext cx="6126480" cy="914400"/>
           </a:xfrm>
           <a:prstGeom prst="roundRect">
             <a:avLst>
-              <a:gd name="adj" fmla="val 3846"/>
+              <a:gd name="adj" fmla="val 8000"/>
             </a:avLst>
           </a:prstGeom>
           <a:solidFill>
-            <a:srgbClr val="F8FAFC"/>
+            <a:srgbClr val="1E293B"/>
           </a:solidFill>
-          <a:ln w="12700">
+          <a:ln w="19050">
             <a:solidFill>
-              <a:srgbClr val="CBD5E1"/>
+              <a:srgbClr val="F59E0B"/>
             </a:solidFill>
             <a:prstDash val="solid"/>
           </a:ln>
@@ -3821,92 +3686,14 @@
       </p:sp>
       <p:sp>
         <p:nvSpPr>
-          <p:cNvPr id="16" name="Text 14"/>
-          <p:cNvSpPr/>
-          <p:nvPr/>
-        </p:nvSpPr>
-        <p:spPr>
-          <a:xfrm>
-            <a:off x="6309360" y="2377440"/>
-            <a:ext cx="2011680" cy="274320"/>
-          </a:xfrm>
-          <a:prstGeom prst="rect">
-            <a:avLst/>
-          </a:prstGeom>
-          <a:noFill/>
-          <a:ln/>
-        </p:spPr>
-        <p:txBody>
-          <a:bodyPr wrap="square" rtlCol="0" anchor="ctr"/>
-          <a:lstStyle/>
-          <a:p>
-            <a:pPr indent="0" marL="0">
-              <a:buNone/>
-            </a:pPr>
-            <a:r>
-              <a:rPr lang="en-US" sz="1800" b="1" dirty="0">
-                <a:solidFill>
-                  <a:srgbClr val="0D9488"/>
-                </a:solidFill>
-                <a:latin typeface="Arial" pitchFamily="34" charset="0"/>
-                <a:ea typeface="Arial" pitchFamily="34" charset="-122"/>
-                <a:cs typeface="Arial" pitchFamily="34" charset="-120"/>
-              </a:rPr>
-              <a:t>03</a:t>
-            </a:r>
-            <a:endParaRPr lang="en-US" sz="1800" dirty="0"/>
-          </a:p>
-        </p:txBody>
-      </p:sp>
-      <p:sp>
-        <p:nvSpPr>
-          <p:cNvPr id="17" name="Text 15"/>
-          <p:cNvSpPr/>
-          <p:nvPr/>
-        </p:nvSpPr>
-        <p:spPr>
-          <a:xfrm>
-            <a:off x="6309360" y="2743200"/>
-            <a:ext cx="2011680" cy="457200"/>
-          </a:xfrm>
-          <a:prstGeom prst="rect">
-            <a:avLst/>
-          </a:prstGeom>
-          <a:noFill/>
-          <a:ln/>
-        </p:spPr>
-        <p:txBody>
-          <a:bodyPr wrap="square" rtlCol="0" anchor="ctr"/>
-          <a:lstStyle/>
-          <a:p>
-            <a:pPr indent="0" marL="0">
-              <a:buNone/>
-            </a:pPr>
-            <a:r>
-              <a:rPr lang="en-US" sz="1200" b="1" dirty="0">
-                <a:solidFill>
-                  <a:srgbClr val="0F172A"/>
-                </a:solidFill>
-                <a:latin typeface="Arial" pitchFamily="34" charset="0"/>
-                <a:ea typeface="Arial" pitchFamily="34" charset="-122"/>
-                <a:cs typeface="Arial" pitchFamily="34" charset="-120"/>
-              </a:rPr>
-              <a:t>Pharmacological Mechanism</a:t>
-            </a:r>
-            <a:endParaRPr lang="en-US" sz="1200" dirty="0"/>
-          </a:p>
-        </p:txBody>
-      </p:sp>
-      <p:sp>
-        <p:nvSpPr>
-          <p:cNvPr id="18" name="Text 16"/>
-          <p:cNvSpPr/>
-          <p:nvPr/>
-        </p:nvSpPr>
-        <p:spPr>
-          <a:xfrm>
-            <a:off x="6309360" y="3291840"/>
-            <a:ext cx="2011680" cy="2377440"/>
+          <p:cNvPr id="13" name="Text 11"/>
+          <p:cNvSpPr/>
+          <p:nvPr/>
+        </p:nvSpPr>
+        <p:spPr>
+          <a:xfrm>
+            <a:off x="5440680" y="1874520"/>
+            <a:ext cx="5852160" cy="731520"/>
           </a:xfrm>
           <a:prstGeom prst="rect">
             <a:avLst/>
@@ -3920,20 +3707,37 @@
           <a:p>
             <a:pPr indent="0" marL="0">
               <a:lnSpc>
-                <a:spcPts val="1600"/>
+                <a:spcPts val="1400"/>
               </a:lnSpc>
               <a:buNone/>
             </a:pPr>
             <a:r>
-              <a:rPr lang="en-US" sz="1000" dirty="0">
-                <a:solidFill>
-                  <a:srgbClr val="64748B"/>
-                </a:solidFill>
-                <a:latin typeface="Arial" pitchFamily="34" charset="0"/>
-                <a:ea typeface="Arial" pitchFamily="34" charset="-122"/>
-                <a:cs typeface="Arial" pitchFamily="34" charset="-120"/>
-              </a:rPr>
-              <a:t>Explains pharmacokinetic (CYP450 inhibition/induction) &amp; pharmacodynamic (additive toxicity) pathways.</a:t>
+              <a:rPr lang="en-US" sz="1000" b="1" dirty="0">
+                <a:solidFill>
+                  <a:srgbClr val="5EEAD4"/>
+                </a:solidFill>
+                <a:latin typeface="Arial" pitchFamily="34" charset="0"/>
+                <a:ea typeface="Arial" pitchFamily="34" charset="-122"/>
+                <a:cs typeface="Arial" pitchFamily="34" charset="-120"/>
+              </a:rPr>
+              <a:t>[1] شارة التوقيت الزمني الدقيق ➔ </a:t>
+            </a:r>
+            <a:pPr indent="0" marL="0">
+              <a:lnSpc>
+                <a:spcPts val="1400"/>
+              </a:lnSpc>
+              <a:buNone/>
+            </a:pPr>
+            <a:r>
+              <a:rPr lang="en-US" sz="950" dirty="0">
+                <a:solidFill>
+                  <a:srgbClr val="FFFFFF"/>
+                </a:solidFill>
+                <a:latin typeface="Arial" pitchFamily="34" charset="0"/>
+                <a:ea typeface="Arial" pitchFamily="34" charset="-122"/>
+                <a:cs typeface="Arial" pitchFamily="34" charset="-120"/>
+              </a:rPr>
+              <a:t>(قبل الأكل بساعة / مع الأكل مباشرة / بعد الأكل بساعتين) مع إرشادات الامتصاص.</a:t>
             </a:r>
             <a:endParaRPr lang="en-US" sz="1000" dirty="0"/>
           </a:p>
@@ -3941,26 +3745,26 @@
       </p:sp>
       <p:sp>
         <p:nvSpPr>
-          <p:cNvPr id="19" name="Shape 17"/>
-          <p:cNvSpPr/>
-          <p:nvPr/>
-        </p:nvSpPr>
-        <p:spPr>
-          <a:xfrm>
-            <a:off x="8686800" y="2194560"/>
-            <a:ext cx="2377440" cy="3657600"/>
+          <p:cNvPr id="14" name="Shape 12"/>
+          <p:cNvSpPr/>
+          <p:nvPr/>
+        </p:nvSpPr>
+        <p:spPr>
+          <a:xfrm>
+            <a:off x="5303520" y="2834640"/>
+            <a:ext cx="6126480" cy="914400"/>
           </a:xfrm>
           <a:prstGeom prst="roundRect">
             <a:avLst>
-              <a:gd name="adj" fmla="val 3846"/>
+              <a:gd name="adj" fmla="val 8000"/>
             </a:avLst>
           </a:prstGeom>
           <a:solidFill>
-            <a:srgbClr val="F8FAFC"/>
+            <a:srgbClr val="1E293B"/>
           </a:solidFill>
-          <a:ln w="12700">
+          <a:ln w="19050">
             <a:solidFill>
-              <a:srgbClr val="CBD5E1"/>
+              <a:srgbClr val="DC2626"/>
             </a:solidFill>
             <a:prstDash val="solid"/>
           </a:ln>
@@ -3968,92 +3772,14 @@
       </p:sp>
       <p:sp>
         <p:nvSpPr>
-          <p:cNvPr id="20" name="Text 18"/>
-          <p:cNvSpPr/>
-          <p:nvPr/>
-        </p:nvSpPr>
-        <p:spPr>
-          <a:xfrm>
-            <a:off x="8869680" y="2377440"/>
-            <a:ext cx="2011680" cy="274320"/>
-          </a:xfrm>
-          <a:prstGeom prst="rect">
-            <a:avLst/>
-          </a:prstGeom>
-          <a:noFill/>
-          <a:ln/>
-        </p:spPr>
-        <p:txBody>
-          <a:bodyPr wrap="square" rtlCol="0" anchor="ctr"/>
-          <a:lstStyle/>
-          <a:p>
-            <a:pPr indent="0" marL="0">
-              <a:buNone/>
-            </a:pPr>
-            <a:r>
-              <a:rPr lang="en-US" sz="1800" b="1" dirty="0">
-                <a:solidFill>
-                  <a:srgbClr val="0D9488"/>
-                </a:solidFill>
-                <a:latin typeface="Arial" pitchFamily="34" charset="0"/>
-                <a:ea typeface="Arial" pitchFamily="34" charset="-122"/>
-                <a:cs typeface="Arial" pitchFamily="34" charset="-120"/>
-              </a:rPr>
-              <a:t>04</a:t>
-            </a:r>
-            <a:endParaRPr lang="en-US" sz="1800" dirty="0"/>
-          </a:p>
-        </p:txBody>
-      </p:sp>
-      <p:sp>
-        <p:nvSpPr>
-          <p:cNvPr id="21" name="Text 19"/>
-          <p:cNvSpPr/>
-          <p:nvPr/>
-        </p:nvSpPr>
-        <p:spPr>
-          <a:xfrm>
-            <a:off x="8869680" y="2743200"/>
-            <a:ext cx="2011680" cy="457200"/>
-          </a:xfrm>
-          <a:prstGeom prst="rect">
-            <a:avLst/>
-          </a:prstGeom>
-          <a:noFill/>
-          <a:ln/>
-        </p:spPr>
-        <p:txBody>
-          <a:bodyPr wrap="square" rtlCol="0" anchor="ctr"/>
-          <a:lstStyle/>
-          <a:p>
-            <a:pPr indent="0" marL="0">
-              <a:buNone/>
-            </a:pPr>
-            <a:r>
-              <a:rPr lang="en-US" sz="1200" b="1" dirty="0">
-                <a:solidFill>
-                  <a:srgbClr val="0F172A"/>
-                </a:solidFill>
-                <a:latin typeface="Arial" pitchFamily="34" charset="0"/>
-                <a:ea typeface="Arial" pitchFamily="34" charset="-122"/>
-                <a:cs typeface="Arial" pitchFamily="34" charset="-120"/>
-              </a:rPr>
-              <a:t>Pharmacist Action Protocol</a:t>
-            </a:r>
-            <a:endParaRPr lang="en-US" sz="1200" dirty="0"/>
-          </a:p>
-        </p:txBody>
-      </p:sp>
-      <p:sp>
-        <p:nvSpPr>
-          <p:cNvPr id="22" name="Text 20"/>
-          <p:cNvSpPr/>
-          <p:nvPr/>
-        </p:nvSpPr>
-        <p:spPr>
-          <a:xfrm>
-            <a:off x="8869680" y="3291840"/>
-            <a:ext cx="2011680" cy="2377440"/>
+          <p:cNvPr id="15" name="Text 13"/>
+          <p:cNvSpPr/>
+          <p:nvPr/>
+        </p:nvSpPr>
+        <p:spPr>
+          <a:xfrm>
+            <a:off x="5440680" y="2926080"/>
+            <a:ext cx="5852160" cy="731520"/>
           </a:xfrm>
           <a:prstGeom prst="rect">
             <a:avLst/>
@@ -4067,12 +3793,154 @@
           <a:p>
             <a:pPr indent="0" marL="0">
               <a:lnSpc>
-                <a:spcPts val="1600"/>
+                <a:spcPts val="1400"/>
               </a:lnSpc>
               <a:buNone/>
             </a:pPr>
             <a:r>
-              <a:rPr lang="en-US" sz="1000" dirty="0">
+              <a:rPr lang="en-US" sz="1000" b="1" dirty="0">
+                <a:solidFill>
+                  <a:srgbClr val="5EEAD4"/>
+                </a:solidFill>
+                <a:latin typeface="Arial" pitchFamily="34" charset="0"/>
+                <a:ea typeface="Arial" pitchFamily="34" charset="-122"/>
+                <a:cs typeface="Arial" pitchFamily="34" charset="-120"/>
+              </a:rPr>
+              <a:t>[2] شبكة الأطعمة الممنوعة ➔ </a:t>
+            </a:r>
+            <a:pPr indent="0" marL="0">
+              <a:lnSpc>
+                <a:spcPts val="1400"/>
+              </a:lnSpc>
+              <a:buNone/>
+            </a:pPr>
+            <a:r>
+              <a:rPr lang="en-US" sz="950" dirty="0">
+                <a:solidFill>
+                  <a:srgbClr val="FFFFFF"/>
+                </a:solidFill>
+                <a:latin typeface="Arial" pitchFamily="34" charset="0"/>
+                <a:ea typeface="Arial" pitchFamily="34" charset="-122"/>
+                <a:cs typeface="Arial" pitchFamily="34" charset="-120"/>
+              </a:rPr>
+              <a:t>بطاقات تحذيرية حمراء تبرز الأغذية المتعارضة (منتجات الألبان، الكافيين، الجريب فروت).</a:t>
+            </a:r>
+            <a:endParaRPr lang="en-US" sz="1000" dirty="0"/>
+          </a:p>
+        </p:txBody>
+      </p:sp>
+      <p:sp>
+        <p:nvSpPr>
+          <p:cNvPr id="16" name="Shape 14"/>
+          <p:cNvSpPr/>
+          <p:nvPr/>
+        </p:nvSpPr>
+        <p:spPr>
+          <a:xfrm>
+            <a:off x="5303520" y="3886200"/>
+            <a:ext cx="6126480" cy="914400"/>
+          </a:xfrm>
+          <a:prstGeom prst="roundRect">
+            <a:avLst>
+              <a:gd name="adj" fmla="val 8000"/>
+            </a:avLst>
+          </a:prstGeom>
+          <a:solidFill>
+            <a:srgbClr val="1E293B"/>
+          </a:solidFill>
+          <a:ln w="19050">
+            <a:solidFill>
+              <a:srgbClr val="38BDF8"/>
+            </a:solidFill>
+            <a:prstDash val="solid"/>
+          </a:ln>
+        </p:spPr>
+      </p:sp>
+      <p:sp>
+        <p:nvSpPr>
+          <p:cNvPr id="17" name="Text 15"/>
+          <p:cNvSpPr/>
+          <p:nvPr/>
+        </p:nvSpPr>
+        <p:spPr>
+          <a:xfrm>
+            <a:off x="5440680" y="3977640"/>
+            <a:ext cx="5852160" cy="731520"/>
+          </a:xfrm>
+          <a:prstGeom prst="rect">
+            <a:avLst/>
+          </a:prstGeom>
+          <a:noFill/>
+          <a:ln/>
+        </p:spPr>
+        <p:txBody>
+          <a:bodyPr wrap="square" rtlCol="0" anchor="ctr"/>
+          <a:lstStyle/>
+          <a:p>
+            <a:pPr indent="0" marL="0">
+              <a:lnSpc>
+                <a:spcPts val="1400"/>
+              </a:lnSpc>
+              <a:buNone/>
+            </a:pPr>
+            <a:r>
+              <a:rPr lang="en-US" sz="1000" b="1" dirty="0">
+                <a:solidFill>
+                  <a:srgbClr val="5EEAD4"/>
+                </a:solidFill>
+                <a:latin typeface="Arial" pitchFamily="34" charset="0"/>
+                <a:ea typeface="Arial" pitchFamily="34" charset="-122"/>
+                <a:cs typeface="Arial" pitchFamily="34" charset="-120"/>
+              </a:rPr>
+              <a:t>[3] إرشادات التناول المبسطة ➔ </a:t>
+            </a:r>
+            <a:pPr indent="0" marL="0">
+              <a:lnSpc>
+                <a:spcPts val="1400"/>
+              </a:lnSpc>
+              <a:buNone/>
+            </a:pPr>
+            <a:r>
+              <a:rPr lang="en-US" sz="950" dirty="0">
+                <a:solidFill>
+                  <a:srgbClr val="FFFFFF"/>
+                </a:solidFill>
+                <a:latin typeface="Arial" pitchFamily="34" charset="0"/>
+                <a:ea typeface="Arial" pitchFamily="34" charset="-122"/>
+                <a:cs typeface="Arial" pitchFamily="34" charset="-120"/>
+              </a:rPr>
+              <a:t>نصوص إرشادية جاهزة يمكن للصيدلي قراءتها مباشرة للمريض عند صرف الروشتة.</a:t>
+            </a:r>
+            <a:endParaRPr lang="en-US" sz="1000" dirty="0"/>
+          </a:p>
+        </p:txBody>
+      </p:sp>
+      <p:sp>
+        <p:nvSpPr>
+          <p:cNvPr id="18" name="Text 16"/>
+          <p:cNvSpPr/>
+          <p:nvPr/>
+        </p:nvSpPr>
+        <p:spPr>
+          <a:xfrm>
+            <a:off x="548640" y="6446520"/>
+            <a:ext cx="11064240" cy="228600"/>
+          </a:xfrm>
+          <a:prstGeom prst="rect">
+            <a:avLst/>
+          </a:prstGeom>
+          <a:noFill/>
+          <a:ln/>
+        </p:spPr>
+        <p:txBody>
+          <a:bodyPr wrap="square" rtlCol="0" anchor="ctr"/>
+          <a:lstStyle/>
+          <a:p>
+            <a:pPr algn="l" indent="0" marL="0">
+              <a:buNone/>
+            </a:pPr>
+            <a:r>
+              <a:rPr lang="en-US" sz="850" dirty="0">
                 <a:solidFill>
                   <a:srgbClr val="64748B"/>
                 </a:solidFill>
@@ -4080,48 +3948,9 @@
                 <a:ea typeface="Arial" pitchFamily="34" charset="-122"/>
                 <a:cs typeface="Arial" pitchFamily="34" charset="-120"/>
               </a:rPr>
-              <a:t>Actionable clinical guidance: dosage spacing (e.g. 2 hours separation), lab monitoring, or safer therapeutic alternatives.</a:t>
-            </a:r>
-            <a:endParaRPr lang="en-US" sz="1000" dirty="0"/>
-          </a:p>
-        </p:txBody>
-      </p:sp>
-      <p:sp>
-        <p:nvSpPr>
-          <p:cNvPr id="23" name="Text 21"/>
-          <p:cNvSpPr/>
-          <p:nvPr/>
-        </p:nvSpPr>
-        <p:spPr>
-          <a:xfrm>
-            <a:off x="731520" y="6400800"/>
-            <a:ext cx="10698480" cy="274320"/>
-          </a:xfrm>
-          <a:prstGeom prst="rect">
-            <a:avLst/>
-          </a:prstGeom>
-          <a:noFill/>
-          <a:ln/>
-        </p:spPr>
-        <p:txBody>
-          <a:bodyPr wrap="square" rtlCol="0" anchor="ctr"/>
-          <a:lstStyle/>
-          <a:p>
-            <a:pPr algn="l" indent="0" marL="0">
-              <a:buNone/>
-            </a:pPr>
-            <a:r>
-              <a:rPr lang="en-US" sz="900" dirty="0">
-                <a:solidFill>
-                  <a:srgbClr val="64748B"/>
-                </a:solidFill>
-                <a:latin typeface="Arial" pitchFamily="34" charset="0"/>
-                <a:ea typeface="Arial" pitchFamily="34" charset="-122"/>
-                <a:cs typeface="Arial" pitchFamily="34" charset="-120"/>
-              </a:rPr>
-              <a:t>Egyptian Chinese University (ECU) • Faculty of Pharmacy | Developed by Youssef Mohamed</a:t>
-            </a:r>
-            <a:endParaRPr lang="en-US" sz="900" dirty="0"/>
+              <a:t>كلية الصيدلة • الجامعة المصرية الصينية (ECU) | تطوير: يوسف محمد | YoPharma Clinical Suite</a:t>
+            </a:r>
+            <a:endParaRPr lang="en-US" sz="850" dirty="0"/>
           </a:p>
         </p:txBody>
       </p:sp>
@@ -4165,24 +3994,24 @@
         </p:nvSpPr>
         <p:spPr>
           <a:xfrm>
-            <a:off x="731520" y="365760"/>
-            <a:ext cx="9144000" cy="274320"/>
-          </a:xfrm>
-          <a:prstGeom prst="rect">
-            <a:avLst/>
-          </a:prstGeom>
-          <a:noFill/>
-          <a:ln/>
-        </p:spPr>
-        <p:txBody>
-          <a:bodyPr wrap="square" rtlCol="0" anchor="ctr"/>
-          <a:lstStyle/>
-          <a:p>
-            <a:pPr indent="0" marL="0">
-              <a:buNone/>
-            </a:pPr>
-            <a:r>
-              <a:rPr lang="en-US" sz="1000" b="1" dirty="0">
+            <a:off x="548640" y="320040"/>
+            <a:ext cx="9144000" cy="228600"/>
+          </a:xfrm>
+          <a:prstGeom prst="rect">
+            <a:avLst/>
+          </a:prstGeom>
+          <a:noFill/>
+          <a:ln/>
+        </p:spPr>
+        <p:txBody>
+          <a:bodyPr wrap="square" rtlCol="0" anchor="ctr"/>
+          <a:lstStyle/>
+          <a:p>
+            <a:pPr indent="0" marL="0">
+              <a:buNone/>
+            </a:pPr>
+            <a:r>
+              <a:rPr lang="en-US" sz="900" b="1" dirty="0">
                 <a:solidFill>
                   <a:srgbClr val="0D9488"/>
                 </a:solidFill>
@@ -4190,9 +4019,9 @@
                 <a:ea typeface="Arial" pitchFamily="34" charset="-122"/>
                 <a:cs typeface="Arial" pitchFamily="34" charset="-120"/>
               </a:rPr>
-              <a:t>YOPHARMA | CLINICAL PHARMACY SUITE</a:t>
-            </a:r>
-            <a:endParaRPr lang="en-US" sz="1000" dirty="0"/>
+              <a:t>YOPHARMA | دليل واجهات ومميزات المنصة</a:t>
+            </a:r>
+            <a:endParaRPr lang="en-US" sz="900" dirty="0"/>
           </a:p>
         </p:txBody>
       </p:sp>
@@ -4204,24 +4033,24 @@
         </p:nvSpPr>
         <p:spPr>
           <a:xfrm>
-            <a:off x="731520" y="640080"/>
-            <a:ext cx="10058400" cy="548640"/>
-          </a:xfrm>
-          <a:prstGeom prst="rect">
-            <a:avLst/>
-          </a:prstGeom>
-          <a:noFill/>
-          <a:ln/>
-        </p:spPr>
-        <p:txBody>
-          <a:bodyPr wrap="square" rtlCol="0" anchor="ctr"/>
-          <a:lstStyle/>
-          <a:p>
-            <a:pPr indent="0" marL="0">
-              <a:buNone/>
-            </a:pPr>
-            <a:r>
-              <a:rPr lang="en-US" sz="2200" b="1" dirty="0">
+            <a:off x="548640" y="548640"/>
+            <a:ext cx="10972800" cy="502920"/>
+          </a:xfrm>
+          <a:prstGeom prst="rect">
+            <a:avLst/>
+          </a:prstGeom>
+          <a:noFill/>
+          <a:ln/>
+        </p:spPr>
+        <p:txBody>
+          <a:bodyPr wrap="square" rtlCol="0" anchor="ctr"/>
+          <a:lstStyle/>
+          <a:p>
+            <a:pPr indent="0" marL="0">
+              <a:buNone/>
+            </a:pPr>
+            <a:r>
+              <a:rPr lang="en-US" sz="1800" b="1" dirty="0">
                 <a:solidFill>
                   <a:srgbClr val="0F172A"/>
                 </a:solidFill>
@@ -4229,9 +4058,9 @@
                 <a:ea typeface="Arial" pitchFamily="34" charset="-122"/>
                 <a:cs typeface="Arial" pitchFamily="34" charset="-120"/>
               </a:rPr>
-              <a:t>4. Module 2 — Food-Drug Interactions &amp; Meal Timing</a:t>
-            </a:r>
-            <a:endParaRPr lang="en-US" sz="2200" dirty="0"/>
+              <a:t>4. دليل المقاييس الحيوية والتحاليل المخبرية (22 Biomarkers)</a:t>
+            </a:r>
+            <a:endParaRPr lang="en-US" sz="1800" dirty="0"/>
           </a:p>
         </p:txBody>
       </p:sp>
@@ -4243,16 +4072,16 @@
         </p:nvSpPr>
         <p:spPr>
           <a:xfrm>
-            <a:off x="731520" y="1234440"/>
-            <a:ext cx="10698480" cy="0"/>
+            <a:off x="548640" y="1097280"/>
+            <a:ext cx="11064240" cy="0"/>
           </a:xfrm>
           <a:prstGeom prst="line">
             <a:avLst/>
           </a:prstGeom>
           <a:noFill/>
-          <a:ln w="19050">
+          <a:ln w="15240">
             <a:solidFill>
-              <a:srgbClr val="E2E8F0"/>
+              <a:srgbClr val="CBD5E1"/>
             </a:solidFill>
             <a:prstDash val="solid"/>
           </a:ln>
@@ -4266,12 +4095,12 @@
         </p:nvSpPr>
         <p:spPr>
           <a:xfrm>
-            <a:off x="731520" y="1463040"/>
-            <a:ext cx="5120640" cy="4663440"/>
+            <a:off x="548640" y="1234440"/>
+            <a:ext cx="4389120" cy="5029200"/>
           </a:xfrm>
           <a:prstGeom prst="roundRect">
             <a:avLst>
-              <a:gd name="adj" fmla="val 2353"/>
+              <a:gd name="adj" fmla="val 2083"/>
             </a:avLst>
           </a:prstGeom>
           <a:solidFill>
@@ -4279,7 +4108,7 @@
           </a:solidFill>
           <a:ln w="12700">
             <a:solidFill>
-              <a:srgbClr val="E2E8F0"/>
+              <a:srgbClr val="CBD5E1"/>
             </a:solidFill>
             <a:prstDash val="solid"/>
           </a:ln>
@@ -4293,34 +4122,34 @@
         </p:nvSpPr>
         <p:spPr>
           <a:xfrm>
-            <a:off x="1005840" y="1645920"/>
-            <a:ext cx="4572000" cy="365760"/>
-          </a:xfrm>
-          <a:prstGeom prst="rect">
-            <a:avLst/>
-          </a:prstGeom>
-          <a:noFill/>
-          <a:ln/>
-        </p:spPr>
-        <p:txBody>
-          <a:bodyPr wrap="square" rtlCol="0" anchor="ctr"/>
-          <a:lstStyle/>
-          <a:p>
-            <a:pPr indent="0" marL="0">
-              <a:buNone/>
-            </a:pPr>
-            <a:r>
-              <a:rPr lang="en-US" sz="1500" b="1" dirty="0">
-                <a:solidFill>
-                  <a:srgbClr val="D97706"/>
-                </a:solidFill>
-                <a:latin typeface="Arial" pitchFamily="34" charset="0"/>
-                <a:ea typeface="Arial" pitchFamily="34" charset="-122"/>
-                <a:cs typeface="Arial" pitchFamily="34" charset="-120"/>
-              </a:rPr>
-              <a:t>⏰ Administration Timing Guidelines</a:t>
-            </a:r>
-            <a:endParaRPr lang="en-US" sz="1500" dirty="0"/>
+            <a:off x="731520" y="1371600"/>
+            <a:ext cx="4023360" cy="320040"/>
+          </a:xfrm>
+          <a:prstGeom prst="rect">
+            <a:avLst/>
+          </a:prstGeom>
+          <a:noFill/>
+          <a:ln/>
+        </p:spPr>
+        <p:txBody>
+          <a:bodyPr wrap="square" rtlCol="0" anchor="ctr"/>
+          <a:lstStyle/>
+          <a:p>
+            <a:pPr indent="0" marL="0">
+              <a:buNone/>
+            </a:pPr>
+            <a:r>
+              <a:rPr lang="en-US" sz="1300" b="1" dirty="0">
+                <a:solidFill>
+                  <a:srgbClr val="DC2626"/>
+                </a:solidFill>
+                <a:latin typeface="Arial" pitchFamily="34" charset="0"/>
+                <a:ea typeface="Arial" pitchFamily="34" charset="-122"/>
+                <a:cs typeface="Arial" pitchFamily="34" charset="-120"/>
+              </a:rPr>
+              <a:t>⚠️ المشكلة الواقعية:</a:t>
+            </a:r>
+            <a:endParaRPr lang="en-US" sz="1300" dirty="0"/>
           </a:p>
         </p:txBody>
       </p:sp>
@@ -4332,8 +4161,8 @@
         </p:nvSpPr>
         <p:spPr>
           <a:xfrm>
-            <a:off x="1005840" y="2194560"/>
-            <a:ext cx="4572000" cy="3749040"/>
+            <a:off x="731520" y="1691640"/>
+            <a:ext cx="4023360" cy="1097280"/>
           </a:xfrm>
           <a:prstGeom prst="rect">
             <a:avLst/>
@@ -4347,12 +4176,12 @@
           <a:p>
             <a:pPr indent="0" marL="0">
               <a:lnSpc>
-                <a:spcPts val="1800"/>
+                <a:spcPts val="1500"/>
               </a:lnSpc>
               <a:buNone/>
             </a:pPr>
             <a:r>
-              <a:rPr lang="en-US" sz="1100" b="1" dirty="0">
+              <a:rPr lang="en-US" sz="1050" dirty="0">
                 <a:solidFill>
                   <a:srgbClr val="0F172A"/>
                 </a:solidFill>
@@ -4360,17 +4189,80 @@
                 <a:ea typeface="Arial" pitchFamily="34" charset="-122"/>
                 <a:cs typeface="Arial" pitchFamily="34" charset="-120"/>
               </a:rPr>
-              <a:t>• Before Meals (On Empty Stomach):
-</a:t>
-            </a:r>
+              <a:t>صعوبة حفظ النطاقات المرجعية الطبيعية لعشرات التحاليل المعقدة (مثل eGFR, HbA1c, INR, Creatinine)، والارتباك في تفسير حالة المريض هل هي طبيعية أم في مرحلة الخطر.</a:t>
+            </a:r>
+            <a:endParaRPr lang="en-US" sz="1050" dirty="0"/>
+          </a:p>
+        </p:txBody>
+      </p:sp>
+      <p:sp>
+        <p:nvSpPr>
+          <p:cNvPr id="8" name="Text 6"/>
+          <p:cNvSpPr/>
+          <p:nvPr/>
+        </p:nvSpPr>
+        <p:spPr>
+          <a:xfrm>
+            <a:off x="731520" y="2880360"/>
+            <a:ext cx="4023360" cy="320040"/>
+          </a:xfrm>
+          <a:prstGeom prst="rect">
+            <a:avLst/>
+          </a:prstGeom>
+          <a:noFill/>
+          <a:ln/>
+        </p:spPr>
+        <p:txBody>
+          <a:bodyPr wrap="square" rtlCol="0" anchor="ctr"/>
+          <a:lstStyle/>
+          <a:p>
+            <a:pPr indent="0" marL="0">
+              <a:buNone/>
+            </a:pPr>
+            <a:r>
+              <a:rPr lang="en-US" sz="1300" b="1" dirty="0">
+                <a:solidFill>
+                  <a:srgbClr val="0F766E"/>
+                </a:solidFill>
+                <a:latin typeface="Arial" pitchFamily="34" charset="0"/>
+                <a:ea typeface="Arial" pitchFamily="34" charset="-122"/>
+                <a:cs typeface="Arial" pitchFamily="34" charset="-120"/>
+              </a:rPr>
+              <a:t>✨ كيف تحل هذه الواجهة المشكلة؟</a:t>
+            </a:r>
+            <a:endParaRPr lang="en-US" sz="1300" dirty="0"/>
+          </a:p>
+        </p:txBody>
+      </p:sp>
+      <p:sp>
+        <p:nvSpPr>
+          <p:cNvPr id="9" name="Text 7"/>
+          <p:cNvSpPr/>
+          <p:nvPr/>
+        </p:nvSpPr>
+        <p:spPr>
+          <a:xfrm>
+            <a:off x="731520" y="3200400"/>
+            <a:ext cx="4023360" cy="1371600"/>
+          </a:xfrm>
+          <a:prstGeom prst="rect">
+            <a:avLst/>
+          </a:prstGeom>
+          <a:noFill/>
+          <a:ln/>
+        </p:spPr>
+        <p:txBody>
+          <a:bodyPr wrap="square" rtlCol="0" anchor="ctr"/>
+          <a:lstStyle/>
+          <a:p>
             <a:pPr indent="0" marL="0">
               <a:lnSpc>
-                <a:spcPts val="1800"/>
+                <a:spcPts val="1500"/>
               </a:lnSpc>
               <a:buNone/>
             </a:pPr>
             <a:r>
-              <a:rPr lang="en-US" sz="1100" dirty="0">
+              <a:rPr lang="en-US" sz="1050" dirty="0">
                 <a:solidFill>
                   <a:srgbClr val="0F172A"/>
                 </a:solidFill>
@@ -4378,106 +4270,34 @@
                 <a:ea typeface="Arial" pitchFamily="34" charset="-122"/>
                 <a:cs typeface="Arial" pitchFamily="34" charset="-120"/>
               </a:rPr>
-              <a:t>  1 hour before or 2 hours after meals (e.g. Proton Pump Inhibitors, Thyroid Hormones, Ciprofloxacin).
-</a:t>
-            </a:r>
-            <a:pPr indent="0" marL="0">
-              <a:lnSpc>
-                <a:spcPts val="1800"/>
-              </a:lnSpc>
-              <a:buNone/>
-            </a:pPr>
-            <a:r>
-              <a:rPr lang="en-US" sz="1100" b="1" dirty="0">
-                <a:solidFill>
-                  <a:srgbClr val="0F172A"/>
-                </a:solidFill>
-                <a:latin typeface="Arial" pitchFamily="34" charset="0"/>
-                <a:ea typeface="Arial" pitchFamily="34" charset="-122"/>
-                <a:cs typeface="Arial" pitchFamily="34" charset="-120"/>
-              </a:rPr>
-              <a:t>• With or Immediately After Food:
-</a:t>
-            </a:r>
-            <a:pPr indent="0" marL="0">
-              <a:lnSpc>
-                <a:spcPts val="1800"/>
-              </a:lnSpc>
-              <a:buNone/>
-            </a:pPr>
-            <a:r>
-              <a:rPr lang="en-US" sz="1100" dirty="0">
-                <a:solidFill>
-                  <a:srgbClr val="0F172A"/>
-                </a:solidFill>
-                <a:latin typeface="Arial" pitchFamily="34" charset="0"/>
-                <a:ea typeface="Arial" pitchFamily="34" charset="-122"/>
-                <a:cs typeface="Arial" pitchFamily="34" charset="-120"/>
-              </a:rPr>
-              <a:t>  To reduce gastric irritation or enhance absorption (e.g. NSAIDs, Metformin, Fat-soluble agents).
-</a:t>
-            </a:r>
-            <a:pPr indent="0" marL="0">
-              <a:lnSpc>
-                <a:spcPts val="1800"/>
-              </a:lnSpc>
-              <a:buNone/>
-            </a:pPr>
-            <a:r>
-              <a:rPr lang="en-US" sz="1100" b="1" dirty="0">
-                <a:solidFill>
-                  <a:srgbClr val="0F172A"/>
-                </a:solidFill>
-                <a:latin typeface="Arial" pitchFamily="34" charset="0"/>
-                <a:ea typeface="Arial" pitchFamily="34" charset="-122"/>
-                <a:cs typeface="Arial" pitchFamily="34" charset="-120"/>
-              </a:rPr>
-              <a:t>• Specific Circadian Administration:
-</a:t>
-            </a:r>
-            <a:pPr indent="0" marL="0">
-              <a:lnSpc>
-                <a:spcPts val="1800"/>
-              </a:lnSpc>
-              <a:buNone/>
-            </a:pPr>
-            <a:r>
-              <a:rPr lang="en-US" sz="1100" dirty="0">
-                <a:solidFill>
-                  <a:srgbClr val="0F172A"/>
-                </a:solidFill>
-                <a:latin typeface="Arial" pitchFamily="34" charset="0"/>
-                <a:ea typeface="Arial" pitchFamily="34" charset="-122"/>
-                <a:cs typeface="Arial" pitchFamily="34" charset="-120"/>
-              </a:rPr>
-              <a:t>  Bedtime dosing for Statins and sedatives; Morning dosing for Diuretics.</a:t>
-            </a:r>
-            <a:endParaRPr lang="en-US" sz="1100" dirty="0"/>
-          </a:p>
-        </p:txBody>
-      </p:sp>
-      <p:sp>
-        <p:nvSpPr>
-          <p:cNvPr id="8" name="Shape 6"/>
-          <p:cNvSpPr/>
-          <p:nvPr/>
-        </p:nvSpPr>
-        <p:spPr>
-          <a:xfrm>
-            <a:off x="6217920" y="1463040"/>
-            <a:ext cx="5212080" cy="4663440"/>
+              <a:t>مرجع سريري يضم 22 تحليلاً مقسمة لأربع مجموعات (قلب، سكر، كلى، كبد) ومزودة بمقيّم رقمي فوري: يكتب الصيدلي رقم التحليل فتظهر النتيجة السريرية واللون التشخيصي فوراً.</a:t>
+            </a:r>
+            <a:endParaRPr lang="en-US" sz="1050" dirty="0"/>
+          </a:p>
+        </p:txBody>
+      </p:sp>
+      <p:sp>
+        <p:nvSpPr>
+          <p:cNvPr id="10" name="Shape 8"/>
+          <p:cNvSpPr/>
+          <p:nvPr/>
+        </p:nvSpPr>
+        <p:spPr>
+          <a:xfrm>
+            <a:off x="5120640" y="1234440"/>
+            <a:ext cx="6492240" cy="5029200"/>
           </a:xfrm>
           <a:prstGeom prst="roundRect">
             <a:avLst>
-              <a:gd name="adj" fmla="val 2353"/>
+              <a:gd name="adj" fmla="val 1818"/>
             </a:avLst>
           </a:prstGeom>
           <a:solidFill>
-            <a:srgbClr val="FFFFFF"/>
+            <a:srgbClr val="0F172A"/>
           </a:solidFill>
           <a:ln w="12700">
             <a:solidFill>
-              <a:srgbClr val="E2E8F0"/>
+              <a:srgbClr val="334155"/>
             </a:solidFill>
             <a:prstDash val="solid"/>
           </a:ln>
@@ -4485,53 +4305,80 @@
       </p:sp>
       <p:sp>
         <p:nvSpPr>
-          <p:cNvPr id="9" name="Text 7"/>
-          <p:cNvSpPr/>
-          <p:nvPr/>
-        </p:nvSpPr>
-        <p:spPr>
-          <a:xfrm>
-            <a:off x="6492240" y="1645920"/>
-            <a:ext cx="4663440" cy="365760"/>
-          </a:xfrm>
-          <a:prstGeom prst="rect">
-            <a:avLst/>
-          </a:prstGeom>
-          <a:noFill/>
-          <a:ln/>
-        </p:spPr>
-        <p:txBody>
-          <a:bodyPr wrap="square" rtlCol="0" anchor="ctr"/>
-          <a:lstStyle/>
-          <a:p>
-            <a:pPr indent="0" marL="0">
-              <a:buNone/>
-            </a:pPr>
-            <a:r>
-              <a:rPr lang="en-US" sz="1500" b="1" dirty="0">
-                <a:solidFill>
-                  <a:srgbClr val="DC2626"/>
-                </a:solidFill>
-                <a:latin typeface="Arial" pitchFamily="34" charset="0"/>
-                <a:ea typeface="Arial" pitchFamily="34" charset="-122"/>
-                <a:cs typeface="Arial" pitchFamily="34" charset="-120"/>
-              </a:rPr>
-              <a:t>🚫 Prohibited Foods &amp; Beverages</a:t>
-            </a:r>
-            <a:endParaRPr lang="en-US" sz="1500" dirty="0"/>
-          </a:p>
-        </p:txBody>
-      </p:sp>
-      <p:sp>
-        <p:nvSpPr>
-          <p:cNvPr id="10" name="Text 8"/>
-          <p:cNvSpPr/>
-          <p:nvPr/>
-        </p:nvSpPr>
-        <p:spPr>
-          <a:xfrm>
-            <a:off x="6492240" y="2194560"/>
-            <a:ext cx="4663440" cy="3749040"/>
+          <p:cNvPr id="11" name="Text 9"/>
+          <p:cNvSpPr/>
+          <p:nvPr/>
+        </p:nvSpPr>
+        <p:spPr>
+          <a:xfrm>
+            <a:off x="5303520" y="1371600"/>
+            <a:ext cx="6126480" cy="320040"/>
+          </a:xfrm>
+          <a:prstGeom prst="rect">
+            <a:avLst/>
+          </a:prstGeom>
+          <a:noFill/>
+          <a:ln/>
+        </p:spPr>
+        <p:txBody>
+          <a:bodyPr wrap="square" rtlCol="0" anchor="ctr"/>
+          <a:lstStyle/>
+          <a:p>
+            <a:pPr indent="0" marL="0">
+              <a:buNone/>
+            </a:pPr>
+            <a:r>
+              <a:rPr lang="en-US" sz="1200" b="1" dirty="0">
+                <a:solidFill>
+                  <a:srgbClr val="5EEAD4"/>
+                </a:solidFill>
+                <a:latin typeface="Arial" pitchFamily="34" charset="0"/>
+                <a:ea typeface="Arial" pitchFamily="34" charset="-122"/>
+                <a:cs typeface="Arial" pitchFamily="34" charset="-120"/>
+              </a:rPr>
+              <a:t>🖥️ تشريح واجهة دليل ومقيّم المقاييس الحيوية (UI Breakdown):</a:t>
+            </a:r>
+            <a:endParaRPr lang="en-US" sz="1200" dirty="0"/>
+          </a:p>
+        </p:txBody>
+      </p:sp>
+      <p:sp>
+        <p:nvSpPr>
+          <p:cNvPr id="12" name="Shape 10"/>
+          <p:cNvSpPr/>
+          <p:nvPr/>
+        </p:nvSpPr>
+        <p:spPr>
+          <a:xfrm>
+            <a:off x="5303520" y="1783080"/>
+            <a:ext cx="6126480" cy="914400"/>
+          </a:xfrm>
+          <a:prstGeom prst="roundRect">
+            <a:avLst>
+              <a:gd name="adj" fmla="val 8000"/>
+            </a:avLst>
+          </a:prstGeom>
+          <a:solidFill>
+            <a:srgbClr val="1E293B"/>
+          </a:solidFill>
+          <a:ln w="19050">
+            <a:solidFill>
+              <a:srgbClr val="0D9488"/>
+            </a:solidFill>
+            <a:prstDash val="solid"/>
+          </a:ln>
+        </p:spPr>
+      </p:sp>
+      <p:sp>
+        <p:nvSpPr>
+          <p:cNvPr id="13" name="Text 11"/>
+          <p:cNvSpPr/>
+          <p:nvPr/>
+        </p:nvSpPr>
+        <p:spPr>
+          <a:xfrm>
+            <a:off x="5440680" y="1874520"/>
+            <a:ext cx="5852160" cy="731520"/>
           </a:xfrm>
           <a:prstGeom prst="rect">
             <a:avLst/>
@@ -4545,125 +4392,224 @@
           <a:p>
             <a:pPr indent="0" marL="0">
               <a:lnSpc>
-                <a:spcPts val="1800"/>
+                <a:spcPts val="1400"/>
               </a:lnSpc>
               <a:buNone/>
             </a:pPr>
             <a:r>
-              <a:rPr lang="en-US" sz="1100" b="1" dirty="0">
-                <a:solidFill>
-                  <a:srgbClr val="0F172A"/>
-                </a:solidFill>
-                <a:latin typeface="Arial" pitchFamily="34" charset="0"/>
-                <a:ea typeface="Arial" pitchFamily="34" charset="-122"/>
-                <a:cs typeface="Arial" pitchFamily="34" charset="-120"/>
-              </a:rPr>
-              <a:t>• Dairy Products &amp; Calcium:
-</a:t>
+              <a:rPr lang="en-US" sz="1000" b="1" dirty="0">
+                <a:solidFill>
+                  <a:srgbClr val="5EEAD4"/>
+                </a:solidFill>
+                <a:latin typeface="Arial" pitchFamily="34" charset="0"/>
+                <a:ea typeface="Arial" pitchFamily="34" charset="-122"/>
+                <a:cs typeface="Arial" pitchFamily="34" charset="-120"/>
+              </a:rPr>
+              <a:t>[1] تصنيف الفئات السريرية ➔ </a:t>
             </a:r>
             <a:pPr indent="0" marL="0">
               <a:lnSpc>
-                <a:spcPts val="1800"/>
+                <a:spcPts val="1400"/>
               </a:lnSpc>
               <a:buNone/>
             </a:pPr>
             <a:r>
-              <a:rPr lang="en-US" sz="1100" dirty="0">
-                <a:solidFill>
-                  <a:srgbClr val="0F172A"/>
-                </a:solidFill>
-                <a:latin typeface="Arial" pitchFamily="34" charset="0"/>
-                <a:ea typeface="Arial" pitchFamily="34" charset="-122"/>
-                <a:cs typeface="Arial" pitchFamily="34" charset="-120"/>
-              </a:rPr>
-              <a:t>  Chelates fluoroquinolones (Cipro) &amp; tetracyclines, reducing bio-availability by up to 80%.
-</a:t>
-            </a:r>
+              <a:rPr lang="en-US" sz="950" dirty="0">
+                <a:solidFill>
+                  <a:srgbClr val="FFFFFF"/>
+                </a:solidFill>
+                <a:latin typeface="Arial" pitchFamily="34" charset="0"/>
+                <a:ea typeface="Arial" pitchFamily="34" charset="-122"/>
+                <a:cs typeface="Arial" pitchFamily="34" charset="-120"/>
+              </a:rPr>
+              <a:t>تبويبات منظمة (Cardiovascular, Glycemic, Renal, Hepatic) لسهولة الوصول للتحليل.</a:t>
+            </a:r>
+            <a:endParaRPr lang="en-US" sz="1000" dirty="0"/>
+          </a:p>
+        </p:txBody>
+      </p:sp>
+      <p:sp>
+        <p:nvSpPr>
+          <p:cNvPr id="14" name="Shape 12"/>
+          <p:cNvSpPr/>
+          <p:nvPr/>
+        </p:nvSpPr>
+        <p:spPr>
+          <a:xfrm>
+            <a:off x="5303520" y="2834640"/>
+            <a:ext cx="6126480" cy="914400"/>
+          </a:xfrm>
+          <a:prstGeom prst="roundRect">
+            <a:avLst>
+              <a:gd name="adj" fmla="val 8000"/>
+            </a:avLst>
+          </a:prstGeom>
+          <a:solidFill>
+            <a:srgbClr val="1E293B"/>
+          </a:solidFill>
+          <a:ln w="19050">
+            <a:solidFill>
+              <a:srgbClr val="38BDF8"/>
+            </a:solidFill>
+            <a:prstDash val="solid"/>
+          </a:ln>
+        </p:spPr>
+      </p:sp>
+      <p:sp>
+        <p:nvSpPr>
+          <p:cNvPr id="15" name="Text 13"/>
+          <p:cNvSpPr/>
+          <p:nvPr/>
+        </p:nvSpPr>
+        <p:spPr>
+          <a:xfrm>
+            <a:off x="5440680" y="2926080"/>
+            <a:ext cx="5852160" cy="731520"/>
+          </a:xfrm>
+          <a:prstGeom prst="rect">
+            <a:avLst/>
+          </a:prstGeom>
+          <a:noFill/>
+          <a:ln/>
+        </p:spPr>
+        <p:txBody>
+          <a:bodyPr wrap="square" rtlCol="0" anchor="ctr"/>
+          <a:lstStyle/>
+          <a:p>
             <a:pPr indent="0" marL="0">
               <a:lnSpc>
-                <a:spcPts val="1800"/>
+                <a:spcPts val="1400"/>
               </a:lnSpc>
               <a:buNone/>
             </a:pPr>
             <a:r>
-              <a:rPr lang="en-US" sz="1100" b="1" dirty="0">
-                <a:solidFill>
-                  <a:srgbClr val="0F172A"/>
-                </a:solidFill>
-                <a:latin typeface="Arial" pitchFamily="34" charset="0"/>
-                <a:ea typeface="Arial" pitchFamily="34" charset="-122"/>
-                <a:cs typeface="Arial" pitchFamily="34" charset="-120"/>
-              </a:rPr>
-              <a:t>• Grapefruit Juice:
-</a:t>
+              <a:rPr lang="en-US" sz="1000" b="1" dirty="0">
+                <a:solidFill>
+                  <a:srgbClr val="5EEAD4"/>
+                </a:solidFill>
+                <a:latin typeface="Arial" pitchFamily="34" charset="0"/>
+                <a:ea typeface="Arial" pitchFamily="34" charset="-122"/>
+                <a:cs typeface="Arial" pitchFamily="34" charset="-120"/>
+              </a:rPr>
+              <a:t>[2] حقل المقيّم الرقمي التفاعلي ➔ </a:t>
             </a:r>
             <a:pPr indent="0" marL="0">
               <a:lnSpc>
-                <a:spcPts val="1800"/>
+                <a:spcPts val="1400"/>
               </a:lnSpc>
               <a:buNone/>
             </a:pPr>
             <a:r>
-              <a:rPr lang="en-US" sz="1100" dirty="0">
-                <a:solidFill>
-                  <a:srgbClr val="0F172A"/>
-                </a:solidFill>
-                <a:latin typeface="Arial" pitchFamily="34" charset="0"/>
-                <a:ea typeface="Arial" pitchFamily="34" charset="-122"/>
-                <a:cs typeface="Arial" pitchFamily="34" charset="-120"/>
-              </a:rPr>
-              <a:t>  Potent CYP3A4 inhibitor causing dangerous serum accumulation of Statins and CCBs.
-</a:t>
-            </a:r>
+              <a:rPr lang="en-US" sz="950" dirty="0">
+                <a:solidFill>
+                  <a:srgbClr val="FFFFFF"/>
+                </a:solidFill>
+                <a:latin typeface="Arial" pitchFamily="34" charset="0"/>
+                <a:ea typeface="Arial" pitchFamily="34" charset="-122"/>
+                <a:cs typeface="Arial" pitchFamily="34" charset="-120"/>
+              </a:rPr>
+              <a:t>إدخال قيمة التحليل (مثل كتابة 1.8 في خانة الكرياتينين) لحساب الحالة والتقييم مباشرة.</a:t>
+            </a:r>
+            <a:endParaRPr lang="en-US" sz="1000" dirty="0"/>
+          </a:p>
+        </p:txBody>
+      </p:sp>
+      <p:sp>
+        <p:nvSpPr>
+          <p:cNvPr id="16" name="Shape 14"/>
+          <p:cNvSpPr/>
+          <p:nvPr/>
+        </p:nvSpPr>
+        <p:spPr>
+          <a:xfrm>
+            <a:off x="5303520" y="3886200"/>
+            <a:ext cx="6126480" cy="914400"/>
+          </a:xfrm>
+          <a:prstGeom prst="roundRect">
+            <a:avLst>
+              <a:gd name="adj" fmla="val 8000"/>
+            </a:avLst>
+          </a:prstGeom>
+          <a:solidFill>
+            <a:srgbClr val="1E293B"/>
+          </a:solidFill>
+          <a:ln w="19050">
+            <a:solidFill>
+              <a:srgbClr val="10B981"/>
+            </a:solidFill>
+            <a:prstDash val="solid"/>
+          </a:ln>
+        </p:spPr>
+      </p:sp>
+      <p:sp>
+        <p:nvSpPr>
+          <p:cNvPr id="17" name="Text 15"/>
+          <p:cNvSpPr/>
+          <p:nvPr/>
+        </p:nvSpPr>
+        <p:spPr>
+          <a:xfrm>
+            <a:off x="5440680" y="3977640"/>
+            <a:ext cx="5852160" cy="731520"/>
+          </a:xfrm>
+          <a:prstGeom prst="rect">
+            <a:avLst/>
+          </a:prstGeom>
+          <a:noFill/>
+          <a:ln/>
+        </p:spPr>
+        <p:txBody>
+          <a:bodyPr wrap="square" rtlCol="0" anchor="ctr"/>
+          <a:lstStyle/>
+          <a:p>
             <a:pPr indent="0" marL="0">
               <a:lnSpc>
-                <a:spcPts val="1800"/>
+                <a:spcPts val="1400"/>
               </a:lnSpc>
               <a:buNone/>
             </a:pPr>
             <a:r>
-              <a:rPr lang="en-US" sz="1100" b="1" dirty="0">
-                <a:solidFill>
-                  <a:srgbClr val="0F172A"/>
-                </a:solidFill>
-                <a:latin typeface="Arial" pitchFamily="34" charset="0"/>
-                <a:ea typeface="Arial" pitchFamily="34" charset="-122"/>
-                <a:cs typeface="Arial" pitchFamily="34" charset="-120"/>
-              </a:rPr>
-              <a:t>• High-Potassium Foods &amp; Bananas:
-</a:t>
+              <a:rPr lang="en-US" sz="1000" b="1" dirty="0">
+                <a:solidFill>
+                  <a:srgbClr val="5EEAD4"/>
+                </a:solidFill>
+                <a:latin typeface="Arial" pitchFamily="34" charset="0"/>
+                <a:ea typeface="Arial" pitchFamily="34" charset="-122"/>
+                <a:cs typeface="Arial" pitchFamily="34" charset="-120"/>
+              </a:rPr>
+              <a:t>[3] شارة التشخيص اللوني ➔ </a:t>
             </a:r>
             <a:pPr indent="0" marL="0">
               <a:lnSpc>
-                <a:spcPts val="1800"/>
+                <a:spcPts val="1400"/>
               </a:lnSpc>
               <a:buNone/>
             </a:pPr>
             <a:r>
-              <a:rPr lang="en-US" sz="1100" dirty="0">
-                <a:solidFill>
-                  <a:srgbClr val="0F172A"/>
-                </a:solidFill>
-                <a:latin typeface="Arial" pitchFamily="34" charset="0"/>
-                <a:ea typeface="Arial" pitchFamily="34" charset="-122"/>
-                <a:cs typeface="Arial" pitchFamily="34" charset="-120"/>
-              </a:rPr>
-              <a:t>  Severe hyperkalemia risk when combined with ACE inhibitors, ARBs, and Spironolactone.</a:t>
-            </a:r>
-            <a:endParaRPr lang="en-US" sz="1100" dirty="0"/>
-          </a:p>
-        </p:txBody>
-      </p:sp>
-      <p:sp>
-        <p:nvSpPr>
-          <p:cNvPr id="11" name="Text 9"/>
-          <p:cNvSpPr/>
-          <p:nvPr/>
-        </p:nvSpPr>
-        <p:spPr>
-          <a:xfrm>
-            <a:off x="731520" y="6400800"/>
-            <a:ext cx="10698480" cy="274320"/>
+              <a:rPr lang="en-US" sz="950" dirty="0">
+                <a:solidFill>
+                  <a:srgbClr val="FFFFFF"/>
+                </a:solidFill>
+                <a:latin typeface="Arial" pitchFamily="34" charset="0"/>
+                <a:ea typeface="Arial" pitchFamily="34" charset="-122"/>
+                <a:cs typeface="Arial" pitchFamily="34" charset="-120"/>
+              </a:rPr>
+              <a:t>(أخضر = طبيعي / أصفر = حذر / أحمر = خطر) مع الدلالة الطبية والتوصية السريرية.</a:t>
+            </a:r>
+            <a:endParaRPr lang="en-US" sz="1000" dirty="0"/>
+          </a:p>
+        </p:txBody>
+      </p:sp>
+      <p:sp>
+        <p:nvSpPr>
+          <p:cNvPr id="18" name="Text 16"/>
+          <p:cNvSpPr/>
+          <p:nvPr/>
+        </p:nvSpPr>
+        <p:spPr>
+          <a:xfrm>
+            <a:off x="548640" y="6446520"/>
+            <a:ext cx="11064240" cy="228600"/>
           </a:xfrm>
           <a:prstGeom prst="rect">
             <a:avLst/>
@@ -4679,7 +4625,7 @@
               <a:buNone/>
             </a:pPr>
             <a:r>
-              <a:rPr lang="en-US" sz="900" dirty="0">
+              <a:rPr lang="en-US" sz="850" dirty="0">
                 <a:solidFill>
                   <a:srgbClr val="64748B"/>
                 </a:solidFill>
@@ -4687,9 +4633,9 @@
                 <a:ea typeface="Arial" pitchFamily="34" charset="-122"/>
                 <a:cs typeface="Arial" pitchFamily="34" charset="-120"/>
               </a:rPr>
-              <a:t>Egyptian Chinese University (ECU) • Faculty of Pharmacy | Developed by Youssef Mohamed</a:t>
-            </a:r>
-            <a:endParaRPr lang="en-US" sz="900" dirty="0"/>
+              <a:t>كلية الصيدلة • الجامعة المصرية الصينية (ECU) | تطوير: يوسف محمد | YoPharma Clinical Suite</a:t>
+            </a:r>
+            <a:endParaRPr lang="en-US" sz="850" dirty="0"/>
           </a:p>
         </p:txBody>
       </p:sp>
@@ -4733,24 +4679,24 @@
         </p:nvSpPr>
         <p:spPr>
           <a:xfrm>
-            <a:off x="731520" y="365760"/>
-            <a:ext cx="9144000" cy="274320"/>
-          </a:xfrm>
-          <a:prstGeom prst="rect">
-            <a:avLst/>
-          </a:prstGeom>
-          <a:noFill/>
-          <a:ln/>
-        </p:spPr>
-        <p:txBody>
-          <a:bodyPr wrap="square" rtlCol="0" anchor="ctr"/>
-          <a:lstStyle/>
-          <a:p>
-            <a:pPr indent="0" marL="0">
-              <a:buNone/>
-            </a:pPr>
-            <a:r>
-              <a:rPr lang="en-US" sz="1000" b="1" dirty="0">
+            <a:off x="548640" y="320040"/>
+            <a:ext cx="9144000" cy="228600"/>
+          </a:xfrm>
+          <a:prstGeom prst="rect">
+            <a:avLst/>
+          </a:prstGeom>
+          <a:noFill/>
+          <a:ln/>
+        </p:spPr>
+        <p:txBody>
+          <a:bodyPr wrap="square" rtlCol="0" anchor="ctr"/>
+          <a:lstStyle/>
+          <a:p>
+            <a:pPr indent="0" marL="0">
+              <a:buNone/>
+            </a:pPr>
+            <a:r>
+              <a:rPr lang="en-US" sz="900" b="1" dirty="0">
                 <a:solidFill>
                   <a:srgbClr val="0D9488"/>
                 </a:solidFill>
@@ -4758,9 +4704,9 @@
                 <a:ea typeface="Arial" pitchFamily="34" charset="-122"/>
                 <a:cs typeface="Arial" pitchFamily="34" charset="-120"/>
               </a:rPr>
-              <a:t>YOPHARMA | CLINICAL PHARMACY SUITE</a:t>
-            </a:r>
-            <a:endParaRPr lang="en-US" sz="1000" dirty="0"/>
+              <a:t>YOPHARMA | دليل واجهات ومميزات المنصة</a:t>
+            </a:r>
+            <a:endParaRPr lang="en-US" sz="900" dirty="0"/>
           </a:p>
         </p:txBody>
       </p:sp>
@@ -4772,24 +4718,24 @@
         </p:nvSpPr>
         <p:spPr>
           <a:xfrm>
-            <a:off x="731520" y="640080"/>
-            <a:ext cx="10058400" cy="548640"/>
-          </a:xfrm>
-          <a:prstGeom prst="rect">
-            <a:avLst/>
-          </a:prstGeom>
-          <a:noFill/>
-          <a:ln/>
-        </p:spPr>
-        <p:txBody>
-          <a:bodyPr wrap="square" rtlCol="0" anchor="ctr"/>
-          <a:lstStyle/>
-          <a:p>
-            <a:pPr indent="0" marL="0">
-              <a:buNone/>
-            </a:pPr>
-            <a:r>
-              <a:rPr lang="en-US" sz="2200" b="1" dirty="0">
+            <a:off x="548640" y="548640"/>
+            <a:ext cx="10972800" cy="502920"/>
+          </a:xfrm>
+          <a:prstGeom prst="rect">
+            <a:avLst/>
+          </a:prstGeom>
+          <a:noFill/>
+          <a:ln/>
+        </p:spPr>
+        <p:txBody>
+          <a:bodyPr wrap="square" rtlCol="0" anchor="ctr"/>
+          <a:lstStyle/>
+          <a:p>
+            <a:pPr indent="0" marL="0">
+              <a:buNone/>
+            </a:pPr>
+            <a:r>
+              <a:rPr lang="en-US" sz="1800" b="1" dirty="0">
                 <a:solidFill>
                   <a:srgbClr val="0F172A"/>
                 </a:solidFill>
@@ -4797,9 +4743,9 @@
                 <a:ea typeface="Arial" pitchFamily="34" charset="-122"/>
                 <a:cs typeface="Arial" pitchFamily="34" charset="-120"/>
               </a:rPr>
-              <a:t>5. Module 3 — Vital Signs &amp; 22 Biomarkers Guide</a:t>
-            </a:r>
-            <a:endParaRPr lang="en-US" sz="2200" dirty="0"/>
+              <a:t>5. دليل البدائل والمثائل في السوق المصري (Egyptian Alternatives)</a:t>
+            </a:r>
+            <a:endParaRPr lang="en-US" sz="1800" dirty="0"/>
           </a:p>
         </p:txBody>
       </p:sp>
@@ -4811,16 +4757,16 @@
         </p:nvSpPr>
         <p:spPr>
           <a:xfrm>
-            <a:off x="731520" y="1234440"/>
-            <a:ext cx="10698480" cy="0"/>
+            <a:off x="548640" y="1097280"/>
+            <a:ext cx="11064240" cy="0"/>
           </a:xfrm>
           <a:prstGeom prst="line">
             <a:avLst/>
           </a:prstGeom>
           <a:noFill/>
-          <a:ln w="19050">
+          <a:ln w="15240">
             <a:solidFill>
-              <a:srgbClr val="E2E8F0"/>
+              <a:srgbClr val="CBD5E1"/>
             </a:solidFill>
             <a:prstDash val="solid"/>
           </a:ln>
@@ -4834,12 +4780,12 @@
         </p:nvSpPr>
         <p:spPr>
           <a:xfrm>
-            <a:off x="731520" y="1463040"/>
-            <a:ext cx="10698480" cy="4663440"/>
+            <a:off x="548640" y="1234440"/>
+            <a:ext cx="4389120" cy="5029200"/>
           </a:xfrm>
           <a:prstGeom prst="roundRect">
             <a:avLst>
-              <a:gd name="adj" fmla="val 2353"/>
+              <a:gd name="adj" fmla="val 2083"/>
             </a:avLst>
           </a:prstGeom>
           <a:solidFill>
@@ -4847,7 +4793,7 @@
           </a:solidFill>
           <a:ln w="12700">
             <a:solidFill>
-              <a:srgbClr val="E2E8F0"/>
+              <a:srgbClr val="CBD5E1"/>
             </a:solidFill>
             <a:prstDash val="solid"/>
           </a:ln>
@@ -4861,24 +4807,105 @@
         </p:nvSpPr>
         <p:spPr>
           <a:xfrm>
-            <a:off x="1005840" y="1645920"/>
-            <a:ext cx="10058400" cy="320040"/>
-          </a:xfrm>
-          <a:prstGeom prst="rect">
-            <a:avLst/>
-          </a:prstGeom>
-          <a:noFill/>
-          <a:ln/>
-        </p:spPr>
-        <p:txBody>
-          <a:bodyPr wrap="square" rtlCol="0" anchor="ctr"/>
-          <a:lstStyle/>
-          <a:p>
-            <a:pPr indent="0" marL="0">
-              <a:buNone/>
-            </a:pPr>
-            <a:r>
-              <a:rPr lang="en-US" sz="1400" b="1" dirty="0">
+            <a:off x="731520" y="1371600"/>
+            <a:ext cx="4023360" cy="320040"/>
+          </a:xfrm>
+          <a:prstGeom prst="rect">
+            <a:avLst/>
+          </a:prstGeom>
+          <a:noFill/>
+          <a:ln/>
+        </p:spPr>
+        <p:txBody>
+          <a:bodyPr wrap="square" rtlCol="0" anchor="ctr"/>
+          <a:lstStyle/>
+          <a:p>
+            <a:pPr indent="0" marL="0">
+              <a:buNone/>
+            </a:pPr>
+            <a:r>
+              <a:rPr lang="en-US" sz="1300" b="1" dirty="0">
+                <a:solidFill>
+                  <a:srgbClr val="DC2626"/>
+                </a:solidFill>
+                <a:latin typeface="Arial" pitchFamily="34" charset="0"/>
+                <a:ea typeface="Arial" pitchFamily="34" charset="-122"/>
+                <a:cs typeface="Arial" pitchFamily="34" charset="-120"/>
+              </a:rPr>
+              <a:t>⚠️ المشكلة الواقعية:</a:t>
+            </a:r>
+            <a:endParaRPr lang="en-US" sz="1300" dirty="0"/>
+          </a:p>
+        </p:txBody>
+      </p:sp>
+      <p:sp>
+        <p:nvSpPr>
+          <p:cNvPr id="7" name="Text 5"/>
+          <p:cNvSpPr/>
+          <p:nvPr/>
+        </p:nvSpPr>
+        <p:spPr>
+          <a:xfrm>
+            <a:off x="731520" y="1691640"/>
+            <a:ext cx="4023360" cy="1097280"/>
+          </a:xfrm>
+          <a:prstGeom prst="rect">
+            <a:avLst/>
+          </a:prstGeom>
+          <a:noFill/>
+          <a:ln/>
+        </p:spPr>
+        <p:txBody>
+          <a:bodyPr wrap="square" rtlCol="0" anchor="ctr"/>
+          <a:lstStyle/>
+          <a:p>
+            <a:pPr indent="0" marL="0">
+              <a:lnSpc>
+                <a:spcPts val="1500"/>
+              </a:lnSpc>
+              <a:buNone/>
+            </a:pPr>
+            <a:r>
+              <a:rPr lang="en-US" sz="1050" dirty="0">
+                <a:solidFill>
+                  <a:srgbClr val="0F172A"/>
+                </a:solidFill>
+                <a:latin typeface="Arial" pitchFamily="34" charset="0"/>
+                <a:ea typeface="Arial" pitchFamily="34" charset="-122"/>
+                <a:cs typeface="Arial" pitchFamily="34" charset="-120"/>
+              </a:rPr>
+              <a:t>نقص الأدوية المتكرر في الصيدليات المصرية، وارتفاع أسعار الأدوية المستوردة على المرضى محدودي الدخل، مع صعوبة حصر البدائل التجارية المتطابقة كيميائياً.</a:t>
+            </a:r>
+            <a:endParaRPr lang="en-US" sz="1050" dirty="0"/>
+          </a:p>
+        </p:txBody>
+      </p:sp>
+      <p:sp>
+        <p:nvSpPr>
+          <p:cNvPr id="8" name="Text 6"/>
+          <p:cNvSpPr/>
+          <p:nvPr/>
+        </p:nvSpPr>
+        <p:spPr>
+          <a:xfrm>
+            <a:off x="731520" y="2880360"/>
+            <a:ext cx="4023360" cy="320040"/>
+          </a:xfrm>
+          <a:prstGeom prst="rect">
+            <a:avLst/>
+          </a:prstGeom>
+          <a:noFill/>
+          <a:ln/>
+        </p:spPr>
+        <p:txBody>
+          <a:bodyPr wrap="square" rtlCol="0" anchor="ctr"/>
+          <a:lstStyle/>
+          <a:p>
+            <a:pPr indent="0" marL="0">
+              <a:buNone/>
+            </a:pPr>
+            <a:r>
+              <a:rPr lang="en-US" sz="1300" b="1" dirty="0">
                 <a:solidFill>
                   <a:srgbClr val="0F766E"/>
                 </a:solidFill>
@@ -4886,34 +4913,76 @@
                 <a:ea typeface="Arial" pitchFamily="34" charset="-122"/>
                 <a:cs typeface="Arial" pitchFamily="34" charset="-120"/>
               </a:rPr>
-              <a:t>Comprehensive Reference for 22 Laboratory Parameters &amp; Interactive Evaluator:</a:t>
-            </a:r>
-            <a:endParaRPr lang="en-US" sz="1400" dirty="0"/>
-          </a:p>
-        </p:txBody>
-      </p:sp>
-      <p:sp>
-        <p:nvSpPr>
-          <p:cNvPr id="7" name="Shape 5"/>
-          <p:cNvSpPr/>
-          <p:nvPr/>
-        </p:nvSpPr>
-        <p:spPr>
-          <a:xfrm>
-            <a:off x="1005840" y="2194560"/>
-            <a:ext cx="2377440" cy="3657600"/>
+              <a:t>✨ كيف تحل هذه الواجهة المشكلة؟</a:t>
+            </a:r>
+            <a:endParaRPr lang="en-US" sz="1300" dirty="0"/>
+          </a:p>
+        </p:txBody>
+      </p:sp>
+      <p:sp>
+        <p:nvSpPr>
+          <p:cNvPr id="9" name="Text 7"/>
+          <p:cNvSpPr/>
+          <p:nvPr/>
+        </p:nvSpPr>
+        <p:spPr>
+          <a:xfrm>
+            <a:off x="731520" y="3200400"/>
+            <a:ext cx="4023360" cy="1371600"/>
+          </a:xfrm>
+          <a:prstGeom prst="rect">
+            <a:avLst/>
+          </a:prstGeom>
+          <a:noFill/>
+          <a:ln/>
+        </p:spPr>
+        <p:txBody>
+          <a:bodyPr wrap="square" rtlCol="0" anchor="ctr"/>
+          <a:lstStyle/>
+          <a:p>
+            <a:pPr indent="0" marL="0">
+              <a:lnSpc>
+                <a:spcPts val="1500"/>
+              </a:lnSpc>
+              <a:buNone/>
+            </a:pPr>
+            <a:r>
+              <a:rPr lang="en-US" sz="1050" dirty="0">
+                <a:solidFill>
+                  <a:srgbClr val="0F172A"/>
+                </a:solidFill>
+                <a:latin typeface="Arial" pitchFamily="34" charset="0"/>
+                <a:ea typeface="Arial" pitchFamily="34" charset="-122"/>
+                <a:cs typeface="Arial" pitchFamily="34" charset="-120"/>
+              </a:rPr>
+              <a:t>تحلل الواجهة المادة الفعالة العلمية وتستخرج فوراً كافة البدائل المصرية المسجلة مع الشركات المصنعة وتصنيف الفئة السعرية (رخيص / متوسط / مرتفع) لتوفير خيارات مناسبة للجميع.</a:t>
+            </a:r>
+            <a:endParaRPr lang="en-US" sz="1050" dirty="0"/>
+          </a:p>
+        </p:txBody>
+      </p:sp>
+      <p:sp>
+        <p:nvSpPr>
+          <p:cNvPr id="10" name="Shape 8"/>
+          <p:cNvSpPr/>
+          <p:nvPr/>
+        </p:nvSpPr>
+        <p:spPr>
+          <a:xfrm>
+            <a:off x="5120640" y="1234440"/>
+            <a:ext cx="6492240" cy="5029200"/>
           </a:xfrm>
           <a:prstGeom prst="roundRect">
             <a:avLst>
-              <a:gd name="adj" fmla="val 3846"/>
+              <a:gd name="adj" fmla="val 1818"/>
             </a:avLst>
           </a:prstGeom>
           <a:solidFill>
-            <a:srgbClr val="F0FDFA"/>
+            <a:srgbClr val="0F172A"/>
           </a:solidFill>
           <a:ln w="12700">
             <a:solidFill>
-              <a:srgbClr val="99F6E4"/>
+              <a:srgbClr val="334155"/>
             </a:solidFill>
             <a:prstDash val="solid"/>
           </a:ln>
@@ -4921,207 +4990,65 @@
       </p:sp>
       <p:sp>
         <p:nvSpPr>
-          <p:cNvPr id="8" name="Text 6"/>
-          <p:cNvSpPr/>
-          <p:nvPr/>
-        </p:nvSpPr>
-        <p:spPr>
-          <a:xfrm>
-            <a:off x="1143000" y="2377440"/>
-            <a:ext cx="2103120" cy="457200"/>
-          </a:xfrm>
-          <a:prstGeom prst="rect">
-            <a:avLst/>
-          </a:prstGeom>
-          <a:noFill/>
-          <a:ln/>
-        </p:spPr>
-        <p:txBody>
-          <a:bodyPr wrap="square" rtlCol="0" anchor="ctr"/>
-          <a:lstStyle/>
-          <a:p>
-            <a:pPr indent="0" marL="0">
-              <a:buNone/>
-            </a:pPr>
-            <a:r>
-              <a:rPr lang="en-US" sz="1100" b="1" dirty="0">
-                <a:solidFill>
-                  <a:srgbClr val="0F766E"/>
-                </a:solidFill>
-                <a:latin typeface="Arial" pitchFamily="34" charset="0"/>
-                <a:ea typeface="Arial" pitchFamily="34" charset="-122"/>
-                <a:cs typeface="Arial" pitchFamily="34" charset="-120"/>
-              </a:rPr>
-              <a:t>🫀 Cardiovascular &amp; Vitals</a:t>
-            </a:r>
-            <a:endParaRPr lang="en-US" sz="1100" dirty="0"/>
-          </a:p>
-        </p:txBody>
-      </p:sp>
-      <p:sp>
-        <p:nvSpPr>
-          <p:cNvPr id="9" name="Text 7"/>
-          <p:cNvSpPr/>
-          <p:nvPr/>
-        </p:nvSpPr>
-        <p:spPr>
-          <a:xfrm>
-            <a:off x="1143000" y="2926080"/>
-            <a:ext cx="2103120" cy="2743200"/>
-          </a:xfrm>
-          <a:prstGeom prst="rect">
-            <a:avLst/>
-          </a:prstGeom>
-          <a:noFill/>
-          <a:ln/>
-        </p:spPr>
-        <p:txBody>
-          <a:bodyPr wrap="square" rtlCol="0" anchor="ctr"/>
-          <a:lstStyle/>
-          <a:p>
-            <a:pPr indent="0" marL="0">
-              <a:lnSpc>
-                <a:spcPts val="1800"/>
-              </a:lnSpc>
-              <a:buNone/>
-            </a:pPr>
-            <a:r>
-              <a:rPr lang="en-US" sz="1000" dirty="0">
-                <a:solidFill>
-                  <a:srgbClr val="0F172A"/>
-                </a:solidFill>
-                <a:latin typeface="Arial" pitchFamily="34" charset="0"/>
-                <a:ea typeface="Arial" pitchFamily="34" charset="-122"/>
-                <a:cs typeface="Arial" pitchFamily="34" charset="-120"/>
-              </a:rPr>
-              <a:t>• Blood Pressure (SBP/DBP)</a:t>
-            </a:r>
-            <a:endParaRPr lang="en-US" sz="1000" dirty="0"/>
-          </a:p>
-          <a:p>
-            <a:pPr indent="0" marL="0">
-              <a:lnSpc>
-                <a:spcPts val="1800"/>
-              </a:lnSpc>
-              <a:buNone/>
-            </a:pPr>
-            <a:r>
-              <a:rPr lang="en-US" sz="1000" dirty="0">
-                <a:solidFill>
-                  <a:srgbClr val="0F172A"/>
-                </a:solidFill>
-                <a:latin typeface="Arial" pitchFamily="34" charset="0"/>
-                <a:ea typeface="Arial" pitchFamily="34" charset="-122"/>
-                <a:cs typeface="Arial" pitchFamily="34" charset="-120"/>
-              </a:rPr>
-              <a:t>• Heart Rate / Pulse</a:t>
-            </a:r>
-            <a:endParaRPr lang="en-US" sz="1000" dirty="0"/>
-          </a:p>
-          <a:p>
-            <a:pPr indent="0" marL="0">
-              <a:lnSpc>
-                <a:spcPts val="1800"/>
-              </a:lnSpc>
-              <a:buNone/>
-            </a:pPr>
-            <a:r>
-              <a:rPr lang="en-US" sz="1000" dirty="0">
-                <a:solidFill>
-                  <a:srgbClr val="0F172A"/>
-                </a:solidFill>
-                <a:latin typeface="Arial" pitchFamily="34" charset="0"/>
-                <a:ea typeface="Arial" pitchFamily="34" charset="-122"/>
-                <a:cs typeface="Arial" pitchFamily="34" charset="-120"/>
-              </a:rPr>
-              <a:t>• Respiratory Rate</a:t>
-            </a:r>
-            <a:endParaRPr lang="en-US" sz="1000" dirty="0"/>
-          </a:p>
-          <a:p>
-            <a:pPr indent="0" marL="0">
-              <a:lnSpc>
-                <a:spcPts val="1800"/>
-              </a:lnSpc>
-              <a:buNone/>
-            </a:pPr>
-            <a:r>
-              <a:rPr lang="en-US" sz="1000" dirty="0">
-                <a:solidFill>
-                  <a:srgbClr val="0F172A"/>
-                </a:solidFill>
-                <a:latin typeface="Arial" pitchFamily="34" charset="0"/>
-                <a:ea typeface="Arial" pitchFamily="34" charset="-122"/>
-                <a:cs typeface="Arial" pitchFamily="34" charset="-120"/>
-              </a:rPr>
-              <a:t>• Body Temperature</a:t>
-            </a:r>
-            <a:endParaRPr lang="en-US" sz="1000" dirty="0"/>
-          </a:p>
-          <a:p>
-            <a:pPr indent="0" marL="0">
-              <a:lnSpc>
-                <a:spcPts val="1800"/>
-              </a:lnSpc>
-              <a:buNone/>
-            </a:pPr>
-            <a:r>
-              <a:rPr lang="en-US" sz="1000" dirty="0">
-                <a:solidFill>
-                  <a:srgbClr val="0F172A"/>
-                </a:solidFill>
-                <a:latin typeface="Arial" pitchFamily="34" charset="0"/>
-                <a:ea typeface="Arial" pitchFamily="34" charset="-122"/>
-                <a:cs typeface="Arial" pitchFamily="34" charset="-120"/>
-              </a:rPr>
-              <a:t>• Oxygen Saturation (SpO2)</a:t>
-            </a:r>
-            <a:endParaRPr lang="en-US" sz="1000" dirty="0"/>
-          </a:p>
-          <a:p>
-            <a:pPr indent="0" marL="0">
-              <a:lnSpc>
-                <a:spcPts val="1800"/>
-              </a:lnSpc>
-              <a:buNone/>
-            </a:pPr>
-            <a:r>
-              <a:rPr lang="en-US" sz="1000" dirty="0">
-                <a:solidFill>
-                  <a:srgbClr val="0F172A"/>
-                </a:solidFill>
-                <a:latin typeface="Arial" pitchFamily="34" charset="0"/>
-                <a:ea typeface="Arial" pitchFamily="34" charset="-122"/>
-                <a:cs typeface="Arial" pitchFamily="34" charset="-120"/>
-              </a:rPr>
-              <a:t>• BMI &amp; Body Weight</a:t>
-            </a:r>
-            <a:endParaRPr lang="en-US" sz="1000" dirty="0"/>
-          </a:p>
-        </p:txBody>
-      </p:sp>
-      <p:sp>
-        <p:nvSpPr>
-          <p:cNvPr id="10" name="Shape 8"/>
-          <p:cNvSpPr/>
-          <p:nvPr/>
-        </p:nvSpPr>
-        <p:spPr>
-          <a:xfrm>
-            <a:off x="3566160" y="2194560"/>
-            <a:ext cx="2377440" cy="3657600"/>
+          <p:cNvPr id="11" name="Text 9"/>
+          <p:cNvSpPr/>
+          <p:nvPr/>
+        </p:nvSpPr>
+        <p:spPr>
+          <a:xfrm>
+            <a:off x="5303520" y="1371600"/>
+            <a:ext cx="6126480" cy="320040"/>
+          </a:xfrm>
+          <a:prstGeom prst="rect">
+            <a:avLst/>
+          </a:prstGeom>
+          <a:noFill/>
+          <a:ln/>
+        </p:spPr>
+        <p:txBody>
+          <a:bodyPr wrap="square" rtlCol="0" anchor="ctr"/>
+          <a:lstStyle/>
+          <a:p>
+            <a:pPr indent="0" marL="0">
+              <a:buNone/>
+            </a:pPr>
+            <a:r>
+              <a:rPr lang="en-US" sz="1200" b="1" dirty="0">
+                <a:solidFill>
+                  <a:srgbClr val="5EEAD4"/>
+                </a:solidFill>
+                <a:latin typeface="Arial" pitchFamily="34" charset="0"/>
+                <a:ea typeface="Arial" pitchFamily="34" charset="-122"/>
+                <a:cs typeface="Arial" pitchFamily="34" charset="-120"/>
+              </a:rPr>
+              <a:t>🖥️ تشريح واجهة دليل البدائل والأسعار في مصر (UI Breakdown):</a:t>
+            </a:r>
+            <a:endParaRPr lang="en-US" sz="1200" dirty="0"/>
+          </a:p>
+        </p:txBody>
+      </p:sp>
+      <p:sp>
+        <p:nvSpPr>
+          <p:cNvPr id="12" name="Shape 10"/>
+          <p:cNvSpPr/>
+          <p:nvPr/>
+        </p:nvSpPr>
+        <p:spPr>
+          <a:xfrm>
+            <a:off x="5303520" y="1783080"/>
+            <a:ext cx="6126480" cy="914400"/>
           </a:xfrm>
           <a:prstGeom prst="roundRect">
             <a:avLst>
-              <a:gd name="adj" fmla="val 3846"/>
+              <a:gd name="adj" fmla="val 8000"/>
             </a:avLst>
           </a:prstGeom>
           <a:solidFill>
-            <a:srgbClr val="F0FDFA"/>
+            <a:srgbClr val="1E293B"/>
           </a:solidFill>
-          <a:ln w="12700">
+          <a:ln w="19050">
             <a:solidFill>
-              <a:srgbClr val="99F6E4"/>
+              <a:srgbClr val="0D9488"/>
             </a:solidFill>
             <a:prstDash val="solid"/>
           </a:ln>
@@ -5129,53 +5056,14 @@
       </p:sp>
       <p:sp>
         <p:nvSpPr>
-          <p:cNvPr id="11" name="Text 9"/>
-          <p:cNvSpPr/>
-          <p:nvPr/>
-        </p:nvSpPr>
-        <p:spPr>
-          <a:xfrm>
-            <a:off x="3703320" y="2377440"/>
-            <a:ext cx="2103120" cy="457200"/>
-          </a:xfrm>
-          <a:prstGeom prst="rect">
-            <a:avLst/>
-          </a:prstGeom>
-          <a:noFill/>
-          <a:ln/>
-        </p:spPr>
-        <p:txBody>
-          <a:bodyPr wrap="square" rtlCol="0" anchor="ctr"/>
-          <a:lstStyle/>
-          <a:p>
-            <a:pPr indent="0" marL="0">
-              <a:buNone/>
-            </a:pPr>
-            <a:r>
-              <a:rPr lang="en-US" sz="1100" b="1" dirty="0">
-                <a:solidFill>
-                  <a:srgbClr val="0F766E"/>
-                </a:solidFill>
-                <a:latin typeface="Arial" pitchFamily="34" charset="0"/>
-                <a:ea typeface="Arial" pitchFamily="34" charset="-122"/>
-                <a:cs typeface="Arial" pitchFamily="34" charset="-120"/>
-              </a:rPr>
-              <a:t>🩸 Metabolic &amp; Glycemic</a:t>
-            </a:r>
-            <a:endParaRPr lang="en-US" sz="1100" dirty="0"/>
-          </a:p>
-        </p:txBody>
-      </p:sp>
-      <p:sp>
-        <p:nvSpPr>
-          <p:cNvPr id="12" name="Text 10"/>
-          <p:cNvSpPr/>
-          <p:nvPr/>
-        </p:nvSpPr>
-        <p:spPr>
-          <a:xfrm>
-            <a:off x="3703320" y="2926080"/>
-            <a:ext cx="2103120" cy="2743200"/>
+          <p:cNvPr id="13" name="Text 11"/>
+          <p:cNvSpPr/>
+          <p:nvPr/>
+        </p:nvSpPr>
+        <p:spPr>
+          <a:xfrm>
+            <a:off x="5440680" y="1874520"/>
+            <a:ext cx="5852160" cy="731520"/>
           </a:xfrm>
           <a:prstGeom prst="rect">
             <a:avLst/>
@@ -5189,147 +5077,64 @@
           <a:p>
             <a:pPr indent="0" marL="0">
               <a:lnSpc>
-                <a:spcPts val="1800"/>
+                <a:spcPts val="1400"/>
               </a:lnSpc>
               <a:buNone/>
             </a:pPr>
             <a:r>
-              <a:rPr lang="en-US" sz="1000" dirty="0">
-                <a:solidFill>
-                  <a:srgbClr val="0F172A"/>
-                </a:solidFill>
-                <a:latin typeface="Arial" pitchFamily="34" charset="0"/>
-                <a:ea typeface="Arial" pitchFamily="34" charset="-122"/>
-                <a:cs typeface="Arial" pitchFamily="34" charset="-120"/>
-              </a:rPr>
-              <a:t>• Fasting Blood Glucose (FBG)</a:t>
+              <a:rPr lang="en-US" sz="1000" b="1" dirty="0">
+                <a:solidFill>
+                  <a:srgbClr val="5EEAD4"/>
+                </a:solidFill>
+                <a:latin typeface="Arial" pitchFamily="34" charset="0"/>
+                <a:ea typeface="Arial" pitchFamily="34" charset="-122"/>
+                <a:cs typeface="Arial" pitchFamily="34" charset="-120"/>
+              </a:rPr>
+              <a:t>[1] بطاقة المادة الفعالة ➔ </a:t>
+            </a:r>
+            <a:pPr indent="0" marL="0">
+              <a:lnSpc>
+                <a:spcPts val="1400"/>
+              </a:lnSpc>
+              <a:buNone/>
+            </a:pPr>
+            <a:r>
+              <a:rPr lang="en-US" sz="950" dirty="0">
+                <a:solidFill>
+                  <a:srgbClr val="FFFFFF"/>
+                </a:solidFill>
+                <a:latin typeface="Arial" pitchFamily="34" charset="0"/>
+                <a:ea typeface="Arial" pitchFamily="34" charset="-122"/>
+                <a:cs typeface="Arial" pitchFamily="34" charset="-120"/>
+              </a:rPr>
+              <a:t>عرض الاسم العلمي المعتمد (Active Ingredient) لضمان التطابق العلاجي التام.</a:t>
             </a:r>
             <a:endParaRPr lang="en-US" sz="1000" dirty="0"/>
           </a:p>
-          <a:p>
-            <a:pPr indent="0" marL="0">
-              <a:lnSpc>
-                <a:spcPts val="1800"/>
-              </a:lnSpc>
-              <a:buNone/>
-            </a:pPr>
-            <a:r>
-              <a:rPr lang="en-US" sz="1000" dirty="0">
-                <a:solidFill>
-                  <a:srgbClr val="0F172A"/>
-                </a:solidFill>
-                <a:latin typeface="Arial" pitchFamily="34" charset="0"/>
-                <a:ea typeface="Arial" pitchFamily="34" charset="-122"/>
-                <a:cs typeface="Arial" pitchFamily="34" charset="-120"/>
-              </a:rPr>
-              <a:t>• Postprandial Glucose (PPG)</a:t>
-            </a:r>
-            <a:endParaRPr lang="en-US" sz="1000" dirty="0"/>
-          </a:p>
-          <a:p>
-            <a:pPr indent="0" marL="0">
-              <a:lnSpc>
-                <a:spcPts val="1800"/>
-              </a:lnSpc>
-              <a:buNone/>
-            </a:pPr>
-            <a:r>
-              <a:rPr lang="en-US" sz="1000" dirty="0">
-                <a:solidFill>
-                  <a:srgbClr val="0F172A"/>
-                </a:solidFill>
-                <a:latin typeface="Arial" pitchFamily="34" charset="0"/>
-                <a:ea typeface="Arial" pitchFamily="34" charset="-122"/>
-                <a:cs typeface="Arial" pitchFamily="34" charset="-120"/>
-              </a:rPr>
-              <a:t>• HbA1c (Glycated Hgb)</a:t>
-            </a:r>
-            <a:endParaRPr lang="en-US" sz="1000" dirty="0"/>
-          </a:p>
-          <a:p>
-            <a:pPr indent="0" marL="0">
-              <a:lnSpc>
-                <a:spcPts val="1800"/>
-              </a:lnSpc>
-              <a:buNone/>
-            </a:pPr>
-            <a:r>
-              <a:rPr lang="en-US" sz="1000" dirty="0">
-                <a:solidFill>
-                  <a:srgbClr val="0F172A"/>
-                </a:solidFill>
-                <a:latin typeface="Arial" pitchFamily="34" charset="0"/>
-                <a:ea typeface="Arial" pitchFamily="34" charset="-122"/>
-                <a:cs typeface="Arial" pitchFamily="34" charset="-120"/>
-              </a:rPr>
-              <a:t>• Total Cholesterol</a:t>
-            </a:r>
-            <a:endParaRPr lang="en-US" sz="1000" dirty="0"/>
-          </a:p>
-          <a:p>
-            <a:pPr indent="0" marL="0">
-              <a:lnSpc>
-                <a:spcPts val="1800"/>
-              </a:lnSpc>
-              <a:buNone/>
-            </a:pPr>
-            <a:r>
-              <a:rPr lang="en-US" sz="1000" dirty="0">
-                <a:solidFill>
-                  <a:srgbClr val="0F172A"/>
-                </a:solidFill>
-                <a:latin typeface="Arial" pitchFamily="34" charset="0"/>
-                <a:ea typeface="Arial" pitchFamily="34" charset="-122"/>
-                <a:cs typeface="Arial" pitchFamily="34" charset="-120"/>
-              </a:rPr>
-              <a:t>• Triglycerides &amp; LDL/HDL</a:t>
-            </a:r>
-            <a:endParaRPr lang="en-US" sz="1000" dirty="0"/>
-          </a:p>
-          <a:p>
-            <a:pPr indent="0" marL="0">
-              <a:lnSpc>
-                <a:spcPts val="1800"/>
-              </a:lnSpc>
-              <a:buNone/>
-            </a:pPr>
-            <a:r>
-              <a:rPr lang="en-US" sz="1000" dirty="0">
-                <a:solidFill>
-                  <a:srgbClr val="0F172A"/>
-                </a:solidFill>
-                <a:latin typeface="Arial" pitchFamily="34" charset="0"/>
-                <a:ea typeface="Arial" pitchFamily="34" charset="-122"/>
-                <a:cs typeface="Arial" pitchFamily="34" charset="-120"/>
-              </a:rPr>
-              <a:t>• Serum Uric Acid</a:t>
-            </a:r>
-            <a:endParaRPr lang="en-US" sz="1000" dirty="0"/>
-          </a:p>
-        </p:txBody>
-      </p:sp>
-      <p:sp>
-        <p:nvSpPr>
-          <p:cNvPr id="13" name="Shape 11"/>
-          <p:cNvSpPr/>
-          <p:nvPr/>
-        </p:nvSpPr>
-        <p:spPr>
-          <a:xfrm>
-            <a:off x="6126480" y="2194560"/>
-            <a:ext cx="2377440" cy="3657600"/>
+        </p:txBody>
+      </p:sp>
+      <p:sp>
+        <p:nvSpPr>
+          <p:cNvPr id="14" name="Shape 12"/>
+          <p:cNvSpPr/>
+          <p:nvPr/>
+        </p:nvSpPr>
+        <p:spPr>
+          <a:xfrm>
+            <a:off x="5303520" y="2834640"/>
+            <a:ext cx="6126480" cy="914400"/>
           </a:xfrm>
           <a:prstGeom prst="roundRect">
             <a:avLst>
-              <a:gd name="adj" fmla="val 3846"/>
+              <a:gd name="adj" fmla="val 8000"/>
             </a:avLst>
           </a:prstGeom>
           <a:solidFill>
-            <a:srgbClr val="F0FDFA"/>
+            <a:srgbClr val="1E293B"/>
           </a:solidFill>
-          <a:ln w="12700">
+          <a:ln w="19050">
             <a:solidFill>
-              <a:srgbClr val="99F6E4"/>
+              <a:srgbClr val="38BDF8"/>
             </a:solidFill>
             <a:prstDash val="solid"/>
           </a:ln>
@@ -5337,53 +5142,14 @@
       </p:sp>
       <p:sp>
         <p:nvSpPr>
-          <p:cNvPr id="14" name="Text 12"/>
-          <p:cNvSpPr/>
-          <p:nvPr/>
-        </p:nvSpPr>
-        <p:spPr>
-          <a:xfrm>
-            <a:off x="6263640" y="2377440"/>
-            <a:ext cx="2103120" cy="457200"/>
-          </a:xfrm>
-          <a:prstGeom prst="rect">
-            <a:avLst/>
-          </a:prstGeom>
-          <a:noFill/>
-          <a:ln/>
-        </p:spPr>
-        <p:txBody>
-          <a:bodyPr wrap="square" rtlCol="0" anchor="ctr"/>
-          <a:lstStyle/>
-          <a:p>
-            <a:pPr indent="0" marL="0">
-              <a:buNone/>
-            </a:pPr>
-            <a:r>
-              <a:rPr lang="en-US" sz="1100" b="1" dirty="0">
-                <a:solidFill>
-                  <a:srgbClr val="0F766E"/>
-                </a:solidFill>
-                <a:latin typeface="Arial" pitchFamily="34" charset="0"/>
-                <a:ea typeface="Arial" pitchFamily="34" charset="-122"/>
-                <a:cs typeface="Arial" pitchFamily="34" charset="-120"/>
-              </a:rPr>
-              <a:t>🫘 Renal &amp; Electrolytes</a:t>
-            </a:r>
-            <a:endParaRPr lang="en-US" sz="1100" dirty="0"/>
-          </a:p>
-        </p:txBody>
-      </p:sp>
-      <p:sp>
-        <p:nvSpPr>
           <p:cNvPr id="15" name="Text 13"/>
           <p:cNvSpPr/>
           <p:nvPr/>
         </p:nvSpPr>
         <p:spPr>
           <a:xfrm>
-            <a:off x="6263640" y="2926080"/>
-            <a:ext cx="2103120" cy="2743200"/>
+            <a:off x="5440680" y="2926080"/>
+            <a:ext cx="5852160" cy="731520"/>
           </a:xfrm>
           <a:prstGeom prst="rect">
             <a:avLst/>
@@ -5397,123 +5163,40 @@
           <a:p>
             <a:pPr indent="0" marL="0">
               <a:lnSpc>
-                <a:spcPts val="1800"/>
+                <a:spcPts val="1400"/>
               </a:lnSpc>
               <a:buNone/>
             </a:pPr>
             <a:r>
-              <a:rPr lang="en-US" sz="1000" dirty="0">
-                <a:solidFill>
-                  <a:srgbClr val="0F172A"/>
-                </a:solidFill>
-                <a:latin typeface="Arial" pitchFamily="34" charset="0"/>
-                <a:ea typeface="Arial" pitchFamily="34" charset="-122"/>
-                <a:cs typeface="Arial" pitchFamily="34" charset="-120"/>
-              </a:rPr>
-              <a:t>• Serum Creatinine (sCr)</a:t>
+              <a:rPr lang="en-US" sz="1000" b="1" dirty="0">
+                <a:solidFill>
+                  <a:srgbClr val="5EEAD4"/>
+                </a:solidFill>
+                <a:latin typeface="Arial" pitchFamily="34" charset="0"/>
+                <a:ea typeface="Arial" pitchFamily="34" charset="-122"/>
+                <a:cs typeface="Arial" pitchFamily="34" charset="-120"/>
+              </a:rPr>
+              <a:t>[2] جدول البدائل والشركات ➔ </a:t>
+            </a:r>
+            <a:pPr indent="0" marL="0">
+              <a:lnSpc>
+                <a:spcPts val="1400"/>
+              </a:lnSpc>
+              <a:buNone/>
+            </a:pPr>
+            <a:r>
+              <a:rPr lang="en-US" sz="950" dirty="0">
+                <a:solidFill>
+                  <a:srgbClr val="FFFFFF"/>
+                </a:solidFill>
+                <a:latin typeface="Arial" pitchFamily="34" charset="0"/>
+                <a:ea typeface="Arial" pitchFamily="34" charset="-122"/>
+                <a:cs typeface="Arial" pitchFamily="34" charset="-120"/>
+              </a:rPr>
+              <a:t>قائمة واضحة تضم الأسماء التجارية المتاحة في السوق والشركات المرخصة.</a:t>
             </a:r>
             <a:endParaRPr lang="en-US" sz="1000" dirty="0"/>
           </a:p>
-          <a:p>
-            <a:pPr indent="0" marL="0">
-              <a:lnSpc>
-                <a:spcPts val="1800"/>
-              </a:lnSpc>
-              <a:buNone/>
-            </a:pPr>
-            <a:r>
-              <a:rPr lang="en-US" sz="1000" dirty="0">
-                <a:solidFill>
-                  <a:srgbClr val="0F172A"/>
-                </a:solidFill>
-                <a:latin typeface="Arial" pitchFamily="34" charset="0"/>
-                <a:ea typeface="Arial" pitchFamily="34" charset="-122"/>
-                <a:cs typeface="Arial" pitchFamily="34" charset="-120"/>
-              </a:rPr>
-              <a:t>• Blood Urea Nitrogen (BUN)</a:t>
-            </a:r>
-            <a:endParaRPr lang="en-US" sz="1000" dirty="0"/>
-          </a:p>
-          <a:p>
-            <a:pPr indent="0" marL="0">
-              <a:lnSpc>
-                <a:spcPts val="1800"/>
-              </a:lnSpc>
-              <a:buNone/>
-            </a:pPr>
-            <a:r>
-              <a:rPr lang="en-US" sz="1000" dirty="0">
-                <a:solidFill>
-                  <a:srgbClr val="0F172A"/>
-                </a:solidFill>
-                <a:latin typeface="Arial" pitchFamily="34" charset="0"/>
-                <a:ea typeface="Arial" pitchFamily="34" charset="-122"/>
-                <a:cs typeface="Arial" pitchFamily="34" charset="-120"/>
-              </a:rPr>
-              <a:t>• eGFR (Kidney Function)</a:t>
-            </a:r>
-            <a:endParaRPr lang="en-US" sz="1000" dirty="0"/>
-          </a:p>
-          <a:p>
-            <a:pPr indent="0" marL="0">
-              <a:lnSpc>
-                <a:spcPts val="1800"/>
-              </a:lnSpc>
-              <a:buNone/>
-            </a:pPr>
-            <a:r>
-              <a:rPr lang="en-US" sz="1000" dirty="0">
-                <a:solidFill>
-                  <a:srgbClr val="0F172A"/>
-                </a:solidFill>
-                <a:latin typeface="Arial" pitchFamily="34" charset="0"/>
-                <a:ea typeface="Arial" pitchFamily="34" charset="-122"/>
-                <a:cs typeface="Arial" pitchFamily="34" charset="-120"/>
-              </a:rPr>
-              <a:t>• Serum Potassium (K+)</a:t>
-            </a:r>
-            <a:endParaRPr lang="en-US" sz="1000" dirty="0"/>
-          </a:p>
-          <a:p>
-            <a:pPr indent="0" marL="0">
-              <a:lnSpc>
-                <a:spcPts val="1800"/>
-              </a:lnSpc>
-              <a:buNone/>
-            </a:pPr>
-            <a:r>
-              <a:rPr lang="en-US" sz="1000" dirty="0">
-                <a:solidFill>
-                  <a:srgbClr val="0F172A"/>
-                </a:solidFill>
-                <a:latin typeface="Arial" pitchFamily="34" charset="0"/>
-                <a:ea typeface="Arial" pitchFamily="34" charset="-122"/>
-                <a:cs typeface="Arial" pitchFamily="34" charset="-120"/>
-              </a:rPr>
-              <a:t>• Serum Sodium (Na+)</a:t>
-            </a:r>
-            <a:endParaRPr lang="en-US" sz="1000" dirty="0"/>
-          </a:p>
-          <a:p>
-            <a:pPr indent="0" marL="0">
-              <a:lnSpc>
-                <a:spcPts val="1800"/>
-              </a:lnSpc>
-              <a:buNone/>
-            </a:pPr>
-            <a:r>
-              <a:rPr lang="en-US" sz="1000" dirty="0">
-                <a:solidFill>
-                  <a:srgbClr val="0F172A"/>
-                </a:solidFill>
-                <a:latin typeface="Arial" pitchFamily="34" charset="0"/>
-                <a:ea typeface="Arial" pitchFamily="34" charset="-122"/>
-                <a:cs typeface="Arial" pitchFamily="34" charset="-120"/>
-              </a:rPr>
-              <a:t>• Urine Microalbumin</a:t>
-            </a:r>
-            <a:endParaRPr lang="en-US" sz="1000" dirty="0"/>
-          </a:p>
         </p:txBody>
       </p:sp>
       <p:sp>
@@ -5524,20 +5207,20 @@
         </p:nvSpPr>
         <p:spPr>
           <a:xfrm>
-            <a:off x="8686800" y="2194560"/>
-            <a:ext cx="2377440" cy="3657600"/>
+            <a:off x="5303520" y="3886200"/>
+            <a:ext cx="6126480" cy="914400"/>
           </a:xfrm>
           <a:prstGeom prst="roundRect">
             <a:avLst>
-              <a:gd name="adj" fmla="val 3846"/>
+              <a:gd name="adj" fmla="val 8000"/>
             </a:avLst>
           </a:prstGeom>
           <a:solidFill>
-            <a:srgbClr val="F0FDFA"/>
+            <a:srgbClr val="1E293B"/>
           </a:solidFill>
-          <a:ln w="12700">
+          <a:ln w="19050">
             <a:solidFill>
-              <a:srgbClr val="99F6E4"/>
+              <a:srgbClr val="F59E0B"/>
             </a:solidFill>
             <a:prstDash val="solid"/>
           </a:ln>
@@ -5551,34 +5234,54 @@
         </p:nvSpPr>
         <p:spPr>
           <a:xfrm>
-            <a:off x="8823960" y="2377440"/>
-            <a:ext cx="2103120" cy="457200"/>
-          </a:xfrm>
-          <a:prstGeom prst="rect">
-            <a:avLst/>
-          </a:prstGeom>
-          <a:noFill/>
-          <a:ln/>
-        </p:spPr>
-        <p:txBody>
-          <a:bodyPr wrap="square" rtlCol="0" anchor="ctr"/>
-          <a:lstStyle/>
-          <a:p>
-            <a:pPr indent="0" marL="0">
-              <a:buNone/>
-            </a:pPr>
-            <a:r>
-              <a:rPr lang="en-US" sz="1100" b="1" dirty="0">
-                <a:solidFill>
-                  <a:srgbClr val="0F766E"/>
-                </a:solidFill>
-                <a:latin typeface="Arial" pitchFamily="34" charset="0"/>
-                <a:ea typeface="Arial" pitchFamily="34" charset="-122"/>
-                <a:cs typeface="Arial" pitchFamily="34" charset="-120"/>
-              </a:rPr>
-              <a:t>🩺 Hepatic &amp; Hematology</a:t>
-            </a:r>
-            <a:endParaRPr lang="en-US" sz="1100" dirty="0"/>
+            <a:off x="5440680" y="3977640"/>
+            <a:ext cx="5852160" cy="731520"/>
+          </a:xfrm>
+          <a:prstGeom prst="rect">
+            <a:avLst/>
+          </a:prstGeom>
+          <a:noFill/>
+          <a:ln/>
+        </p:spPr>
+        <p:txBody>
+          <a:bodyPr wrap="square" rtlCol="0" anchor="ctr"/>
+          <a:lstStyle/>
+          <a:p>
+            <a:pPr indent="0" marL="0">
+              <a:lnSpc>
+                <a:spcPts val="1400"/>
+              </a:lnSpc>
+              <a:buNone/>
+            </a:pPr>
+            <a:r>
+              <a:rPr lang="en-US" sz="1000" b="1" dirty="0">
+                <a:solidFill>
+                  <a:srgbClr val="5EEAD4"/>
+                </a:solidFill>
+                <a:latin typeface="Arial" pitchFamily="34" charset="0"/>
+                <a:ea typeface="Arial" pitchFamily="34" charset="-122"/>
+                <a:cs typeface="Arial" pitchFamily="34" charset="-120"/>
+              </a:rPr>
+              <a:t>[3] تصنيف الفئات السعرية ➔ </a:t>
+            </a:r>
+            <a:pPr indent="0" marL="0">
+              <a:lnSpc>
+                <a:spcPts val="1400"/>
+              </a:lnSpc>
+              <a:buNone/>
+            </a:pPr>
+            <a:r>
+              <a:rPr lang="en-US" sz="950" dirty="0">
+                <a:solidFill>
+                  <a:srgbClr val="FFFFFF"/>
+                </a:solidFill>
+                <a:latin typeface="Arial" pitchFamily="34" charset="0"/>
+                <a:ea typeface="Arial" pitchFamily="34" charset="-122"/>
+                <a:cs typeface="Arial" pitchFamily="34" charset="-120"/>
+              </a:rPr>
+              <a:t>شارات ملونة توضح الفئة السعرية (رخيص / متوسط / مرتفع) لاختيار البديل الاقتصادي.</a:t>
+            </a:r>
+            <a:endParaRPr lang="en-US" sz="1000" dirty="0"/>
           </a:p>
         </p:txBody>
       </p:sp>
@@ -5590,150 +5293,8 @@
         </p:nvSpPr>
         <p:spPr>
           <a:xfrm>
-            <a:off x="8823960" y="2926080"/>
-            <a:ext cx="2103120" cy="2743200"/>
-          </a:xfrm>
-          <a:prstGeom prst="rect">
-            <a:avLst/>
-          </a:prstGeom>
-          <a:noFill/>
-          <a:ln/>
-        </p:spPr>
-        <p:txBody>
-          <a:bodyPr wrap="square" rtlCol="0" anchor="ctr"/>
-          <a:lstStyle/>
-          <a:p>
-            <a:pPr indent="0" marL="0">
-              <a:lnSpc>
-                <a:spcPts val="1800"/>
-              </a:lnSpc>
-              <a:buNone/>
-            </a:pPr>
-            <a:r>
-              <a:rPr lang="en-US" sz="1000" dirty="0">
-                <a:solidFill>
-                  <a:srgbClr val="0F172A"/>
-                </a:solidFill>
-                <a:latin typeface="Arial" pitchFamily="34" charset="0"/>
-                <a:ea typeface="Arial" pitchFamily="34" charset="-122"/>
-                <a:cs typeface="Arial" pitchFamily="34" charset="-120"/>
-              </a:rPr>
-              <a:t>• ALT (SGPT) &amp; AST (SGOT)</a:t>
-            </a:r>
-            <a:endParaRPr lang="en-US" sz="1000" dirty="0"/>
-          </a:p>
-          <a:p>
-            <a:pPr indent="0" marL="0">
-              <a:lnSpc>
-                <a:spcPts val="1800"/>
-              </a:lnSpc>
-              <a:buNone/>
-            </a:pPr>
-            <a:r>
-              <a:rPr lang="en-US" sz="1000" dirty="0">
-                <a:solidFill>
-                  <a:srgbClr val="0F172A"/>
-                </a:solidFill>
-                <a:latin typeface="Arial" pitchFamily="34" charset="0"/>
-                <a:ea typeface="Arial" pitchFamily="34" charset="-122"/>
-                <a:cs typeface="Arial" pitchFamily="34" charset="-120"/>
-              </a:rPr>
-              <a:t>• Total Bilirubin</a:t>
-            </a:r>
-            <a:endParaRPr lang="en-US" sz="1000" dirty="0"/>
-          </a:p>
-          <a:p>
-            <a:pPr indent="0" marL="0">
-              <a:lnSpc>
-                <a:spcPts val="1800"/>
-              </a:lnSpc>
-              <a:buNone/>
-            </a:pPr>
-            <a:r>
-              <a:rPr lang="en-US" sz="1000" dirty="0">
-                <a:solidFill>
-                  <a:srgbClr val="0F172A"/>
-                </a:solidFill>
-                <a:latin typeface="Arial" pitchFamily="34" charset="0"/>
-                <a:ea typeface="Arial" pitchFamily="34" charset="-122"/>
-                <a:cs typeface="Arial" pitchFamily="34" charset="-120"/>
-              </a:rPr>
-              <a:t>• INR / Prothrombin Time</a:t>
-            </a:r>
-            <a:endParaRPr lang="en-US" sz="1000" dirty="0"/>
-          </a:p>
-          <a:p>
-            <a:pPr indent="0" marL="0">
-              <a:lnSpc>
-                <a:spcPts val="1800"/>
-              </a:lnSpc>
-              <a:buNone/>
-            </a:pPr>
-            <a:r>
-              <a:rPr lang="en-US" sz="1000" dirty="0">
-                <a:solidFill>
-                  <a:srgbClr val="0F172A"/>
-                </a:solidFill>
-                <a:latin typeface="Arial" pitchFamily="34" charset="0"/>
-                <a:ea typeface="Arial" pitchFamily="34" charset="-122"/>
-                <a:cs typeface="Arial" pitchFamily="34" charset="-120"/>
-              </a:rPr>
-              <a:t>• Hemoglobin (Hb)</a:t>
-            </a:r>
-            <a:endParaRPr lang="en-US" sz="1000" dirty="0"/>
-          </a:p>
-          <a:p>
-            <a:pPr indent="0" marL="0">
-              <a:lnSpc>
-                <a:spcPts val="1800"/>
-              </a:lnSpc>
-              <a:buNone/>
-            </a:pPr>
-            <a:r>
-              <a:rPr lang="en-US" sz="1000" dirty="0">
-                <a:solidFill>
-                  <a:srgbClr val="0F172A"/>
-                </a:solidFill>
-                <a:latin typeface="Arial" pitchFamily="34" charset="0"/>
-                <a:ea typeface="Arial" pitchFamily="34" charset="-122"/>
-                <a:cs typeface="Arial" pitchFamily="34" charset="-120"/>
-              </a:rPr>
-              <a:t>• White Blood Cells (WBC)</a:t>
-            </a:r>
-            <a:endParaRPr lang="en-US" sz="1000" dirty="0"/>
-          </a:p>
-          <a:p>
-            <a:pPr indent="0" marL="0">
-              <a:lnSpc>
-                <a:spcPts val="1800"/>
-              </a:lnSpc>
-              <a:buNone/>
-            </a:pPr>
-            <a:r>
-              <a:rPr lang="en-US" sz="1000" dirty="0">
-                <a:solidFill>
-                  <a:srgbClr val="0F172A"/>
-                </a:solidFill>
-                <a:latin typeface="Arial" pitchFamily="34" charset="0"/>
-                <a:ea typeface="Arial" pitchFamily="34" charset="-122"/>
-                <a:cs typeface="Arial" pitchFamily="34" charset="-120"/>
-              </a:rPr>
-              <a:t>• Platelet Count (PLT)</a:t>
-            </a:r>
-            <a:endParaRPr lang="en-US" sz="1000" dirty="0"/>
-          </a:p>
-        </p:txBody>
-      </p:sp>
-      <p:sp>
-        <p:nvSpPr>
-          <p:cNvPr id="19" name="Text 17"/>
-          <p:cNvSpPr/>
-          <p:nvPr/>
-        </p:nvSpPr>
-        <p:spPr>
-          <a:xfrm>
-            <a:off x="731520" y="6400800"/>
-            <a:ext cx="10698480" cy="274320"/>
+            <a:off x="548640" y="6446520"/>
+            <a:ext cx="11064240" cy="228600"/>
           </a:xfrm>
           <a:prstGeom prst="rect">
             <a:avLst/>
@@ -5749,7 +5310,7 @@
               <a:buNone/>
             </a:pPr>
             <a:r>
-              <a:rPr lang="en-US" sz="900" dirty="0">
+              <a:rPr lang="en-US" sz="850" dirty="0">
                 <a:solidFill>
                   <a:srgbClr val="64748B"/>
                 </a:solidFill>
@@ -5757,9 +5318,9 @@
                 <a:ea typeface="Arial" pitchFamily="34" charset="-122"/>
                 <a:cs typeface="Arial" pitchFamily="34" charset="-120"/>
               </a:rPr>
-              <a:t>Egyptian Chinese University (ECU) • Faculty of Pharmacy | Developed by Youssef Mohamed</a:t>
-            </a:r>
-            <a:endParaRPr lang="en-US" sz="900" dirty="0"/>
+              <a:t>كلية الصيدلة • الجامعة المصرية الصينية (ECU) | تطوير: يوسف محمد | YoPharma Clinical Suite</a:t>
+            </a:r>
+            <a:endParaRPr lang="en-US" sz="850" dirty="0"/>
           </a:p>
         </p:txBody>
       </p:sp>
@@ -5803,24 +5364,24 @@
         </p:nvSpPr>
         <p:spPr>
           <a:xfrm>
-            <a:off x="731520" y="365760"/>
-            <a:ext cx="9144000" cy="274320"/>
-          </a:xfrm>
-          <a:prstGeom prst="rect">
-            <a:avLst/>
-          </a:prstGeom>
-          <a:noFill/>
-          <a:ln/>
-        </p:spPr>
-        <p:txBody>
-          <a:bodyPr wrap="square" rtlCol="0" anchor="ctr"/>
-          <a:lstStyle/>
-          <a:p>
-            <a:pPr indent="0" marL="0">
-              <a:buNone/>
-            </a:pPr>
-            <a:r>
-              <a:rPr lang="en-US" sz="1000" b="1" dirty="0">
+            <a:off x="548640" y="320040"/>
+            <a:ext cx="9144000" cy="228600"/>
+          </a:xfrm>
+          <a:prstGeom prst="rect">
+            <a:avLst/>
+          </a:prstGeom>
+          <a:noFill/>
+          <a:ln/>
+        </p:spPr>
+        <p:txBody>
+          <a:bodyPr wrap="square" rtlCol="0" anchor="ctr"/>
+          <a:lstStyle/>
+          <a:p>
+            <a:pPr indent="0" marL="0">
+              <a:buNone/>
+            </a:pPr>
+            <a:r>
+              <a:rPr lang="en-US" sz="900" b="1" dirty="0">
                 <a:solidFill>
                   <a:srgbClr val="0D9488"/>
                 </a:solidFill>
@@ -5828,9 +5389,9 @@
                 <a:ea typeface="Arial" pitchFamily="34" charset="-122"/>
                 <a:cs typeface="Arial" pitchFamily="34" charset="-120"/>
               </a:rPr>
-              <a:t>YOPHARMA | CLINICAL PHARMACY SUITE</a:t>
-            </a:r>
-            <a:endParaRPr lang="en-US" sz="1000" dirty="0"/>
+              <a:t>YOPHARMA | دليل واجهات ومميزات المنصة</a:t>
+            </a:r>
+            <a:endParaRPr lang="en-US" sz="900" dirty="0"/>
           </a:p>
         </p:txBody>
       </p:sp>
@@ -5842,24 +5403,24 @@
         </p:nvSpPr>
         <p:spPr>
           <a:xfrm>
-            <a:off x="731520" y="640080"/>
-            <a:ext cx="10058400" cy="548640"/>
-          </a:xfrm>
-          <a:prstGeom prst="rect">
-            <a:avLst/>
-          </a:prstGeom>
-          <a:noFill/>
-          <a:ln/>
-        </p:spPr>
-        <p:txBody>
-          <a:bodyPr wrap="square" rtlCol="0" anchor="ctr"/>
-          <a:lstStyle/>
-          <a:p>
-            <a:pPr indent="0" marL="0">
-              <a:buNone/>
-            </a:pPr>
-            <a:r>
-              <a:rPr lang="en-US" sz="2200" b="1" dirty="0">
+            <a:off x="548640" y="548640"/>
+            <a:ext cx="10972800" cy="502920"/>
+          </a:xfrm>
+          <a:prstGeom prst="rect">
+            <a:avLst/>
+          </a:prstGeom>
+          <a:noFill/>
+          <a:ln/>
+        </p:spPr>
+        <p:txBody>
+          <a:bodyPr wrap="square" rtlCol="0" anchor="ctr"/>
+          <a:lstStyle/>
+          <a:p>
+            <a:pPr indent="0" marL="0">
+              <a:buNone/>
+            </a:pPr>
+            <a:r>
+              <a:rPr lang="en-US" sz="1800" b="1" dirty="0">
                 <a:solidFill>
                   <a:srgbClr val="0F172A"/>
                 </a:solidFill>
@@ -5867,9 +5428,9 @@
                 <a:ea typeface="Arial" pitchFamily="34" charset="-122"/>
                 <a:cs typeface="Arial" pitchFamily="34" charset="-120"/>
               </a:rPr>
-              <a:t>6. Module 4 — Egyptian Drug Alternatives &amp; Pricing</a:t>
-            </a:r>
-            <a:endParaRPr lang="en-US" sz="2200" dirty="0"/>
+              <a:t>6. أمان وموانع استعمال الأمراض المزمنة (Chronic Disease Safety)</a:t>
+            </a:r>
+            <a:endParaRPr lang="en-US" sz="1800" dirty="0"/>
           </a:p>
         </p:txBody>
       </p:sp>
@@ -5881,16 +5442,16 @@
         </p:nvSpPr>
         <p:spPr>
           <a:xfrm>
-            <a:off x="731520" y="1234440"/>
-            <a:ext cx="10698480" cy="0"/>
+            <a:off x="548640" y="1097280"/>
+            <a:ext cx="11064240" cy="0"/>
           </a:xfrm>
           <a:prstGeom prst="line">
             <a:avLst/>
           </a:prstGeom>
           <a:noFill/>
-          <a:ln w="19050">
+          <a:ln w="15240">
             <a:solidFill>
-              <a:srgbClr val="E2E8F0"/>
+              <a:srgbClr val="CBD5E1"/>
             </a:solidFill>
             <a:prstDash val="solid"/>
           </a:ln>
@@ -5904,82 +5465,16 @@
         </p:nvSpPr>
         <p:spPr>
           <a:xfrm>
-            <a:off x="731520" y="1463040"/>
-            <a:ext cx="10698480" cy="4663440"/>
+            <a:off x="548640" y="1234440"/>
+            <a:ext cx="4389120" cy="5029200"/>
           </a:xfrm>
           <a:prstGeom prst="roundRect">
             <a:avLst>
-              <a:gd name="adj" fmla="val 2353"/>
+              <a:gd name="adj" fmla="val 2083"/>
             </a:avLst>
           </a:prstGeom>
           <a:solidFill>
             <a:srgbClr val="FFFFFF"/>
-          </a:solidFill>
-          <a:ln w="12700">
-            <a:solidFill>
-              <a:srgbClr val="E2E8F0"/>
-            </a:solidFill>
-            <a:prstDash val="solid"/>
-          </a:ln>
-        </p:spPr>
-      </p:sp>
-      <p:sp>
-        <p:nvSpPr>
-          <p:cNvPr id="6" name="Text 4"/>
-          <p:cNvSpPr/>
-          <p:nvPr/>
-        </p:nvSpPr>
-        <p:spPr>
-          <a:xfrm>
-            <a:off x="1005840" y="1645920"/>
-            <a:ext cx="10058400" cy="320040"/>
-          </a:xfrm>
-          <a:prstGeom prst="rect">
-            <a:avLst/>
-          </a:prstGeom>
-          <a:noFill/>
-          <a:ln/>
-        </p:spPr>
-        <p:txBody>
-          <a:bodyPr wrap="square" rtlCol="0" anchor="ctr"/>
-          <a:lstStyle/>
-          <a:p>
-            <a:pPr indent="0" marL="0">
-              <a:buNone/>
-            </a:pPr>
-            <a:r>
-              <a:rPr lang="en-US" sz="1400" b="1" dirty="0">
-                <a:solidFill>
-                  <a:srgbClr val="0F766E"/>
-                </a:solidFill>
-                <a:latin typeface="Arial" pitchFamily="34" charset="0"/>
-                <a:ea typeface="Arial" pitchFamily="34" charset="-122"/>
-                <a:cs typeface="Arial" pitchFamily="34" charset="-120"/>
-              </a:rPr>
-              <a:t>Real-time Generic Equivalence in the Egyptian Pharmaceutical Market:</a:t>
-            </a:r>
-            <a:endParaRPr lang="en-US" sz="1400" dirty="0"/>
-          </a:p>
-        </p:txBody>
-      </p:sp>
-      <p:sp>
-        <p:nvSpPr>
-          <p:cNvPr id="7" name="Shape 5"/>
-          <p:cNvSpPr/>
-          <p:nvPr/>
-        </p:nvSpPr>
-        <p:spPr>
-          <a:xfrm>
-            <a:off x="1005840" y="2194560"/>
-            <a:ext cx="3200400" cy="3657600"/>
-          </a:xfrm>
-          <a:prstGeom prst="roundRect">
-            <a:avLst>
-              <a:gd name="adj" fmla="val 2857"/>
-            </a:avLst>
-          </a:prstGeom>
-          <a:solidFill>
-            <a:srgbClr val="F8FAFC"/>
           </a:solidFill>
           <a:ln w="12700">
             <a:solidFill>
@@ -5991,14 +5486,95 @@
       </p:sp>
       <p:sp>
         <p:nvSpPr>
+          <p:cNvPr id="6" name="Text 4"/>
+          <p:cNvSpPr/>
+          <p:nvPr/>
+        </p:nvSpPr>
+        <p:spPr>
+          <a:xfrm>
+            <a:off x="731520" y="1371600"/>
+            <a:ext cx="4023360" cy="320040"/>
+          </a:xfrm>
+          <a:prstGeom prst="rect">
+            <a:avLst/>
+          </a:prstGeom>
+          <a:noFill/>
+          <a:ln/>
+        </p:spPr>
+        <p:txBody>
+          <a:bodyPr wrap="square" rtlCol="0" anchor="ctr"/>
+          <a:lstStyle/>
+          <a:p>
+            <a:pPr indent="0" marL="0">
+              <a:buNone/>
+            </a:pPr>
+            <a:r>
+              <a:rPr lang="en-US" sz="1300" b="1" dirty="0">
+                <a:solidFill>
+                  <a:srgbClr val="DC2626"/>
+                </a:solidFill>
+                <a:latin typeface="Arial" pitchFamily="34" charset="0"/>
+                <a:ea typeface="Arial" pitchFamily="34" charset="-122"/>
+                <a:cs typeface="Arial" pitchFamily="34" charset="-120"/>
+              </a:rPr>
+              <a:t>⚠️ المشكلة الواقعية:</a:t>
+            </a:r>
+            <a:endParaRPr lang="en-US" sz="1300" dirty="0"/>
+          </a:p>
+        </p:txBody>
+      </p:sp>
+      <p:sp>
+        <p:nvSpPr>
+          <p:cNvPr id="7" name="Text 5"/>
+          <p:cNvSpPr/>
+          <p:nvPr/>
+        </p:nvSpPr>
+        <p:spPr>
+          <a:xfrm>
+            <a:off x="731520" y="1691640"/>
+            <a:ext cx="4023360" cy="1097280"/>
+          </a:xfrm>
+          <a:prstGeom prst="rect">
+            <a:avLst/>
+          </a:prstGeom>
+          <a:noFill/>
+          <a:ln/>
+        </p:spPr>
+        <p:txBody>
+          <a:bodyPr wrap="square" rtlCol="0" anchor="ctr"/>
+          <a:lstStyle/>
+          <a:p>
+            <a:pPr indent="0" marL="0">
+              <a:lnSpc>
+                <a:spcPts val="1500"/>
+              </a:lnSpc>
+              <a:buNone/>
+            </a:pPr>
+            <a:r>
+              <a:rPr lang="en-US" sz="1050" dirty="0">
+                <a:solidFill>
+                  <a:srgbClr val="0F172A"/>
+                </a:solidFill>
+                <a:latin typeface="Arial" pitchFamily="34" charset="0"/>
+                <a:ea typeface="Arial" pitchFamily="34" charset="-122"/>
+                <a:cs typeface="Arial" pitchFamily="34" charset="-120"/>
+              </a:rPr>
+              <a:t>صرف أدوية شائعة (مثل المسكنات أو بعض المضادات) لمرضى الضغط أو السكري أو القصور الكلوي، مما يسبب تدهوراً حاداً في وظائف الكلى أو ارتفاع خطير في ضغط الدم.</a:t>
+            </a:r>
+            <a:endParaRPr lang="en-US" sz="1050" dirty="0"/>
+          </a:p>
+        </p:txBody>
+      </p:sp>
+      <p:sp>
+        <p:nvSpPr>
           <p:cNvPr id="8" name="Text 6"/>
           <p:cNvSpPr/>
           <p:nvPr/>
         </p:nvSpPr>
         <p:spPr>
           <a:xfrm>
-            <a:off x="1234440" y="2468880"/>
-            <a:ext cx="2743200" cy="548640"/>
+            <a:off x="731520" y="2880360"/>
+            <a:ext cx="4023360" cy="320040"/>
           </a:xfrm>
           <a:prstGeom prst="rect">
             <a:avLst/>
@@ -6016,57 +5592,57 @@
             <a:r>
               <a:rPr lang="en-US" sz="1300" b="1" dirty="0">
                 <a:solidFill>
+                  <a:srgbClr val="0F766E"/>
+                </a:solidFill>
+                <a:latin typeface="Arial" pitchFamily="34" charset="0"/>
+                <a:ea typeface="Arial" pitchFamily="34" charset="-122"/>
+                <a:cs typeface="Arial" pitchFamily="34" charset="-120"/>
+              </a:rPr>
+              <a:t>✨ كيف تحل هذه الواجهة المشكلة؟</a:t>
+            </a:r>
+            <a:endParaRPr lang="en-US" sz="1300" dirty="0"/>
+          </a:p>
+        </p:txBody>
+      </p:sp>
+      <p:sp>
+        <p:nvSpPr>
+          <p:cNvPr id="9" name="Text 7"/>
+          <p:cNvSpPr/>
+          <p:nvPr/>
+        </p:nvSpPr>
+        <p:spPr>
+          <a:xfrm>
+            <a:off x="731520" y="3200400"/>
+            <a:ext cx="4023360" cy="1371600"/>
+          </a:xfrm>
+          <a:prstGeom prst="rect">
+            <a:avLst/>
+          </a:prstGeom>
+          <a:noFill/>
+          <a:ln/>
+        </p:spPr>
+        <p:txBody>
+          <a:bodyPr wrap="square" rtlCol="0" anchor="ctr"/>
+          <a:lstStyle/>
+          <a:p>
+            <a:pPr indent="0" marL="0">
+              <a:lnSpc>
+                <a:spcPts val="1500"/>
+              </a:lnSpc>
+              <a:buNone/>
+            </a:pPr>
+            <a:r>
+              <a:rPr lang="en-US" sz="1050" dirty="0">
+                <a:solidFill>
                   <a:srgbClr val="0F172A"/>
                 </a:solidFill>
                 <a:latin typeface="Arial" pitchFamily="34" charset="0"/>
                 <a:ea typeface="Arial" pitchFamily="34" charset="-122"/>
                 <a:cs typeface="Arial" pitchFamily="34" charset="-120"/>
               </a:rPr>
-              <a:t>🧪 Chemical Active Ingredient</a:t>
-            </a:r>
-            <a:endParaRPr lang="en-US" sz="1300" dirty="0"/>
-          </a:p>
-        </p:txBody>
-      </p:sp>
-      <p:sp>
-        <p:nvSpPr>
-          <p:cNvPr id="9" name="Text 7"/>
-          <p:cNvSpPr/>
-          <p:nvPr/>
-        </p:nvSpPr>
-        <p:spPr>
-          <a:xfrm>
-            <a:off x="1234440" y="3108960"/>
-            <a:ext cx="2743200" cy="2468880"/>
-          </a:xfrm>
-          <a:prstGeom prst="rect">
-            <a:avLst/>
-          </a:prstGeom>
-          <a:noFill/>
-          <a:ln/>
-        </p:spPr>
-        <p:txBody>
-          <a:bodyPr wrap="square" rtlCol="0" anchor="ctr"/>
-          <a:lstStyle/>
-          <a:p>
-            <a:pPr indent="0" marL="0">
-              <a:lnSpc>
-                <a:spcPts val="1800"/>
-              </a:lnSpc>
-              <a:buNone/>
-            </a:pPr>
-            <a:r>
-              <a:rPr lang="en-US" sz="1100" dirty="0">
-                <a:solidFill>
-                  <a:srgbClr val="64748B"/>
-                </a:solidFill>
-                <a:latin typeface="Arial" pitchFamily="34" charset="0"/>
-                <a:ea typeface="Arial" pitchFamily="34" charset="-122"/>
-                <a:cs typeface="Arial" pitchFamily="34" charset="-120"/>
-              </a:rPr>
-              <a:t>Maps brand trade names to international nonproprietary names (INN). E.g. Augmentin, Curam, Megamox, Hibiotic all resolve to Amoxicillin + Clavulanic Acid.</a:t>
-            </a:r>
-            <a:endParaRPr lang="en-US" sz="1100" dirty="0"/>
+              <a:t>فاحص ذكي يقيم أمان الدواء مع 7 حالات مزمنة (الضغط، السكري، القصور الكلوي CKD، الكبد، قرحة المعدة، الربو، الحمل) ويصنفها (آمن / تحذير / ممنوع تماماً) مع معادلات ضبط الجرعة.</a:t>
+            </a:r>
+            <a:endParaRPr lang="en-US" sz="1050" dirty="0"/>
           </a:p>
         </p:txBody>
       </p:sp>
@@ -6078,20 +5654,20 @@
         </p:nvSpPr>
         <p:spPr>
           <a:xfrm>
-            <a:off x="4480560" y="2194560"/>
-            <a:ext cx="3200400" cy="3657600"/>
+            <a:off x="5120640" y="1234440"/>
+            <a:ext cx="6492240" cy="5029200"/>
           </a:xfrm>
           <a:prstGeom prst="roundRect">
             <a:avLst>
-              <a:gd name="adj" fmla="val 2857"/>
+              <a:gd name="adj" fmla="val 1818"/>
             </a:avLst>
           </a:prstGeom>
           <a:solidFill>
-            <a:srgbClr val="F8FAFC"/>
+            <a:srgbClr val="0F172A"/>
           </a:solidFill>
           <a:ln w="12700">
             <a:solidFill>
-              <a:srgbClr val="CBD5E1"/>
+              <a:srgbClr val="334155"/>
             </a:solidFill>
             <a:prstDash val="solid"/>
           </a:ln>
@@ -6105,101 +5681,59 @@
         </p:nvSpPr>
         <p:spPr>
           <a:xfrm>
-            <a:off x="4709160" y="2468880"/>
-            <a:ext cx="2743200" cy="548640"/>
-          </a:xfrm>
-          <a:prstGeom prst="rect">
-            <a:avLst/>
-          </a:prstGeom>
-          <a:noFill/>
-          <a:ln/>
-        </p:spPr>
-        <p:txBody>
-          <a:bodyPr wrap="square" rtlCol="0" anchor="ctr"/>
-          <a:lstStyle/>
-          <a:p>
-            <a:pPr indent="0" marL="0">
-              <a:buNone/>
-            </a:pPr>
-            <a:r>
-              <a:rPr lang="en-US" sz="1300" b="1" dirty="0">
-                <a:solidFill>
-                  <a:srgbClr val="0F172A"/>
-                </a:solidFill>
-                <a:latin typeface="Arial" pitchFamily="34" charset="0"/>
-                <a:ea typeface="Arial" pitchFamily="34" charset="-122"/>
-                <a:cs typeface="Arial" pitchFamily="34" charset="-120"/>
-              </a:rPr>
-              <a:t>🏭 Verified Manufacturers</a:t>
-            </a:r>
-            <a:endParaRPr lang="en-US" sz="1300" dirty="0"/>
-          </a:p>
-        </p:txBody>
-      </p:sp>
-      <p:sp>
-        <p:nvSpPr>
-          <p:cNvPr id="12" name="Text 10"/>
-          <p:cNvSpPr/>
-          <p:nvPr/>
-        </p:nvSpPr>
-        <p:spPr>
-          <a:xfrm>
-            <a:off x="4709160" y="3108960"/>
-            <a:ext cx="2743200" cy="2468880"/>
-          </a:xfrm>
-          <a:prstGeom prst="rect">
-            <a:avLst/>
-          </a:prstGeom>
-          <a:noFill/>
-          <a:ln/>
-        </p:spPr>
-        <p:txBody>
-          <a:bodyPr wrap="square" rtlCol="0" anchor="ctr"/>
-          <a:lstStyle/>
-          <a:p>
-            <a:pPr indent="0" marL="0">
-              <a:lnSpc>
-                <a:spcPts val="1800"/>
-              </a:lnSpc>
-              <a:buNone/>
-            </a:pPr>
-            <a:r>
-              <a:rPr lang="en-US" sz="1100" dirty="0">
-                <a:solidFill>
-                  <a:srgbClr val="64748B"/>
-                </a:solidFill>
-                <a:latin typeface="Arial" pitchFamily="34" charset="0"/>
-                <a:ea typeface="Arial" pitchFamily="34" charset="-122"/>
-                <a:cs typeface="Arial" pitchFamily="34" charset="-120"/>
-              </a:rPr>
-              <a:t>Identifies licensed Egyptian and multinational pharmaceutical companies (EIPICO, Amoun, GlaxoSmithKline, Novartis, Pfizer, EVA Pharma, Pharco).</a:t>
-            </a:r>
-            <a:endParaRPr lang="en-US" sz="1100" dirty="0"/>
-          </a:p>
-        </p:txBody>
-      </p:sp>
-      <p:sp>
-        <p:nvSpPr>
-          <p:cNvPr id="13" name="Shape 11"/>
-          <p:cNvSpPr/>
-          <p:nvPr/>
-        </p:nvSpPr>
-        <p:spPr>
-          <a:xfrm>
-            <a:off x="7955280" y="2194560"/>
-            <a:ext cx="3200400" cy="3657600"/>
+            <a:off x="5303520" y="1371600"/>
+            <a:ext cx="6126480" cy="320040"/>
+          </a:xfrm>
+          <a:prstGeom prst="rect">
+            <a:avLst/>
+          </a:prstGeom>
+          <a:noFill/>
+          <a:ln/>
+        </p:spPr>
+        <p:txBody>
+          <a:bodyPr wrap="square" rtlCol="0" anchor="ctr"/>
+          <a:lstStyle/>
+          <a:p>
+            <a:pPr indent="0" marL="0">
+              <a:buNone/>
+            </a:pPr>
+            <a:r>
+              <a:rPr lang="en-US" sz="1200" b="1" dirty="0">
+                <a:solidFill>
+                  <a:srgbClr val="5EEAD4"/>
+                </a:solidFill>
+                <a:latin typeface="Arial" pitchFamily="34" charset="0"/>
+                <a:ea typeface="Arial" pitchFamily="34" charset="-122"/>
+                <a:cs typeface="Arial" pitchFamily="34" charset="-120"/>
+              </a:rPr>
+              <a:t>🖥️ تشريح واجهة أمان الأمراض المزمنة (UI Breakdown):</a:t>
+            </a:r>
+            <a:endParaRPr lang="en-US" sz="1200" dirty="0"/>
+          </a:p>
+        </p:txBody>
+      </p:sp>
+      <p:sp>
+        <p:nvSpPr>
+          <p:cNvPr id="12" name="Shape 10"/>
+          <p:cNvSpPr/>
+          <p:nvPr/>
+        </p:nvSpPr>
+        <p:spPr>
+          <a:xfrm>
+            <a:off x="5303520" y="1783080"/>
+            <a:ext cx="6126480" cy="914400"/>
           </a:xfrm>
           <a:prstGeom prst="roundRect">
             <a:avLst>
-              <a:gd name="adj" fmla="val 2857"/>
+              <a:gd name="adj" fmla="val 8000"/>
             </a:avLst>
           </a:prstGeom>
           <a:solidFill>
-            <a:srgbClr val="F8FAFC"/>
+            <a:srgbClr val="1E293B"/>
           </a:solidFill>
-          <a:ln w="12700">
+          <a:ln w="19050">
             <a:solidFill>
-              <a:srgbClr val="CBD5E1"/>
+              <a:srgbClr val="BE123C"/>
             </a:solidFill>
             <a:prstDash val="solid"/>
           </a:ln>
@@ -6207,42 +5741,89 @@
       </p:sp>
       <p:sp>
         <p:nvSpPr>
-          <p:cNvPr id="14" name="Text 12"/>
-          <p:cNvSpPr/>
-          <p:nvPr/>
-        </p:nvSpPr>
-        <p:spPr>
-          <a:xfrm>
-            <a:off x="8183880" y="2468880"/>
-            <a:ext cx="2743200" cy="548640"/>
-          </a:xfrm>
-          <a:prstGeom prst="rect">
-            <a:avLst/>
-          </a:prstGeom>
-          <a:noFill/>
-          <a:ln/>
-        </p:spPr>
-        <p:txBody>
-          <a:bodyPr wrap="square" rtlCol="0" anchor="ctr"/>
-          <a:lstStyle/>
-          <a:p>
-            <a:pPr indent="0" marL="0">
-              <a:buNone/>
-            </a:pPr>
-            <a:r>
-              <a:rPr lang="en-US" sz="1300" b="1" dirty="0">
-                <a:solidFill>
-                  <a:srgbClr val="0F172A"/>
-                </a:solidFill>
-                <a:latin typeface="Arial" pitchFamily="34" charset="0"/>
-                <a:ea typeface="Arial" pitchFamily="34" charset="-122"/>
-                <a:cs typeface="Arial" pitchFamily="34" charset="-120"/>
-              </a:rPr>
-              <a:t>💰 3-Tier Price Categorization</a:t>
-            </a:r>
-            <a:endParaRPr lang="en-US" sz="1300" dirty="0"/>
-          </a:p>
-        </p:txBody>
+          <p:cNvPr id="13" name="Text 11"/>
+          <p:cNvSpPr/>
+          <p:nvPr/>
+        </p:nvSpPr>
+        <p:spPr>
+          <a:xfrm>
+            <a:off x="5440680" y="1874520"/>
+            <a:ext cx="5852160" cy="731520"/>
+          </a:xfrm>
+          <a:prstGeom prst="rect">
+            <a:avLst/>
+          </a:prstGeom>
+          <a:noFill/>
+          <a:ln/>
+        </p:spPr>
+        <p:txBody>
+          <a:bodyPr wrap="square" rtlCol="0" anchor="ctr"/>
+          <a:lstStyle/>
+          <a:p>
+            <a:pPr indent="0" marL="0">
+              <a:lnSpc>
+                <a:spcPts val="1400"/>
+              </a:lnSpc>
+              <a:buNone/>
+            </a:pPr>
+            <a:r>
+              <a:rPr lang="en-US" sz="1000" b="1" dirty="0">
+                <a:solidFill>
+                  <a:srgbClr val="5EEAD4"/>
+                </a:solidFill>
+                <a:latin typeface="Arial" pitchFamily="34" charset="0"/>
+                <a:ea typeface="Arial" pitchFamily="34" charset="-122"/>
+                <a:cs typeface="Arial" pitchFamily="34" charset="-120"/>
+              </a:rPr>
+              <a:t>[1] محدد الحالات المزمنة ➔ </a:t>
+            </a:r>
+            <a:pPr indent="0" marL="0">
+              <a:lnSpc>
+                <a:spcPts val="1400"/>
+              </a:lnSpc>
+              <a:buNone/>
+            </a:pPr>
+            <a:r>
+              <a:rPr lang="en-US" sz="950" dirty="0">
+                <a:solidFill>
+                  <a:srgbClr val="FFFFFF"/>
+                </a:solidFill>
+                <a:latin typeface="Arial" pitchFamily="34" charset="0"/>
+                <a:ea typeface="Arial" pitchFamily="34" charset="-122"/>
+                <a:cs typeface="Arial" pitchFamily="34" charset="-120"/>
+              </a:rPr>
+              <a:t>قائمة اختيار سريعة (Hypertension, Diabetes, CKD, Hepatic, Asthma, Pregnancy).</a:t>
+            </a:r>
+            <a:endParaRPr lang="en-US" sz="1000" dirty="0"/>
+          </a:p>
+        </p:txBody>
+      </p:sp>
+      <p:sp>
+        <p:nvSpPr>
+          <p:cNvPr id="14" name="Shape 12"/>
+          <p:cNvSpPr/>
+          <p:nvPr/>
+        </p:nvSpPr>
+        <p:spPr>
+          <a:xfrm>
+            <a:off x="5303520" y="2834640"/>
+            <a:ext cx="6126480" cy="914400"/>
+          </a:xfrm>
+          <a:prstGeom prst="roundRect">
+            <a:avLst>
+              <a:gd name="adj" fmla="val 8000"/>
+            </a:avLst>
+          </a:prstGeom>
+          <a:solidFill>
+            <a:srgbClr val="1E293B"/>
+          </a:solidFill>
+          <a:ln w="19050">
+            <a:solidFill>
+              <a:srgbClr val="DC2626"/>
+            </a:solidFill>
+            <a:prstDash val="solid"/>
+          </a:ln>
+        </p:spPr>
       </p:sp>
       <p:sp>
         <p:nvSpPr>
@@ -6252,8 +5833,8 @@
         </p:nvSpPr>
         <p:spPr>
           <a:xfrm>
-            <a:off x="8183880" y="3108960"/>
-            <a:ext cx="2743200" cy="2468880"/>
+            <a:off x="5440680" y="2926080"/>
+            <a:ext cx="5852160" cy="731520"/>
           </a:xfrm>
           <a:prstGeom prst="rect">
             <a:avLst/>
@@ -6267,12 +5848,154 @@
           <a:p>
             <a:pPr indent="0" marL="0">
               <a:lnSpc>
-                <a:spcPts val="1800"/>
+                <a:spcPts val="1400"/>
               </a:lnSpc>
               <a:buNone/>
             </a:pPr>
             <a:r>
-              <a:rPr lang="en-US" sz="1100" dirty="0">
+              <a:rPr lang="en-US" sz="1000" b="1" dirty="0">
+                <a:solidFill>
+                  <a:srgbClr val="5EEAD4"/>
+                </a:solidFill>
+                <a:latin typeface="Arial" pitchFamily="34" charset="0"/>
+                <a:ea typeface="Arial" pitchFamily="34" charset="-122"/>
+                <a:cs typeface="Arial" pitchFamily="34" charset="-120"/>
+              </a:rPr>
+              <a:t>[2] بطاقة تقييم الأمان ➔ </a:t>
+            </a:r>
+            <a:pPr indent="0" marL="0">
+              <a:lnSpc>
+                <a:spcPts val="1400"/>
+              </a:lnSpc>
+              <a:buNone/>
+            </a:pPr>
+            <a:r>
+              <a:rPr lang="en-US" sz="950" dirty="0">
+                <a:solidFill>
+                  <a:srgbClr val="FFFFFF"/>
+                </a:solidFill>
+                <a:latin typeface="Arial" pitchFamily="34" charset="0"/>
+                <a:ea typeface="Arial" pitchFamily="34" charset="-122"/>
+                <a:cs typeface="Arial" pitchFamily="34" charset="-120"/>
+              </a:rPr>
+              <a:t>(ممنوع تماماً Contraindicated / تحذير وتعديل جرعة Caution / آمن Safe).</a:t>
+            </a:r>
+            <a:endParaRPr lang="en-US" sz="1000" dirty="0"/>
+          </a:p>
+        </p:txBody>
+      </p:sp>
+      <p:sp>
+        <p:nvSpPr>
+          <p:cNvPr id="16" name="Shape 14"/>
+          <p:cNvSpPr/>
+          <p:nvPr/>
+        </p:nvSpPr>
+        <p:spPr>
+          <a:xfrm>
+            <a:off x="5303520" y="3886200"/>
+            <a:ext cx="6126480" cy="914400"/>
+          </a:xfrm>
+          <a:prstGeom prst="roundRect">
+            <a:avLst>
+              <a:gd name="adj" fmla="val 8000"/>
+            </a:avLst>
+          </a:prstGeom>
+          <a:solidFill>
+            <a:srgbClr val="1E293B"/>
+          </a:solidFill>
+          <a:ln w="19050">
+            <a:solidFill>
+              <a:srgbClr val="10B981"/>
+            </a:solidFill>
+            <a:prstDash val="solid"/>
+          </a:ln>
+        </p:spPr>
+      </p:sp>
+      <p:sp>
+        <p:nvSpPr>
+          <p:cNvPr id="17" name="Text 15"/>
+          <p:cNvSpPr/>
+          <p:nvPr/>
+        </p:nvSpPr>
+        <p:spPr>
+          <a:xfrm>
+            <a:off x="5440680" y="3977640"/>
+            <a:ext cx="5852160" cy="731520"/>
+          </a:xfrm>
+          <a:prstGeom prst="rect">
+            <a:avLst/>
+          </a:prstGeom>
+          <a:noFill/>
+          <a:ln/>
+        </p:spPr>
+        <p:txBody>
+          <a:bodyPr wrap="square" rtlCol="0" anchor="ctr"/>
+          <a:lstStyle/>
+          <a:p>
+            <a:pPr indent="0" marL="0">
+              <a:lnSpc>
+                <a:spcPts val="1400"/>
+              </a:lnSpc>
+              <a:buNone/>
+            </a:pPr>
+            <a:r>
+              <a:rPr lang="en-US" sz="1000" b="1" dirty="0">
+                <a:solidFill>
+                  <a:srgbClr val="5EEAD4"/>
+                </a:solidFill>
+                <a:latin typeface="Arial" pitchFamily="34" charset="0"/>
+                <a:ea typeface="Arial" pitchFamily="34" charset="-122"/>
+                <a:cs typeface="Arial" pitchFamily="34" charset="-120"/>
+              </a:rPr>
+              <a:t>[3] إرشادات الجرعات الكلوية ➔ </a:t>
+            </a:r>
+            <a:pPr indent="0" marL="0">
+              <a:lnSpc>
+                <a:spcPts val="1400"/>
+              </a:lnSpc>
+              <a:buNone/>
+            </a:pPr>
+            <a:r>
+              <a:rPr lang="en-US" sz="950" dirty="0">
+                <a:solidFill>
+                  <a:srgbClr val="FFFFFF"/>
+                </a:solidFill>
+                <a:latin typeface="Arial" pitchFamily="34" charset="0"/>
+                <a:ea typeface="Arial" pitchFamily="34" charset="-122"/>
+                <a:cs typeface="Arial" pitchFamily="34" charset="-120"/>
+              </a:rPr>
+              <a:t>تحديد النسب والحدود الآمنة لـ CrCl لتجنب تراكم الدواء وسميته في الجسم.</a:t>
+            </a:r>
+            <a:endParaRPr lang="en-US" sz="1000" dirty="0"/>
+          </a:p>
+        </p:txBody>
+      </p:sp>
+      <p:sp>
+        <p:nvSpPr>
+          <p:cNvPr id="18" name="Text 16"/>
+          <p:cNvSpPr/>
+          <p:nvPr/>
+        </p:nvSpPr>
+        <p:spPr>
+          <a:xfrm>
+            <a:off x="548640" y="6446520"/>
+            <a:ext cx="11064240" cy="228600"/>
+          </a:xfrm>
+          <a:prstGeom prst="rect">
+            <a:avLst/>
+          </a:prstGeom>
+          <a:noFill/>
+          <a:ln/>
+        </p:spPr>
+        <p:txBody>
+          <a:bodyPr wrap="square" rtlCol="0" anchor="ctr"/>
+          <a:lstStyle/>
+          <a:p>
+            <a:pPr algn="l" indent="0" marL="0">
+              <a:buNone/>
+            </a:pPr>
+            <a:r>
+              <a:rPr lang="en-US" sz="850" dirty="0">
                 <a:solidFill>
                   <a:srgbClr val="64748B"/>
                 </a:solidFill>
@@ -6280,48 +6003,9 @@
                 <a:ea typeface="Arial" pitchFamily="34" charset="-122"/>
                 <a:cs typeface="Arial" pitchFamily="34" charset="-120"/>
               </a:rPr>
-              <a:t>Categorizes available Egyptian market equivalents into Economy (رخيص), Moderate (متوسط), and Premium (مرتفع) to provide affordable patient options.</a:t>
-            </a:r>
-            <a:endParaRPr lang="en-US" sz="1100" dirty="0"/>
-          </a:p>
-        </p:txBody>
-      </p:sp>
-      <p:sp>
-        <p:nvSpPr>
-          <p:cNvPr id="16" name="Text 14"/>
-          <p:cNvSpPr/>
-          <p:nvPr/>
-        </p:nvSpPr>
-        <p:spPr>
-          <a:xfrm>
-            <a:off x="731520" y="6400800"/>
-            <a:ext cx="10698480" cy="274320"/>
-          </a:xfrm>
-          <a:prstGeom prst="rect">
-            <a:avLst/>
-          </a:prstGeom>
-          <a:noFill/>
-          <a:ln/>
-        </p:spPr>
-        <p:txBody>
-          <a:bodyPr wrap="square" rtlCol="0" anchor="ctr"/>
-          <a:lstStyle/>
-          <a:p>
-            <a:pPr algn="l" indent="0" marL="0">
-              <a:buNone/>
-            </a:pPr>
-            <a:r>
-              <a:rPr lang="en-US" sz="900" dirty="0">
-                <a:solidFill>
-                  <a:srgbClr val="64748B"/>
-                </a:solidFill>
-                <a:latin typeface="Arial" pitchFamily="34" charset="0"/>
-                <a:ea typeface="Arial" pitchFamily="34" charset="-122"/>
-                <a:cs typeface="Arial" pitchFamily="34" charset="-120"/>
-              </a:rPr>
-              <a:t>Egyptian Chinese University (ECU) • Faculty of Pharmacy | Developed by Youssef Mohamed</a:t>
-            </a:r>
-            <a:endParaRPr lang="en-US" sz="900" dirty="0"/>
+              <a:t>كلية الصيدلة • الجامعة المصرية الصينية (ECU) | تطوير: يوسف محمد | YoPharma Clinical Suite</a:t>
+            </a:r>
+            <a:endParaRPr lang="en-US" sz="850" dirty="0"/>
           </a:p>
         </p:txBody>
       </p:sp>
@@ -6365,24 +6049,24 @@
         </p:nvSpPr>
         <p:spPr>
           <a:xfrm>
-            <a:off x="731520" y="365760"/>
-            <a:ext cx="9144000" cy="274320"/>
-          </a:xfrm>
-          <a:prstGeom prst="rect">
-            <a:avLst/>
-          </a:prstGeom>
-          <a:noFill/>
-          <a:ln/>
-        </p:spPr>
-        <p:txBody>
-          <a:bodyPr wrap="square" rtlCol="0" anchor="ctr"/>
-          <a:lstStyle/>
-          <a:p>
-            <a:pPr indent="0" marL="0">
-              <a:buNone/>
-            </a:pPr>
-            <a:r>
-              <a:rPr lang="en-US" sz="1000" b="1" dirty="0">
+            <a:off x="548640" y="320040"/>
+            <a:ext cx="9144000" cy="228600"/>
+          </a:xfrm>
+          <a:prstGeom prst="rect">
+            <a:avLst/>
+          </a:prstGeom>
+          <a:noFill/>
+          <a:ln/>
+        </p:spPr>
+        <p:txBody>
+          <a:bodyPr wrap="square" rtlCol="0" anchor="ctr"/>
+          <a:lstStyle/>
+          <a:p>
+            <a:pPr indent="0" marL="0">
+              <a:buNone/>
+            </a:pPr>
+            <a:r>
+              <a:rPr lang="en-US" sz="900" b="1" dirty="0">
                 <a:solidFill>
                   <a:srgbClr val="0D9488"/>
                 </a:solidFill>
@@ -6390,9 +6074,9 @@
                 <a:ea typeface="Arial" pitchFamily="34" charset="-122"/>
                 <a:cs typeface="Arial" pitchFamily="34" charset="-120"/>
               </a:rPr>
-              <a:t>YOPHARMA | CLINICAL PHARMACY SUITE</a:t>
-            </a:r>
-            <a:endParaRPr lang="en-US" sz="1000" dirty="0"/>
+              <a:t>YOPHARMA | دليل واجهات ومميزات المنصة</a:t>
+            </a:r>
+            <a:endParaRPr lang="en-US" sz="900" dirty="0"/>
           </a:p>
         </p:txBody>
       </p:sp>
@@ -6404,24 +6088,24 @@
         </p:nvSpPr>
         <p:spPr>
           <a:xfrm>
-            <a:off x="731520" y="640080"/>
-            <a:ext cx="10058400" cy="548640"/>
-          </a:xfrm>
-          <a:prstGeom prst="rect">
-            <a:avLst/>
-          </a:prstGeom>
-          <a:noFill/>
-          <a:ln/>
-        </p:spPr>
-        <p:txBody>
-          <a:bodyPr wrap="square" rtlCol="0" anchor="ctr"/>
-          <a:lstStyle/>
-          <a:p>
-            <a:pPr indent="0" marL="0">
-              <a:buNone/>
-            </a:pPr>
-            <a:r>
-              <a:rPr lang="en-US" sz="2200" b="1" dirty="0">
+            <a:off x="548640" y="548640"/>
+            <a:ext cx="10972800" cy="502920"/>
+          </a:xfrm>
+          <a:prstGeom prst="rect">
+            <a:avLst/>
+          </a:prstGeom>
+          <a:noFill/>
+          <a:ln/>
+        </p:spPr>
+        <p:txBody>
+          <a:bodyPr wrap="square" rtlCol="0" anchor="ctr"/>
+          <a:lstStyle/>
+          <a:p>
+            <a:pPr indent="0" marL="0">
+              <a:buNone/>
+            </a:pPr>
+            <a:r>
+              <a:rPr lang="en-US" sz="1800" b="1" dirty="0">
                 <a:solidFill>
                   <a:srgbClr val="0F172A"/>
                 </a:solidFill>
@@ -6429,9 +6113,9 @@
                 <a:ea typeface="Arial" pitchFamily="34" charset="-122"/>
                 <a:cs typeface="Arial" pitchFamily="34" charset="-120"/>
               </a:rPr>
-              <a:t>7. Modules 5 &amp; 6 — Chronic Safety &amp; Comparison Matrix</a:t>
-            </a:r>
-            <a:endParaRPr lang="en-US" sz="2200" dirty="0"/>
+              <a:t>7. مصفوفة المقارنة الدوائية السريرية المباشرة (Side-by-Side Comparison)</a:t>
+            </a:r>
+            <a:endParaRPr lang="en-US" sz="1800" dirty="0"/>
           </a:p>
         </p:txBody>
       </p:sp>
@@ -6443,16 +6127,16 @@
         </p:nvSpPr>
         <p:spPr>
           <a:xfrm>
-            <a:off x="731520" y="1234440"/>
-            <a:ext cx="10698480" cy="0"/>
+            <a:off x="548640" y="1097280"/>
+            <a:ext cx="11064240" cy="0"/>
           </a:xfrm>
           <a:prstGeom prst="line">
             <a:avLst/>
           </a:prstGeom>
           <a:noFill/>
-          <a:ln w="19050">
+          <a:ln w="15240">
             <a:solidFill>
-              <a:srgbClr val="E2E8F0"/>
+              <a:srgbClr val="CBD5E1"/>
             </a:solidFill>
             <a:prstDash val="solid"/>
           </a:ln>
@@ -6466,12 +6150,12 @@
         </p:nvSpPr>
         <p:spPr>
           <a:xfrm>
-            <a:off x="731520" y="1463040"/>
-            <a:ext cx="5120640" cy="4663440"/>
+            <a:off x="548640" y="1234440"/>
+            <a:ext cx="4389120" cy="5029200"/>
           </a:xfrm>
           <a:prstGeom prst="roundRect">
             <a:avLst>
-              <a:gd name="adj" fmla="val 2353"/>
+              <a:gd name="adj" fmla="val 2083"/>
             </a:avLst>
           </a:prstGeom>
           <a:solidFill>
@@ -6479,7 +6163,7 @@
           </a:solidFill>
           <a:ln w="12700">
             <a:solidFill>
-              <a:srgbClr val="E2E8F0"/>
+              <a:srgbClr val="CBD5E1"/>
             </a:solidFill>
             <a:prstDash val="solid"/>
           </a:ln>
@@ -6493,34 +6177,34 @@
         </p:nvSpPr>
         <p:spPr>
           <a:xfrm>
-            <a:off x="1005840" y="1645920"/>
-            <a:ext cx="4572000" cy="365760"/>
-          </a:xfrm>
-          <a:prstGeom prst="rect">
-            <a:avLst/>
-          </a:prstGeom>
-          <a:noFill/>
-          <a:ln/>
-        </p:spPr>
-        <p:txBody>
-          <a:bodyPr wrap="square" rtlCol="0" anchor="ctr"/>
-          <a:lstStyle/>
-          <a:p>
-            <a:pPr indent="0" marL="0">
-              <a:buNone/>
-            </a:pPr>
-            <a:r>
-              <a:rPr lang="en-US" sz="1400" b="1" dirty="0">
-                <a:solidFill>
-                  <a:srgbClr val="BE123C"/>
-                </a:solidFill>
-                <a:latin typeface="Arial" pitchFamily="34" charset="0"/>
-                <a:ea typeface="Arial" pitchFamily="34" charset="-122"/>
-                <a:cs typeface="Arial" pitchFamily="34" charset="-120"/>
-              </a:rPr>
-              <a:t>🛡️ Chronic Disease Safety Evaluator</a:t>
-            </a:r>
-            <a:endParaRPr lang="en-US" sz="1400" dirty="0"/>
+            <a:off x="731520" y="1371600"/>
+            <a:ext cx="4023360" cy="320040"/>
+          </a:xfrm>
+          <a:prstGeom prst="rect">
+            <a:avLst/>
+          </a:prstGeom>
+          <a:noFill/>
+          <a:ln/>
+        </p:spPr>
+        <p:txBody>
+          <a:bodyPr wrap="square" rtlCol="0" anchor="ctr"/>
+          <a:lstStyle/>
+          <a:p>
+            <a:pPr indent="0" marL="0">
+              <a:buNone/>
+            </a:pPr>
+            <a:r>
+              <a:rPr lang="en-US" sz="1300" b="1" dirty="0">
+                <a:solidFill>
+                  <a:srgbClr val="DC2626"/>
+                </a:solidFill>
+                <a:latin typeface="Arial" pitchFamily="34" charset="0"/>
+                <a:ea typeface="Arial" pitchFamily="34" charset="-122"/>
+                <a:cs typeface="Arial" pitchFamily="34" charset="-120"/>
+              </a:rPr>
+              <a:t>⚠️ المشكلة الواقعية:</a:t>
+            </a:r>
+            <a:endParaRPr lang="en-US" sz="1300" dirty="0"/>
           </a:p>
         </p:txBody>
       </p:sp>
@@ -6532,8 +6216,8 @@
         </p:nvSpPr>
         <p:spPr>
           <a:xfrm>
-            <a:off x="1005840" y="2103120"/>
-            <a:ext cx="4572000" cy="3840480"/>
+            <a:off x="731520" y="1691640"/>
+            <a:ext cx="4023360" cy="1097280"/>
           </a:xfrm>
           <a:prstGeom prst="rect">
             <a:avLst/>
@@ -6547,12 +6231,12 @@
           <a:p>
             <a:pPr indent="0" marL="0">
               <a:lnSpc>
-                <a:spcPts val="1800"/>
+                <a:spcPts val="1500"/>
               </a:lnSpc>
               <a:buNone/>
             </a:pPr>
             <a:r>
-              <a:rPr lang="en-US" sz="1100" b="1" dirty="0">
+              <a:rPr lang="en-US" sz="1050" dirty="0">
                 <a:solidFill>
                   <a:srgbClr val="0F172A"/>
                 </a:solidFill>
@@ -6560,17 +6244,80 @@
                 <a:ea typeface="Arial" pitchFamily="34" charset="-122"/>
                 <a:cs typeface="Arial" pitchFamily="34" charset="-120"/>
               </a:rPr>
-              <a:t>• Patient Comorbidity Matching:
-</a:t>
-            </a:r>
+              <a:t>الحيرة بين دوائين من نفس المجموعة الدوائية (مثل Concor vs Tenormin أو Augmentin vs Ciprofloxacin) وصعوبة تحديد الفروق الدقيقة في الجرعات والآثار الجانبية.</a:t>
+            </a:r>
+            <a:endParaRPr lang="en-US" sz="1050" dirty="0"/>
+          </a:p>
+        </p:txBody>
+      </p:sp>
+      <p:sp>
+        <p:nvSpPr>
+          <p:cNvPr id="8" name="Text 6"/>
+          <p:cNvSpPr/>
+          <p:nvPr/>
+        </p:nvSpPr>
+        <p:spPr>
+          <a:xfrm>
+            <a:off x="731520" y="2880360"/>
+            <a:ext cx="4023360" cy="320040"/>
+          </a:xfrm>
+          <a:prstGeom prst="rect">
+            <a:avLst/>
+          </a:prstGeom>
+          <a:noFill/>
+          <a:ln/>
+        </p:spPr>
+        <p:txBody>
+          <a:bodyPr wrap="square" rtlCol="0" anchor="ctr"/>
+          <a:lstStyle/>
+          <a:p>
+            <a:pPr indent="0" marL="0">
+              <a:buNone/>
+            </a:pPr>
+            <a:r>
+              <a:rPr lang="en-US" sz="1300" b="1" dirty="0">
+                <a:solidFill>
+                  <a:srgbClr val="0F766E"/>
+                </a:solidFill>
+                <a:latin typeface="Arial" pitchFamily="34" charset="0"/>
+                <a:ea typeface="Arial" pitchFamily="34" charset="-122"/>
+                <a:cs typeface="Arial" pitchFamily="34" charset="-120"/>
+              </a:rPr>
+              <a:t>✨ كيف تحل هذه الواجهة المشكلة؟</a:t>
+            </a:r>
+            <a:endParaRPr lang="en-US" sz="1300" dirty="0"/>
+          </a:p>
+        </p:txBody>
+      </p:sp>
+      <p:sp>
+        <p:nvSpPr>
+          <p:cNvPr id="9" name="Text 7"/>
+          <p:cNvSpPr/>
+          <p:nvPr/>
+        </p:nvSpPr>
+        <p:spPr>
+          <a:xfrm>
+            <a:off x="731520" y="3200400"/>
+            <a:ext cx="4023360" cy="1371600"/>
+          </a:xfrm>
+          <a:prstGeom prst="rect">
+            <a:avLst/>
+          </a:prstGeom>
+          <a:noFill/>
+          <a:ln/>
+        </p:spPr>
+        <p:txBody>
+          <a:bodyPr wrap="square" rtlCol="0" anchor="ctr"/>
+          <a:lstStyle/>
+          <a:p>
             <a:pPr indent="0" marL="0">
               <a:lnSpc>
-                <a:spcPts val="1800"/>
+                <a:spcPts val="1500"/>
               </a:lnSpc>
               <a:buNone/>
             </a:pPr>
             <a:r>
-              <a:rPr lang="en-US" sz="1100" dirty="0">
+              <a:rPr lang="en-US" sz="1050" dirty="0">
                 <a:solidFill>
                   <a:srgbClr val="0F172A"/>
                 </a:solidFill>
@@ -6578,106 +6325,34 @@
                 <a:ea typeface="Arial" pitchFamily="34" charset="-122"/>
                 <a:cs typeface="Arial" pitchFamily="34" charset="-120"/>
               </a:rPr>
-              <a:t>  Checks medications against Hypertension, Type 2 Diabetes, Chronic Kidney Disease (CKD), Hepatic Impairment, Peptic Ulcers, and Asthma.
-</a:t>
-            </a:r>
-            <a:pPr indent="0" marL="0">
-              <a:lnSpc>
-                <a:spcPts val="1800"/>
-              </a:lnSpc>
-              <a:buNone/>
-            </a:pPr>
-            <a:r>
-              <a:rPr lang="en-US" sz="1100" b="1" dirty="0">
-                <a:solidFill>
-                  <a:srgbClr val="0F172A"/>
-                </a:solidFill>
-                <a:latin typeface="Arial" pitchFamily="34" charset="0"/>
-                <a:ea typeface="Arial" pitchFamily="34" charset="-122"/>
-                <a:cs typeface="Arial" pitchFamily="34" charset="-120"/>
-              </a:rPr>
-              <a:t>• Contraindication Triage:
-</a:t>
-            </a:r>
-            <a:pPr indent="0" marL="0">
-              <a:lnSpc>
-                <a:spcPts val="1800"/>
-              </a:lnSpc>
-              <a:buNone/>
-            </a:pPr>
-            <a:r>
-              <a:rPr lang="en-US" sz="1100" dirty="0">
-                <a:solidFill>
-                  <a:srgbClr val="0F172A"/>
-                </a:solidFill>
-                <a:latin typeface="Arial" pitchFamily="34" charset="0"/>
-                <a:ea typeface="Arial" pitchFamily="34" charset="-122"/>
-                <a:cs typeface="Arial" pitchFamily="34" charset="-120"/>
-              </a:rPr>
-              <a:t>  Classifies as Safe (آمن), Caution/Adjust (تحذير وتعديل جرعة), or Strictly Contraindicated (ممنوع تماماً).
-</a:t>
-            </a:r>
-            <a:pPr indent="0" marL="0">
-              <a:lnSpc>
-                <a:spcPts val="1800"/>
-              </a:lnSpc>
-              <a:buNone/>
-            </a:pPr>
-            <a:r>
-              <a:rPr lang="en-US" sz="1100" b="1" dirty="0">
-                <a:solidFill>
-                  <a:srgbClr val="0F172A"/>
-                </a:solidFill>
-                <a:latin typeface="Arial" pitchFamily="34" charset="0"/>
-                <a:ea typeface="Arial" pitchFamily="34" charset="-122"/>
-                <a:cs typeface="Arial" pitchFamily="34" charset="-120"/>
-              </a:rPr>
-              <a:t>• Clinical Renal/Hepatic Notes:
-</a:t>
-            </a:r>
-            <a:pPr indent="0" marL="0">
-              <a:lnSpc>
-                <a:spcPts val="1800"/>
-              </a:lnSpc>
-              <a:buNone/>
-            </a:pPr>
-            <a:r>
-              <a:rPr lang="en-US" sz="1100" dirty="0">
-                <a:solidFill>
-                  <a:srgbClr val="0F172A"/>
-                </a:solidFill>
-                <a:latin typeface="Arial" pitchFamily="34" charset="0"/>
-                <a:ea typeface="Arial" pitchFamily="34" charset="-122"/>
-                <a:cs typeface="Arial" pitchFamily="34" charset="-120"/>
-              </a:rPr>
-              <a:t>  Provides CrCl cutoffs and dose reduction formulas.</a:t>
-            </a:r>
-            <a:endParaRPr lang="en-US" sz="1100" dirty="0"/>
-          </a:p>
-        </p:txBody>
-      </p:sp>
-      <p:sp>
-        <p:nvSpPr>
-          <p:cNvPr id="8" name="Shape 6"/>
-          <p:cNvSpPr/>
-          <p:nvPr/>
-        </p:nvSpPr>
-        <p:spPr>
-          <a:xfrm>
-            <a:off x="6217920" y="1463040"/>
-            <a:ext cx="5212080" cy="4663440"/>
+              <a:t>مصفوفة مقارنة عمودية تضع الدواءين وجهاً لوجه في جدول سريري يقارن: المادة الفعالة، دواعي الاستعمال، الجرعات، الآثار الجانبية، مع خلاصة وتوصية سريرية لاختيار الأنسب.</a:t>
+            </a:r>
+            <a:endParaRPr lang="en-US" sz="1050" dirty="0"/>
+          </a:p>
+        </p:txBody>
+      </p:sp>
+      <p:sp>
+        <p:nvSpPr>
+          <p:cNvPr id="10" name="Shape 8"/>
+          <p:cNvSpPr/>
+          <p:nvPr/>
+        </p:nvSpPr>
+        <p:spPr>
+          <a:xfrm>
+            <a:off x="5120640" y="1234440"/>
+            <a:ext cx="6492240" cy="5029200"/>
           </a:xfrm>
           <a:prstGeom prst="roundRect">
             <a:avLst>
-              <a:gd name="adj" fmla="val 2353"/>
+              <a:gd name="adj" fmla="val 1818"/>
             </a:avLst>
           </a:prstGeom>
           <a:solidFill>
-            <a:srgbClr val="FFFFFF"/>
+            <a:srgbClr val="0F172A"/>
           </a:solidFill>
           <a:ln w="12700">
             <a:solidFill>
-              <a:srgbClr val="E2E8F0"/>
+              <a:srgbClr val="334155"/>
             </a:solidFill>
             <a:prstDash val="solid"/>
           </a:ln>
@@ -6685,53 +6360,80 @@
       </p:sp>
       <p:sp>
         <p:nvSpPr>
-          <p:cNvPr id="9" name="Text 7"/>
-          <p:cNvSpPr/>
-          <p:nvPr/>
-        </p:nvSpPr>
-        <p:spPr>
-          <a:xfrm>
-            <a:off x="6492240" y="1645920"/>
-            <a:ext cx="4663440" cy="365760"/>
-          </a:xfrm>
-          <a:prstGeom prst="rect">
-            <a:avLst/>
-          </a:prstGeom>
-          <a:noFill/>
-          <a:ln/>
-        </p:spPr>
-        <p:txBody>
-          <a:bodyPr wrap="square" rtlCol="0" anchor="ctr"/>
-          <a:lstStyle/>
-          <a:p>
-            <a:pPr indent="0" marL="0">
-              <a:buNone/>
-            </a:pPr>
-            <a:r>
-              <a:rPr lang="en-US" sz="1400" b="1" dirty="0">
-                <a:solidFill>
-                  <a:srgbClr val="2563EB"/>
-                </a:solidFill>
-                <a:latin typeface="Arial" pitchFamily="34" charset="0"/>
-                <a:ea typeface="Arial" pitchFamily="34" charset="-122"/>
-                <a:cs typeface="Arial" pitchFamily="34" charset="-120"/>
-              </a:rPr>
-              <a:t>⚖️ Side-by-Side Comparison Matrix</a:t>
-            </a:r>
-            <a:endParaRPr lang="en-US" sz="1400" dirty="0"/>
-          </a:p>
-        </p:txBody>
-      </p:sp>
-      <p:sp>
-        <p:nvSpPr>
-          <p:cNvPr id="10" name="Text 8"/>
-          <p:cNvSpPr/>
-          <p:nvPr/>
-        </p:nvSpPr>
-        <p:spPr>
-          <a:xfrm>
-            <a:off x="6492240" y="2103120"/>
-            <a:ext cx="4663440" cy="3840480"/>
+          <p:cNvPr id="11" name="Text 9"/>
+          <p:cNvSpPr/>
+          <p:nvPr/>
+        </p:nvSpPr>
+        <p:spPr>
+          <a:xfrm>
+            <a:off x="5303520" y="1371600"/>
+            <a:ext cx="6126480" cy="320040"/>
+          </a:xfrm>
+          <a:prstGeom prst="rect">
+            <a:avLst/>
+          </a:prstGeom>
+          <a:noFill/>
+          <a:ln/>
+        </p:spPr>
+        <p:txBody>
+          <a:bodyPr wrap="square" rtlCol="0" anchor="ctr"/>
+          <a:lstStyle/>
+          <a:p>
+            <a:pPr indent="0" marL="0">
+              <a:buNone/>
+            </a:pPr>
+            <a:r>
+              <a:rPr lang="en-US" sz="1200" b="1" dirty="0">
+                <a:solidFill>
+                  <a:srgbClr val="5EEAD4"/>
+                </a:solidFill>
+                <a:latin typeface="Arial" pitchFamily="34" charset="0"/>
+                <a:ea typeface="Arial" pitchFamily="34" charset="-122"/>
+                <a:cs typeface="Arial" pitchFamily="34" charset="-120"/>
+              </a:rPr>
+              <a:t>🖥️ تشريح واجهة مصفوفة المقارنة المباشرة (UI Breakdown):</a:t>
+            </a:r>
+            <a:endParaRPr lang="en-US" sz="1200" dirty="0"/>
+          </a:p>
+        </p:txBody>
+      </p:sp>
+      <p:sp>
+        <p:nvSpPr>
+          <p:cNvPr id="12" name="Shape 10"/>
+          <p:cNvSpPr/>
+          <p:nvPr/>
+        </p:nvSpPr>
+        <p:spPr>
+          <a:xfrm>
+            <a:off x="5303520" y="1783080"/>
+            <a:ext cx="6126480" cy="914400"/>
+          </a:xfrm>
+          <a:prstGeom prst="roundRect">
+            <a:avLst>
+              <a:gd name="adj" fmla="val 8000"/>
+            </a:avLst>
+          </a:prstGeom>
+          <a:solidFill>
+            <a:srgbClr val="1E293B"/>
+          </a:solidFill>
+          <a:ln w="19050">
+            <a:solidFill>
+              <a:srgbClr val="2563EB"/>
+            </a:solidFill>
+            <a:prstDash val="solid"/>
+          </a:ln>
+        </p:spPr>
+      </p:sp>
+      <p:sp>
+        <p:nvSpPr>
+          <p:cNvPr id="13" name="Text 11"/>
+          <p:cNvSpPr/>
+          <p:nvPr/>
+        </p:nvSpPr>
+        <p:spPr>
+          <a:xfrm>
+            <a:off x="5440680" y="1874520"/>
+            <a:ext cx="5852160" cy="731520"/>
           </a:xfrm>
           <a:prstGeom prst="rect">
             <a:avLst/>
@@ -6745,125 +6447,224 @@
           <a:p>
             <a:pPr indent="0" marL="0">
               <a:lnSpc>
-                <a:spcPts val="1800"/>
+                <a:spcPts val="1400"/>
               </a:lnSpc>
               <a:buNone/>
             </a:pPr>
             <a:r>
-              <a:rPr lang="en-US" sz="1100" b="1" dirty="0">
-                <a:solidFill>
-                  <a:srgbClr val="0F172A"/>
-                </a:solidFill>
-                <a:latin typeface="Arial" pitchFamily="34" charset="0"/>
-                <a:ea typeface="Arial" pitchFamily="34" charset="-122"/>
-                <a:cs typeface="Arial" pitchFamily="34" charset="-120"/>
-              </a:rPr>
-              <a:t>• Head-to-Head Evaluation:
-</a:t>
+              <a:rPr lang="en-US" sz="1000" b="1" dirty="0">
+                <a:solidFill>
+                  <a:srgbClr val="5EEAD4"/>
+                </a:solidFill>
+                <a:latin typeface="Arial" pitchFamily="34" charset="0"/>
+                <a:ea typeface="Arial" pitchFamily="34" charset="-122"/>
+                <a:cs typeface="Arial" pitchFamily="34" charset="-120"/>
+              </a:rPr>
+              <a:t>[1] حقلا اختيار الدواءين ➔ </a:t>
             </a:r>
             <a:pPr indent="0" marL="0">
               <a:lnSpc>
-                <a:spcPts val="1800"/>
+                <a:spcPts val="1400"/>
               </a:lnSpc>
               <a:buNone/>
             </a:pPr>
             <a:r>
-              <a:rPr lang="en-US" sz="1100" dirty="0">
-                <a:solidFill>
-                  <a:srgbClr val="0F172A"/>
-                </a:solidFill>
-                <a:latin typeface="Arial" pitchFamily="34" charset="0"/>
-                <a:ea typeface="Arial" pitchFamily="34" charset="-122"/>
-                <a:cs typeface="Arial" pitchFamily="34" charset="-120"/>
-              </a:rPr>
-              <a:t>  Compare any two drugs (e.g. Concor vs Tenormin, Augmentin vs Cipro, Panadol vs Cataflam).
-</a:t>
-            </a:r>
+              <a:rPr lang="en-US" sz="950" dirty="0">
+                <a:solidFill>
+                  <a:srgbClr val="FFFFFF"/>
+                </a:solidFill>
+                <a:latin typeface="Arial" pitchFamily="34" charset="0"/>
+                <a:ea typeface="Arial" pitchFamily="34" charset="-122"/>
+                <a:cs typeface="Arial" pitchFamily="34" charset="-120"/>
+              </a:rPr>
+              <a:t>إدخال الدواء (أ) والدواء (ب) مع اقتراحات الإكمال التلقائي الذكية.</a:t>
+            </a:r>
+            <a:endParaRPr lang="en-US" sz="1000" dirty="0"/>
+          </a:p>
+        </p:txBody>
+      </p:sp>
+      <p:sp>
+        <p:nvSpPr>
+          <p:cNvPr id="14" name="Shape 12"/>
+          <p:cNvSpPr/>
+          <p:nvPr/>
+        </p:nvSpPr>
+        <p:spPr>
+          <a:xfrm>
+            <a:off x="5303520" y="2834640"/>
+            <a:ext cx="6126480" cy="914400"/>
+          </a:xfrm>
+          <a:prstGeom prst="roundRect">
+            <a:avLst>
+              <a:gd name="adj" fmla="val 8000"/>
+            </a:avLst>
+          </a:prstGeom>
+          <a:solidFill>
+            <a:srgbClr val="1E293B"/>
+          </a:solidFill>
+          <a:ln w="19050">
+            <a:solidFill>
+              <a:srgbClr val="38BDF8"/>
+            </a:solidFill>
+            <a:prstDash val="solid"/>
+          </a:ln>
+        </p:spPr>
+      </p:sp>
+      <p:sp>
+        <p:nvSpPr>
+          <p:cNvPr id="15" name="Text 13"/>
+          <p:cNvSpPr/>
+          <p:nvPr/>
+        </p:nvSpPr>
+        <p:spPr>
+          <a:xfrm>
+            <a:off x="5440680" y="2926080"/>
+            <a:ext cx="5852160" cy="731520"/>
+          </a:xfrm>
+          <a:prstGeom prst="rect">
+            <a:avLst/>
+          </a:prstGeom>
+          <a:noFill/>
+          <a:ln/>
+        </p:spPr>
+        <p:txBody>
+          <a:bodyPr wrap="square" rtlCol="0" anchor="ctr"/>
+          <a:lstStyle/>
+          <a:p>
             <a:pPr indent="0" marL="0">
               <a:lnSpc>
-                <a:spcPts val="1800"/>
+                <a:spcPts val="1400"/>
               </a:lnSpc>
               <a:buNone/>
             </a:pPr>
             <a:r>
-              <a:rPr lang="en-US" sz="1100" b="1" dirty="0">
-                <a:solidFill>
-                  <a:srgbClr val="0F172A"/>
-                </a:solidFill>
-                <a:latin typeface="Arial" pitchFamily="34" charset="0"/>
-                <a:ea typeface="Arial" pitchFamily="34" charset="-122"/>
-                <a:cs typeface="Arial" pitchFamily="34" charset="-120"/>
-              </a:rPr>
-              <a:t>• Structured Feature Matrix:
-</a:t>
+              <a:rPr lang="en-US" sz="1000" b="1" dirty="0">
+                <a:solidFill>
+                  <a:srgbClr val="5EEAD4"/>
+                </a:solidFill>
+                <a:latin typeface="Arial" pitchFamily="34" charset="0"/>
+                <a:ea typeface="Arial" pitchFamily="34" charset="-122"/>
+                <a:cs typeface="Arial" pitchFamily="34" charset="-120"/>
+              </a:rPr>
+              <a:t>[2] جدول المقارنة العمودي ➔ </a:t>
             </a:r>
             <a:pPr indent="0" marL="0">
               <a:lnSpc>
-                <a:spcPts val="1800"/>
+                <a:spcPts val="1400"/>
               </a:lnSpc>
               <a:buNone/>
             </a:pPr>
             <a:r>
-              <a:rPr lang="en-US" sz="1100" dirty="0">
-                <a:solidFill>
-                  <a:srgbClr val="0F172A"/>
-                </a:solidFill>
-                <a:latin typeface="Arial" pitchFamily="34" charset="0"/>
-                <a:ea typeface="Arial" pitchFamily="34" charset="-122"/>
-                <a:cs typeface="Arial" pitchFamily="34" charset="-120"/>
-              </a:rPr>
-              <a:t>  Direct side-by-side comparison of active ingredients, therapeutic class, standard dosage, side-effect profiles, and precautions.
-</a:t>
-            </a:r>
+              <a:rPr lang="en-US" sz="950" dirty="0">
+                <a:solidFill>
+                  <a:srgbClr val="FFFFFF"/>
+                </a:solidFill>
+                <a:latin typeface="Arial" pitchFamily="34" charset="0"/>
+                <a:ea typeface="Arial" pitchFamily="34" charset="-122"/>
+                <a:cs typeface="Arial" pitchFamily="34" charset="-120"/>
+              </a:rPr>
+              <a:t>مقارنة تفصيلية في المادة الفعالة، الاستخدامات، الآثار الجانبية، وموانع الاستعمال.</a:t>
+            </a:r>
+            <a:endParaRPr lang="en-US" sz="1000" dirty="0"/>
+          </a:p>
+        </p:txBody>
+      </p:sp>
+      <p:sp>
+        <p:nvSpPr>
+          <p:cNvPr id="16" name="Shape 14"/>
+          <p:cNvSpPr/>
+          <p:nvPr/>
+        </p:nvSpPr>
+        <p:spPr>
+          <a:xfrm>
+            <a:off x="5303520" y="3886200"/>
+            <a:ext cx="6126480" cy="914400"/>
+          </a:xfrm>
+          <a:prstGeom prst="roundRect">
+            <a:avLst>
+              <a:gd name="adj" fmla="val 8000"/>
+            </a:avLst>
+          </a:prstGeom>
+          <a:solidFill>
+            <a:srgbClr val="1E293B"/>
+          </a:solidFill>
+          <a:ln w="19050">
+            <a:solidFill>
+              <a:srgbClr val="10B981"/>
+            </a:solidFill>
+            <a:prstDash val="solid"/>
+          </a:ln>
+        </p:spPr>
+      </p:sp>
+      <p:sp>
+        <p:nvSpPr>
+          <p:cNvPr id="17" name="Text 15"/>
+          <p:cNvSpPr/>
+          <p:nvPr/>
+        </p:nvSpPr>
+        <p:spPr>
+          <a:xfrm>
+            <a:off x="5440680" y="3977640"/>
+            <a:ext cx="5852160" cy="731520"/>
+          </a:xfrm>
+          <a:prstGeom prst="rect">
+            <a:avLst/>
+          </a:prstGeom>
+          <a:noFill/>
+          <a:ln/>
+        </p:spPr>
+        <p:txBody>
+          <a:bodyPr wrap="square" rtlCol="0" anchor="ctr"/>
+          <a:lstStyle/>
+          <a:p>
             <a:pPr indent="0" marL="0">
               <a:lnSpc>
-                <a:spcPts val="1800"/>
+                <a:spcPts val="1400"/>
               </a:lnSpc>
               <a:buNone/>
             </a:pPr>
             <a:r>
-              <a:rPr lang="en-US" sz="1100" b="1" dirty="0">
-                <a:solidFill>
-                  <a:srgbClr val="0F172A"/>
-                </a:solidFill>
-                <a:latin typeface="Arial" pitchFamily="34" charset="0"/>
-                <a:ea typeface="Arial" pitchFamily="34" charset="-122"/>
-                <a:cs typeface="Arial" pitchFamily="34" charset="-120"/>
-              </a:rPr>
-              <a:t>• Clinical Recommendation Verdict:
-</a:t>
+              <a:rPr lang="en-US" sz="1000" b="1" dirty="0">
+                <a:solidFill>
+                  <a:srgbClr val="5EEAD4"/>
+                </a:solidFill>
+                <a:latin typeface="Arial" pitchFamily="34" charset="0"/>
+                <a:ea typeface="Arial" pitchFamily="34" charset="-122"/>
+                <a:cs typeface="Arial" pitchFamily="34" charset="-120"/>
+              </a:rPr>
+              <a:t>[3] التوصية السريرية النهائية ➔ </a:t>
             </a:r>
             <a:pPr indent="0" marL="0">
               <a:lnSpc>
-                <a:spcPts val="1800"/>
+                <a:spcPts val="1400"/>
               </a:lnSpc>
               <a:buNone/>
             </a:pPr>
             <a:r>
-              <a:rPr lang="en-US" sz="1100" dirty="0">
-                <a:solidFill>
-                  <a:srgbClr val="0F172A"/>
-                </a:solidFill>
-                <a:latin typeface="Arial" pitchFamily="34" charset="0"/>
-                <a:ea typeface="Arial" pitchFamily="34" charset="-122"/>
-                <a:cs typeface="Arial" pitchFamily="34" charset="-120"/>
-              </a:rPr>
-              <a:t>  Provides evidence-based summary on when to favor one drug over the other.</a:t>
-            </a:r>
-            <a:endParaRPr lang="en-US" sz="1100" dirty="0"/>
-          </a:p>
-        </p:txBody>
-      </p:sp>
-      <p:sp>
-        <p:nvSpPr>
-          <p:cNvPr id="11" name="Text 9"/>
-          <p:cNvSpPr/>
-          <p:nvPr/>
-        </p:nvSpPr>
-        <p:spPr>
-          <a:xfrm>
-            <a:off x="731520" y="6400800"/>
-            <a:ext cx="10698480" cy="274320"/>
+              <a:rPr lang="en-US" sz="950" dirty="0">
+                <a:solidFill>
+                  <a:srgbClr val="FFFFFF"/>
+                </a:solidFill>
+                <a:latin typeface="Arial" pitchFamily="34" charset="0"/>
+                <a:ea typeface="Arial" pitchFamily="34" charset="-122"/>
+                <a:cs typeface="Arial" pitchFamily="34" charset="-120"/>
+              </a:rPr>
+              <a:t>خلاصة توضح متى يُفضل الدواء (أ) ومتى يُفضل الدواء (ب) وفق الحالة الصحية.</a:t>
+            </a:r>
+            <a:endParaRPr lang="en-US" sz="1000" dirty="0"/>
+          </a:p>
+        </p:txBody>
+      </p:sp>
+      <p:sp>
+        <p:nvSpPr>
+          <p:cNvPr id="18" name="Text 16"/>
+          <p:cNvSpPr/>
+          <p:nvPr/>
+        </p:nvSpPr>
+        <p:spPr>
+          <a:xfrm>
+            <a:off x="548640" y="6446520"/>
+            <a:ext cx="11064240" cy="228600"/>
           </a:xfrm>
           <a:prstGeom prst="rect">
             <a:avLst/>
@@ -6879,7 +6680,7 @@
               <a:buNone/>
             </a:pPr>
             <a:r>
-              <a:rPr lang="en-US" sz="900" dirty="0">
+              <a:rPr lang="en-US" sz="850" dirty="0">
                 <a:solidFill>
                   <a:srgbClr val="64748B"/>
                 </a:solidFill>
@@ -6887,9 +6688,9 @@
                 <a:ea typeface="Arial" pitchFamily="34" charset="-122"/>
                 <a:cs typeface="Arial" pitchFamily="34" charset="-120"/>
               </a:rPr>
-              <a:t>Egyptian Chinese University (ECU) • Faculty of Pharmacy | Developed by Youssef Mohamed</a:t>
-            </a:r>
-            <a:endParaRPr lang="en-US" sz="900" dirty="0"/>
+              <a:t>كلية الصيدلة • الجامعة المصرية الصينية (ECU) | تطوير: يوسف محمد | YoPharma Clinical Suite</a:t>
+            </a:r>
+            <a:endParaRPr lang="en-US" sz="850" dirty="0"/>
           </a:p>
         </p:txBody>
       </p:sp>
@@ -6958,7 +6759,7 @@
                 <a:ea typeface="Arial" pitchFamily="34" charset="-122"/>
                 <a:cs typeface="Arial" pitchFamily="34" charset="-120"/>
               </a:rPr>
-              <a:t>ACADEMIC IMPACT &amp; SUMMARY</a:t>
+              <a:t>خاتمة المشروع والأثر الأكاديمي</a:t>
             </a:r>
             <a:endParaRPr lang="en-US" sz="1200" dirty="0"/>
           </a:p>
@@ -6989,7 +6790,7 @@
               <a:buNone/>
             </a:pPr>
             <a:r>
-              <a:rPr lang="en-US" sz="2600" b="1" dirty="0">
+              <a:rPr lang="en-US" sz="2400" b="1" dirty="0">
                 <a:solidFill>
                   <a:srgbClr val="FFFFFF"/>
                 </a:solidFill>
@@ -6997,9 +6798,9 @@
                 <a:ea typeface="Arial" pitchFamily="34" charset="-122"/>
                 <a:cs typeface="Arial" pitchFamily="34" charset="-120"/>
               </a:rPr>
-              <a:t>YoPharma — Empowering Egyptian Pharmacy Practice</a:t>
-            </a:r>
-            <a:endParaRPr lang="en-US" sz="2600" dirty="0"/>
+              <a:t>YoPharma — منظومة سريرية متكاملة لخدمة الصيدلة في مصر</a:t>
+            </a:r>
+            <a:endParaRPr lang="en-US" sz="2400" dirty="0"/>
           </a:p>
         </p:txBody>
       </p:sp>
@@ -7063,7 +6864,7 @@
                 <a:ea typeface="Arial" pitchFamily="34" charset="-122"/>
                 <a:cs typeface="Arial" pitchFamily="34" charset="-120"/>
               </a:rPr>
-              <a:t>🎓 Faculty Educational Tool</a:t>
+              <a:t>🎓 تدريب سريري تفاعلي</a:t>
             </a:r>
             <a:endParaRPr lang="en-US" sz="1300" dirty="0"/>
           </a:p>
@@ -7105,7 +6906,7 @@
                 <a:ea typeface="Arial" pitchFamily="34" charset="-122"/>
                 <a:cs typeface="Arial" pitchFamily="34" charset="-120"/>
               </a:rPr>
-              <a:t>Designed for pharmacy students at ECU for clinical training, OSCE exam prep, and prescription audit practice.</a:t>
+              <a:t>أداة تعليمية وتطبيقية لطلاب كليات الصيدلة أثناء التدريب الميداني والتحضير للامتحانات السريرية OSCE.</a:t>
             </a:r>
             <a:endParaRPr lang="en-US" sz="1100" dirty="0"/>
           </a:p>
@@ -7171,7 +6972,7 @@
                 <a:ea typeface="Arial" pitchFamily="34" charset="-122"/>
                 <a:cs typeface="Arial" pitchFamily="34" charset="-120"/>
               </a:rPr>
-              <a:t>🏥 Dispensary Clinical Decision Support</a:t>
+              <a:t>🏥 دعم القرار بالصيدليات</a:t>
             </a:r>
             <a:endParaRPr lang="en-US" sz="1300" dirty="0"/>
           </a:p>
@@ -7213,7 +7014,7 @@
                 <a:ea typeface="Arial" pitchFamily="34" charset="-122"/>
                 <a:cs typeface="Arial" pitchFamily="34" charset="-120"/>
               </a:rPr>
-              <a:t>Enables hospital &amp; community pharmacists to prevent medication errors, drug toxicities, and food-timing failures in real time.</a:t>
+              <a:t>حماية المرضى من أخطاء التداخلات الدوائية ومواعيد الطعام واختيار البدائل الاقتصادية في ثوانٍ معدودة.</a:t>
             </a:r>
             <a:endParaRPr lang="en-US" sz="1100" dirty="0"/>
           </a:p>
@@ -7279,7 +7080,7 @@
                 <a:ea typeface="Arial" pitchFamily="34" charset="-122"/>
                 <a:cs typeface="Arial" pitchFamily="34" charset="-120"/>
               </a:rPr>
-              <a:t>🚀 High-Speed Reliable Tech</a:t>
+              <a:t>⚡ أداء فائق واعتمادية</a:t>
             </a:r>
             <a:endParaRPr lang="en-US" sz="1300" dirty="0"/>
           </a:p>
@@ -7321,7 +7122,7 @@
                 <a:ea typeface="Arial" pitchFamily="34" charset="-122"/>
                 <a:cs typeface="Arial" pitchFamily="34" charset="-120"/>
               </a:rPr>
-              <a:t>Sub-millisecond RAM caching, automated fallback AI rotation, bilingual data sync, and 100% responsive design.</a:t>
+              <a:t>كاش RAM تحت الملي ثانية، قاعدة بيانات دائمة، وتدوير ذكي لنماذج الذكاء الاصطناعي لمنع أي توقف.</a:t>
             </a:r>
             <a:endParaRPr lang="en-US" sz="1100" dirty="0"/>
           </a:p>
@@ -7387,7 +7188,7 @@
                 <a:ea typeface="Arial" pitchFamily="34" charset="-122"/>
                 <a:cs typeface="Arial" pitchFamily="34" charset="-120"/>
               </a:rPr>
-              <a:t>Developed by: </a:t>
+              <a:t>تطوير: </a:t>
             </a:r>
             <a:pPr algn="ctr" indent="0" marL="0">
               <a:buNone/>
@@ -7401,7 +7202,7 @@
                 <a:ea typeface="Arial" pitchFamily="34" charset="-122"/>
                 <a:cs typeface="Arial" pitchFamily="34" charset="-120"/>
               </a:rPr>
-              <a:t>Youssef Mohamed  |  </a:t>
+              <a:t>يوسف محمد  |  </a:t>
             </a:r>
             <a:pPr algn="ctr" indent="0" marL="0">
               <a:buNone/>
@@ -7415,7 +7216,7 @@
                 <a:ea typeface="Arial" pitchFamily="34" charset="-122"/>
                 <a:cs typeface="Arial" pitchFamily="34" charset="-120"/>
               </a:rPr>
-              <a:t>Academic Institution: </a:t>
+              <a:t>المؤسسة الأكاديمية: </a:t>
             </a:r>
             <a:pPr algn="ctr" indent="0" marL="0">
               <a:buNone/>
@@ -7429,7 +7230,7 @@
                 <a:ea typeface="Arial" pitchFamily="34" charset="-122"/>
                 <a:cs typeface="Arial" pitchFamily="34" charset="-120"/>
               </a:rPr>
-              <a:t>Egyptian Chinese University (ECU)  |  </a:t>
+              <a:t>كلية الصيدلة - الجامعة المصرية الصينية (ECU)  |  </a:t>
             </a:r>
             <a:pPr algn="ctr" indent="0" marL="0">
               <a:buNone/>
@@ -7443,7 +7244,7 @@
                 <a:ea typeface="Arial" pitchFamily="34" charset="-122"/>
                 <a:cs typeface="Arial" pitchFamily="34" charset="-120"/>
               </a:rPr>
-              <a:t>WhatsApp Support: </a:t>
+              <a:t>الدعم والتواصل: </a:t>
             </a:r>
             <a:pPr algn="ctr" indent="0" marL="0">
               <a:buNone/>
